--- a/analytics_dashboards.pptx
+++ b/analytics_dashboards.pptx
@@ -245,6 +245,11 @@
       </a:defRPr>
     </a:lvl9pPr>
   </p:defaultTextStyle>
+  <p:extLst>
+    <p:ext uri="{EFAFB233-063F-42B5-8137-9DF3F51BA10A}">
+      <p15:sldGuideLst xmlns:p15="http://schemas.microsoft.com/office/powerpoint/2012/main"/>
+    </p:ext>
+  </p:extLst>
 </p:presentation>
 </file>
 
@@ -17959,7 +17964,7 @@
               <a:buNone/>
             </a:pPr>
             <a:r>
-              <a:rPr lang="en-US" sz="2400" b="1">
+              <a:rPr lang="en-US" sz="2400" b="1" dirty="0">
                 <a:latin typeface="Calibri"/>
                 <a:ea typeface="Calibri"/>
                 <a:cs typeface="Calibri"/>
@@ -17967,7 +17972,7 @@
               </a:rPr>
               <a:t>Open Source for building dashboards</a:t>
             </a:r>
-            <a:endParaRPr sz="2400" b="1">
+            <a:endParaRPr sz="2400" b="1" dirty="0">
               <a:latin typeface="Calibri"/>
               <a:ea typeface="Calibri"/>
               <a:cs typeface="Calibri"/>
@@ -17984,7 +17989,7 @@
               </a:spcAft>
               <a:buNone/>
             </a:pPr>
-            <a:endParaRPr sz="1800">
+            <a:endParaRPr sz="1800" dirty="0">
               <a:latin typeface="Calibri"/>
               <a:ea typeface="Calibri"/>
               <a:cs typeface="Calibri"/>
@@ -18002,15 +18007,24 @@
               <a:buNone/>
             </a:pPr>
             <a:r>
-              <a:rPr lang="en-US" sz="1800">
+              <a:rPr lang="en-US" sz="1800" dirty="0" err="1">
                 <a:latin typeface="Calibri"/>
                 <a:ea typeface="Calibri"/>
                 <a:cs typeface="Calibri"/>
                 <a:sym typeface="Calibri"/>
               </a:rPr>
-              <a:t>Jupyter:</a:t>
+              <a:t>Jupyter</a:t>
             </a:r>
-            <a:endParaRPr sz="1800">
+            <a:r>
+              <a:rPr lang="en-US" sz="1800" dirty="0">
+                <a:latin typeface="Calibri"/>
+                <a:ea typeface="Calibri"/>
+                <a:cs typeface="Calibri"/>
+                <a:sym typeface="Calibri"/>
+              </a:rPr>
+              <a:t>:</a:t>
+            </a:r>
+            <a:endParaRPr sz="1800" dirty="0">
               <a:latin typeface="Calibri"/>
               <a:ea typeface="Calibri"/>
               <a:cs typeface="Calibri"/>
@@ -18030,16 +18044,25 @@
               <a:buChar char="●"/>
             </a:pPr>
             <a:r>
-              <a:rPr lang="en-US" sz="1800">
+              <a:rPr lang="en-US" sz="1800" dirty="0" err="1">
                 <a:latin typeface="Calibri"/>
                 <a:ea typeface="Calibri"/>
                 <a:cs typeface="Calibri"/>
                 <a:sym typeface="Calibri"/>
               </a:rPr>
-              <a:t>Jupyter notebooks and dashboards - </a:t>
+              <a:t>Jupyter</a:t>
             </a:r>
             <a:r>
-              <a:rPr lang="en-US" sz="1800" u="sng">
+              <a:rPr lang="en-US" sz="1800" dirty="0">
+                <a:latin typeface="Calibri"/>
+                <a:ea typeface="Calibri"/>
+                <a:cs typeface="Calibri"/>
+                <a:sym typeface="Calibri"/>
+              </a:rPr>
+              <a:t> notebooks and dashboards - </a:t>
+            </a:r>
+            <a:r>
+              <a:rPr lang="en-US" sz="1800" u="sng" dirty="0">
                 <a:solidFill>
                   <a:schemeClr val="hlink"/>
                 </a:solidFill>
@@ -18052,7 +18075,7 @@
               <a:t>https://annefou.github.io/jupyter_dashboards/02-dashboards/index.html</a:t>
             </a:r>
             <a:r>
-              <a:rPr lang="en-US" sz="1800">
+              <a:rPr lang="en-US" sz="1800" dirty="0">
                 <a:latin typeface="Calibri"/>
                 <a:ea typeface="Calibri"/>
                 <a:cs typeface="Calibri"/>
@@ -18060,7 +18083,7 @@
               </a:rPr>
               <a:t> </a:t>
             </a:r>
-            <a:endParaRPr sz="1800">
+            <a:endParaRPr sz="1800" dirty="0">
               <a:latin typeface="Calibri"/>
               <a:ea typeface="Calibri"/>
               <a:cs typeface="Calibri"/>
@@ -18080,16 +18103,25 @@
               <a:buChar char="●"/>
             </a:pPr>
             <a:r>
-              <a:rPr lang="en-US" sz="1800">
+              <a:rPr lang="en-US" sz="1800" dirty="0" err="1">
                 <a:latin typeface="Calibri"/>
                 <a:ea typeface="Calibri"/>
                 <a:cs typeface="Calibri"/>
                 <a:sym typeface="Calibri"/>
               </a:rPr>
-              <a:t>Jupyter Lab - </a:t>
+              <a:t>Jupyter</a:t>
             </a:r>
             <a:r>
-              <a:rPr lang="en-US" sz="1800" u="sng">
+              <a:rPr lang="en-US" sz="1800" dirty="0">
+                <a:latin typeface="Calibri"/>
+                <a:ea typeface="Calibri"/>
+                <a:cs typeface="Calibri"/>
+                <a:sym typeface="Calibri"/>
+              </a:rPr>
+              <a:t> Lab - </a:t>
+            </a:r>
+            <a:r>
+              <a:rPr lang="en-US" sz="1800" u="sng" dirty="0">
                 <a:solidFill>
                   <a:schemeClr val="hlink"/>
                 </a:solidFill>
@@ -18102,7 +18134,7 @@
               <a:t>https://jupyterlab.readthedocs.io/en/stable/</a:t>
             </a:r>
             <a:r>
-              <a:rPr lang="en-US" sz="1800">
+              <a:rPr lang="en-US" sz="1800" dirty="0">
                 <a:latin typeface="Calibri"/>
                 <a:ea typeface="Calibri"/>
                 <a:cs typeface="Calibri"/>
@@ -18110,7 +18142,7 @@
               </a:rPr>
               <a:t> </a:t>
             </a:r>
-            <a:endParaRPr sz="1800">
+            <a:endParaRPr sz="1800" dirty="0">
               <a:latin typeface="Calibri"/>
               <a:ea typeface="Calibri"/>
               <a:cs typeface="Calibri"/>
@@ -18130,16 +18162,25 @@
               <a:buChar char="●"/>
             </a:pPr>
             <a:r>
-              <a:rPr lang="en-US" sz="1800">
+              <a:rPr lang="en-US" sz="1800" dirty="0" err="1">
                 <a:latin typeface="Calibri"/>
                 <a:ea typeface="Calibri"/>
                 <a:cs typeface="Calibri"/>
                 <a:sym typeface="Calibri"/>
               </a:rPr>
-              <a:t>Jupyter Dashboards - </a:t>
+              <a:t>Jupyter</a:t>
             </a:r>
             <a:r>
-              <a:rPr lang="en-US" sz="1800" u="sng">
+              <a:rPr lang="en-US" sz="1800" dirty="0">
+                <a:latin typeface="Calibri"/>
+                <a:ea typeface="Calibri"/>
+                <a:cs typeface="Calibri"/>
+                <a:sym typeface="Calibri"/>
+              </a:rPr>
+              <a:t> Dashboards - </a:t>
+            </a:r>
+            <a:r>
+              <a:rPr lang="en-US" sz="1800" u="sng" dirty="0">
                 <a:solidFill>
                   <a:schemeClr val="hlink"/>
                 </a:solidFill>
@@ -18152,7 +18193,7 @@
               <a:t>https://github.com/jupyter/dashboards</a:t>
             </a:r>
             <a:r>
-              <a:rPr lang="en-US" sz="1800">
+              <a:rPr lang="en-US" sz="1800" dirty="0">
                 <a:latin typeface="Calibri"/>
                 <a:ea typeface="Calibri"/>
                 <a:cs typeface="Calibri"/>
@@ -18160,7 +18201,7 @@
               </a:rPr>
               <a:t>  </a:t>
             </a:r>
-            <a:endParaRPr sz="1800">
+            <a:endParaRPr sz="1800" dirty="0">
               <a:latin typeface="Calibri"/>
               <a:ea typeface="Calibri"/>
               <a:cs typeface="Calibri"/>
@@ -18180,16 +18221,25 @@
               <a:buChar char="●"/>
             </a:pPr>
             <a:r>
-              <a:rPr lang="en-US" sz="1800">
+              <a:rPr lang="en-US" sz="1800" dirty="0" err="1">
                 <a:latin typeface="Calibri"/>
                 <a:ea typeface="Calibri"/>
                 <a:cs typeface="Calibri"/>
                 <a:sym typeface="Calibri"/>
               </a:rPr>
-              <a:t>ipywidgets - </a:t>
+              <a:t>ipywidgets</a:t>
             </a:r>
             <a:r>
-              <a:rPr lang="en-US" sz="1800" u="sng">
+              <a:rPr lang="en-US" sz="1800" dirty="0">
+                <a:latin typeface="Calibri"/>
+                <a:ea typeface="Calibri"/>
+                <a:cs typeface="Calibri"/>
+                <a:sym typeface="Calibri"/>
+              </a:rPr>
+              <a:t> - </a:t>
+            </a:r>
+            <a:r>
+              <a:rPr lang="en-US" sz="1800" u="sng" dirty="0">
                 <a:solidFill>
                   <a:schemeClr val="hlink"/>
                 </a:solidFill>
@@ -18202,7 +18252,7 @@
               <a:t>https://github.com/jupyter-widgets/ipywidgets</a:t>
             </a:r>
             <a:r>
-              <a:rPr lang="en-US" sz="1800">
+              <a:rPr lang="en-US" sz="1800" dirty="0">
                 <a:latin typeface="Calibri"/>
                 <a:ea typeface="Calibri"/>
                 <a:cs typeface="Calibri"/>
@@ -18211,7 +18261,7 @@
               <a:t>   </a:t>
             </a:r>
             <a:br>
-              <a:rPr lang="en-US" sz="1800">
+              <a:rPr lang="en-US" sz="1800" dirty="0">
                 <a:latin typeface="Calibri"/>
                 <a:ea typeface="Calibri"/>
                 <a:cs typeface="Calibri"/>
@@ -18219,7 +18269,7 @@
               </a:rPr>
             </a:br>
             <a:r>
-              <a:rPr lang="en-US" sz="1800">
+              <a:rPr lang="en-US" sz="1800" dirty="0">
                 <a:latin typeface="Calibri"/>
                 <a:ea typeface="Calibri"/>
                 <a:cs typeface="Calibri"/>
@@ -18228,7 +18278,7 @@
               <a:t>                    - </a:t>
             </a:r>
             <a:r>
-              <a:rPr lang="en-US" sz="1800" u="sng">
+              <a:rPr lang="en-US" sz="1800" u="sng" dirty="0">
                 <a:solidFill>
                   <a:schemeClr val="hlink"/>
                 </a:solidFill>
@@ -18241,7 +18291,7 @@
               <a:t>https://www.youtube.com/watch?v=i40d8-Hu4vM</a:t>
             </a:r>
             <a:r>
-              <a:rPr lang="en-US" sz="1800">
+              <a:rPr lang="en-US" sz="1800" dirty="0">
                 <a:latin typeface="Calibri"/>
                 <a:ea typeface="Calibri"/>
                 <a:cs typeface="Calibri"/>
@@ -18249,7 +18299,7 @@
               </a:rPr>
               <a:t>  (40 min demo from 2017)</a:t>
             </a:r>
-            <a:endParaRPr sz="1800">
+            <a:endParaRPr sz="1800" dirty="0">
               <a:latin typeface="Calibri"/>
               <a:ea typeface="Calibri"/>
               <a:cs typeface="Calibri"/>
@@ -18269,16 +18319,25 @@
               <a:buChar char="●"/>
             </a:pPr>
             <a:r>
-              <a:rPr lang="en-US" sz="1800">
+              <a:rPr lang="en-US" sz="1800" dirty="0" err="1">
                 <a:latin typeface="Calibri"/>
                 <a:ea typeface="Calibri"/>
                 <a:cs typeface="Calibri"/>
                 <a:sym typeface="Calibri"/>
               </a:rPr>
-              <a:t>bqplot - </a:t>
+              <a:t>bqplot</a:t>
             </a:r>
             <a:r>
-              <a:rPr lang="en-US" sz="1800" u="sng">
+              <a:rPr lang="en-US" sz="1800" dirty="0">
+                <a:latin typeface="Calibri"/>
+                <a:ea typeface="Calibri"/>
+                <a:cs typeface="Calibri"/>
+                <a:sym typeface="Calibri"/>
+              </a:rPr>
+              <a:t> - </a:t>
+            </a:r>
+            <a:r>
+              <a:rPr lang="en-US" sz="1800" u="sng" dirty="0">
                 <a:solidFill>
                   <a:schemeClr val="hlink"/>
                 </a:solidFill>
@@ -18291,7 +18350,7 @@
               <a:t>https://github.com/bloomberg/bqplot</a:t>
             </a:r>
             <a:r>
-              <a:rPr lang="en-US" sz="1800">
+              <a:rPr lang="en-US" sz="1800" dirty="0">
                 <a:solidFill>
                   <a:schemeClr val="dk1"/>
                 </a:solidFill>
@@ -18303,7 +18362,7 @@
               <a:t> </a:t>
             </a:r>
             <a:br>
-              <a:rPr lang="en-US" sz="1800">
+              <a:rPr lang="en-US" sz="1800" dirty="0">
                 <a:solidFill>
                   <a:schemeClr val="dk1"/>
                 </a:solidFill>
@@ -18314,7 +18373,7 @@
               </a:rPr>
             </a:br>
             <a:r>
-              <a:rPr lang="en-US" sz="1800">
+              <a:rPr lang="en-US" sz="1800" dirty="0">
                 <a:solidFill>
                   <a:schemeClr val="dk1"/>
                 </a:solidFill>
@@ -18326,7 +18385,7 @@
               <a:t>             - </a:t>
             </a:r>
             <a:r>
-              <a:rPr lang="en-US" sz="1800" u="sng">
+              <a:rPr lang="en-US" sz="1800" u="sng" dirty="0">
                 <a:solidFill>
                   <a:schemeClr val="hlink"/>
                 </a:solidFill>
@@ -18339,7 +18398,7 @@
               <a:t>https://www.youtube.com/watch?v=Dmxa2Kyfzxk</a:t>
             </a:r>
             <a:r>
-              <a:rPr lang="en-US" sz="1800">
+              <a:rPr lang="en-US" sz="1800" dirty="0">
                 <a:solidFill>
                   <a:schemeClr val="dk1"/>
                 </a:solidFill>
@@ -18350,7 +18409,7 @@
               </a:rPr>
               <a:t> (demo 2018)</a:t>
             </a:r>
-            <a:endParaRPr sz="1800">
+            <a:endParaRPr sz="1800" dirty="0">
               <a:latin typeface="Calibri"/>
               <a:ea typeface="Calibri"/>
               <a:cs typeface="Calibri"/>
@@ -18370,7 +18429,7 @@
               <a:buChar char="●"/>
             </a:pPr>
             <a:r>
-              <a:rPr lang="en-US" sz="1800">
+              <a:rPr lang="en-US" sz="1800" dirty="0">
                 <a:latin typeface="Calibri"/>
                 <a:ea typeface="Calibri"/>
                 <a:cs typeface="Calibri"/>
@@ -18379,7 +18438,7 @@
               <a:t>Bokeh - interactive graphics - </a:t>
             </a:r>
             <a:r>
-              <a:rPr lang="en-US" sz="1800" u="sng">
+              <a:rPr lang="en-US" sz="1800" u="sng" dirty="0">
                 <a:solidFill>
                   <a:schemeClr val="hlink"/>
                 </a:solidFill>
@@ -18392,7 +18451,7 @@
               <a:t>https://docs.bokeh.org/en/latest/docs/user_guide.html</a:t>
             </a:r>
             <a:r>
-              <a:rPr lang="en-US" sz="1800">
+              <a:rPr lang="en-US" sz="1800" dirty="0">
                 <a:latin typeface="Calibri"/>
                 <a:ea typeface="Calibri"/>
                 <a:cs typeface="Calibri"/>
@@ -18400,7 +18459,7 @@
               </a:rPr>
               <a:t> </a:t>
             </a:r>
-            <a:endParaRPr sz="1800">
+            <a:endParaRPr sz="1800" dirty="0">
               <a:latin typeface="Calibri"/>
               <a:ea typeface="Calibri"/>
               <a:cs typeface="Calibri"/>
@@ -18420,28 +18479,81 @@
               <a:buChar char="●"/>
             </a:pPr>
             <a:r>
-              <a:rPr lang="en-US" sz="1800">
-                <a:latin typeface="Calibri"/>
-                <a:ea typeface="Calibri"/>
-                <a:cs typeface="Calibri"/>
+              <a:rPr lang="en-US" sz="1800" dirty="0">
+                <a:latin typeface="Calibri" panose="020F0502020204030204" pitchFamily="34" charset="0"/>
+                <a:ea typeface="Calibri"/>
+                <a:cs typeface="Calibri" panose="020F0502020204030204" pitchFamily="34" charset="0"/>
                 <a:sym typeface="Calibri"/>
               </a:rPr>
               <a:t>Voila - serve dashboards - </a:t>
             </a:r>
             <a:r>
-              <a:rPr lang="en-US" sz="1800" u="sng">
+              <a:rPr lang="en-US" sz="1800" u="sng" dirty="0">
                 <a:solidFill>
                   <a:schemeClr val="hlink"/>
                 </a:solidFill>
-                <a:latin typeface="Calibri"/>
-                <a:ea typeface="Calibri"/>
-                <a:cs typeface="Calibri"/>
+                <a:latin typeface="Calibri" panose="020F0502020204030204" pitchFamily="34" charset="0"/>
+                <a:ea typeface="Calibri"/>
+                <a:cs typeface="Calibri" panose="020F0502020204030204" pitchFamily="34" charset="0"/>
                 <a:sym typeface="Calibri"/>
                 <a:hlinkClick r:id="rId11"/>
               </a:rPr>
               <a:t>https://github.com/voila-dashboards/voila</a:t>
             </a:r>
-            <a:endParaRPr sz="1800">
+            <a:r>
+              <a:rPr lang="en-US" sz="1800" u="sng" dirty="0">
+                <a:solidFill>
+                  <a:schemeClr val="hlink"/>
+                </a:solidFill>
+                <a:latin typeface="Calibri" panose="020F0502020204030204" pitchFamily="34" charset="0"/>
+                <a:ea typeface="Calibri"/>
+                <a:cs typeface="Calibri" panose="020F0502020204030204" pitchFamily="34" charset="0"/>
+                <a:sym typeface="Calibri"/>
+              </a:rPr>
+              <a:t> </a:t>
+            </a:r>
+            <a:endParaRPr lang="en-US" sz="1800" dirty="0">
+              <a:latin typeface="Calibri" panose="020F0502020204030204" pitchFamily="34" charset="0"/>
+              <a:cs typeface="Calibri" panose="020F0502020204030204" pitchFamily="34" charset="0"/>
+            </a:endParaRPr>
+          </a:p>
+          <a:p>
+            <a:pPr marL="457200" lvl="0" indent="-342900">
+              <a:buSzPts val="1800"/>
+              <a:buFont typeface="Calibri"/>
+              <a:buChar char="●"/>
+            </a:pPr>
+            <a:r>
+              <a:rPr lang="en-US" sz="1800" dirty="0">
+                <a:latin typeface="Calibri" panose="020F0502020204030204" pitchFamily="34" charset="0"/>
+                <a:cs typeface="Calibri" panose="020F0502020204030204" pitchFamily="34" charset="0"/>
+              </a:rPr>
+              <a:t>Shiny (R-Studio) - </a:t>
+            </a:r>
+            <a:r>
+              <a:rPr lang="en-US" sz="1800" dirty="0">
+                <a:latin typeface="Calibri" panose="020F0502020204030204" pitchFamily="34" charset="0"/>
+                <a:cs typeface="Calibri" panose="020F0502020204030204" pitchFamily="34" charset="0"/>
+                <a:hlinkClick r:id="rId12"/>
+              </a:rPr>
+              <a:t>https://shiny.rstudio.com/</a:t>
+            </a:r>
+            <a:endParaRPr lang="en-US" sz="1800" dirty="0">
+              <a:latin typeface="Calibri" panose="020F0502020204030204" pitchFamily="34" charset="0"/>
+              <a:cs typeface="Calibri" panose="020F0502020204030204" pitchFamily="34" charset="0"/>
+            </a:endParaRPr>
+          </a:p>
+          <a:p>
+            <a:pPr marL="0" lvl="0" indent="0" algn="l" rtl="0">
+              <a:spcBef>
+                <a:spcPts val="0"/>
+              </a:spcBef>
+              <a:spcAft>
+                <a:spcPts val="0"/>
+              </a:spcAft>
+              <a:buNone/>
+            </a:pPr>
+            <a:endParaRPr sz="1800" dirty="0">
               <a:latin typeface="Calibri"/>
               <a:ea typeface="Calibri"/>
               <a:cs typeface="Calibri"/>
@@ -18456,23 +18568,6 @@
               <a:spcAft>
                 <a:spcPts val="0"/>
               </a:spcAft>
-              <a:buNone/>
-            </a:pPr>
-            <a:endParaRPr sz="1800">
-              <a:latin typeface="Calibri"/>
-              <a:ea typeface="Calibri"/>
-              <a:cs typeface="Calibri"/>
-              <a:sym typeface="Calibri"/>
-            </a:endParaRPr>
-          </a:p>
-          <a:p>
-            <a:pPr marL="0" lvl="0" indent="0" algn="l" rtl="0">
-              <a:spcBef>
-                <a:spcPts val="0"/>
-              </a:spcBef>
-              <a:spcAft>
-                <a:spcPts val="0"/>
-              </a:spcAft>
               <a:buClr>
                 <a:schemeClr val="dk1"/>
               </a:buClr>
@@ -18481,7 +18576,7 @@
               <a:buNone/>
             </a:pPr>
             <a:r>
-              <a:rPr lang="en-US" sz="1800">
+              <a:rPr lang="en-US" sz="1800" dirty="0" err="1">
                 <a:solidFill>
                   <a:schemeClr val="dk1"/>
                 </a:solidFill>
@@ -18490,10 +18585,22 @@
                 <a:cs typeface="Calibri"/>
                 <a:sym typeface="Calibri"/>
               </a:rPr>
-              <a:t>Panoramix - </a:t>
+              <a:t>Panoramix</a:t>
             </a:r>
             <a:r>
-              <a:rPr lang="en-US" sz="1800" u="sng">
+              <a:rPr lang="en-US" sz="1800" dirty="0">
+                <a:solidFill>
+                  <a:schemeClr val="dk1"/>
+                </a:solidFill>
+                <a:latin typeface="Calibri"/>
+                <a:ea typeface="Calibri"/>
+                <a:cs typeface="Calibri"/>
+                <a:sym typeface="Calibri"/>
+              </a:rPr>
+              <a:t> - </a:t>
+            </a:r>
+            <a:r>
+              <a:rPr lang="en-US" sz="1800" u="sng" dirty="0">
                 <a:solidFill>
                   <a:schemeClr val="hlink"/>
                 </a:solidFill>
@@ -18501,11 +18608,11 @@
                 <a:ea typeface="Calibri"/>
                 <a:cs typeface="Calibri"/>
                 <a:sym typeface="Calibri"/>
-                <a:hlinkClick r:id="rId12"/>
+                <a:hlinkClick r:id="rId13"/>
               </a:rPr>
               <a:t>https://github.com/teamclairvoyant/panoramix</a:t>
             </a:r>
-            <a:endParaRPr sz="1800">
+            <a:endParaRPr sz="1800" dirty="0">
               <a:solidFill>
                 <a:schemeClr val="dk1"/>
               </a:solidFill>
@@ -18525,7 +18632,7 @@
               </a:spcAft>
               <a:buNone/>
             </a:pPr>
-            <a:endParaRPr sz="1800">
+            <a:endParaRPr sz="1800" dirty="0">
               <a:latin typeface="Calibri"/>
               <a:ea typeface="Calibri"/>
               <a:cs typeface="Calibri"/>
@@ -18543,7 +18650,7 @@
               <a:buNone/>
             </a:pPr>
             <a:r>
-              <a:rPr lang="en-US" sz="1800">
+              <a:rPr lang="en-US" sz="1800" dirty="0">
                 <a:latin typeface="Calibri"/>
                 <a:ea typeface="Calibri"/>
                 <a:cs typeface="Calibri"/>
@@ -18551,7 +18658,7 @@
               </a:rPr>
               <a:t>Visualization - why so many packages?</a:t>
             </a:r>
-            <a:endParaRPr sz="1800">
+            <a:endParaRPr sz="1800" dirty="0">
               <a:latin typeface="Calibri"/>
               <a:ea typeface="Calibri"/>
               <a:cs typeface="Calibri"/>
@@ -18569,7 +18676,7 @@
               <a:buNone/>
             </a:pPr>
             <a:r>
-              <a:rPr lang="en-US" sz="1800">
+              <a:rPr lang="en-US" sz="1800" dirty="0">
                 <a:latin typeface="Calibri"/>
                 <a:ea typeface="Calibri"/>
                 <a:cs typeface="Calibri"/>
@@ -18578,7 +18685,7 @@
               <a:t>  </a:t>
             </a:r>
             <a:r>
-              <a:rPr lang="en-US" sz="1800" u="sng">
+              <a:rPr lang="en-US" sz="1800" u="sng" dirty="0">
                 <a:solidFill>
                   <a:schemeClr val="hlink"/>
                 </a:solidFill>
@@ -18586,12 +18693,12 @@
                 <a:ea typeface="Calibri"/>
                 <a:cs typeface="Calibri"/>
                 <a:sym typeface="Calibri"/>
-                <a:hlinkClick r:id="rId13"/>
+                <a:hlinkClick r:id="rId14"/>
               </a:rPr>
               <a:t>https://www.anaconda.com/python-data-visualization-2018-why-so-many-libraries/</a:t>
             </a:r>
             <a:r>
-              <a:rPr lang="en-US" sz="1800">
+              <a:rPr lang="en-US" sz="1800" dirty="0">
                 <a:latin typeface="Calibri"/>
                 <a:ea typeface="Calibri"/>
                 <a:cs typeface="Calibri"/>
@@ -18599,7 +18706,7 @@
               </a:rPr>
               <a:t> </a:t>
             </a:r>
-            <a:endParaRPr sz="1800">
+            <a:endParaRPr sz="1800" dirty="0">
               <a:latin typeface="Calibri"/>
               <a:ea typeface="Calibri"/>
               <a:cs typeface="Calibri"/>
@@ -18616,7 +18723,7 @@
               </a:spcAft>
               <a:buNone/>
             </a:pPr>
-            <a:endParaRPr sz="1800">
+            <a:endParaRPr sz="1800" dirty="0">
               <a:latin typeface="Calibri"/>
               <a:ea typeface="Calibri"/>
               <a:cs typeface="Calibri"/>
@@ -18639,16 +18746,25 @@
               <a:buNone/>
             </a:pPr>
             <a:r>
-              <a:rPr lang="en-US" sz="1800">
+              <a:rPr lang="en-US" sz="1800" dirty="0" err="1">
                 <a:latin typeface="Calibri"/>
                 <a:ea typeface="Calibri"/>
                 <a:cs typeface="Calibri"/>
                 <a:sym typeface="Calibri"/>
               </a:rPr>
-              <a:t>ipyvolume - 3-D  visualization (rotate &amp; resize 3D graphs) - </a:t>
+              <a:t>ipyvolume</a:t>
             </a:r>
             <a:r>
-              <a:rPr lang="en-US" sz="1800" u="sng">
+              <a:rPr lang="en-US" sz="1800" dirty="0">
+                <a:latin typeface="Calibri"/>
+                <a:ea typeface="Calibri"/>
+                <a:cs typeface="Calibri"/>
+                <a:sym typeface="Calibri"/>
+              </a:rPr>
+              <a:t> - 3-D  visualization (rotate &amp; resize 3D graphs) - </a:t>
+            </a:r>
+            <a:r>
+              <a:rPr lang="en-US" sz="1800" u="sng" dirty="0">
                 <a:solidFill>
                   <a:schemeClr val="hlink"/>
                 </a:solidFill>
@@ -18656,12 +18772,12 @@
                 <a:ea typeface="Calibri"/>
                 <a:cs typeface="Calibri"/>
                 <a:sym typeface="Calibri"/>
-                <a:hlinkClick r:id="rId14"/>
+                <a:hlinkClick r:id="rId15"/>
               </a:rPr>
               <a:t>https://github.com/maartenbreddels/ipyvolume</a:t>
             </a:r>
             <a:r>
-              <a:rPr lang="en-US" sz="1800">
+              <a:rPr lang="en-US" sz="1800" dirty="0">
                 <a:latin typeface="Calibri"/>
                 <a:ea typeface="Calibri"/>
                 <a:cs typeface="Calibri"/>
@@ -18669,7 +18785,7 @@
               </a:rPr>
               <a:t> </a:t>
             </a:r>
-            <a:endParaRPr sz="1800">
+            <a:endParaRPr sz="1800" dirty="0">
               <a:latin typeface="Calibri"/>
               <a:ea typeface="Calibri"/>
               <a:cs typeface="Calibri"/>
@@ -18691,7 +18807,7 @@
               <a:buFont typeface="Arial"/>
               <a:buNone/>
             </a:pPr>
-            <a:endParaRPr sz="1800">
+            <a:endParaRPr sz="1800" dirty="0">
               <a:latin typeface="Calibri"/>
               <a:ea typeface="Calibri"/>
               <a:cs typeface="Calibri"/>
@@ -18714,15 +18830,42 @@
               <a:buNone/>
             </a:pPr>
             <a:r>
-              <a:rPr lang="en-US" sz="1800">
+              <a:rPr lang="en-US" sz="1800" dirty="0">
                 <a:latin typeface="Calibri"/>
                 <a:ea typeface="Calibri"/>
                 <a:cs typeface="Calibri"/>
                 <a:sym typeface="Calibri"/>
               </a:rPr>
-              <a:t>import matplotlib.pyplot as plt</a:t>
+              <a:t>import </a:t>
             </a:r>
-            <a:endParaRPr sz="1800">
+            <a:r>
+              <a:rPr lang="en-US" sz="1800" dirty="0" err="1">
+                <a:latin typeface="Calibri"/>
+                <a:ea typeface="Calibri"/>
+                <a:cs typeface="Calibri"/>
+                <a:sym typeface="Calibri"/>
+              </a:rPr>
+              <a:t>matplotlib.pyplot</a:t>
+            </a:r>
+            <a:r>
+              <a:rPr lang="en-US" sz="1800" dirty="0">
+                <a:latin typeface="Calibri"/>
+                <a:ea typeface="Calibri"/>
+                <a:cs typeface="Calibri"/>
+                <a:sym typeface="Calibri"/>
+              </a:rPr>
+              <a:t> as </a:t>
+            </a:r>
+            <a:r>
+              <a:rPr lang="en-US" sz="1800" dirty="0" err="1">
+                <a:latin typeface="Calibri"/>
+                <a:ea typeface="Calibri"/>
+                <a:cs typeface="Calibri"/>
+                <a:sym typeface="Calibri"/>
+              </a:rPr>
+              <a:t>plt</a:t>
+            </a:r>
+            <a:endParaRPr sz="1800" dirty="0">
               <a:latin typeface="Calibri"/>
               <a:ea typeface="Calibri"/>
               <a:cs typeface="Calibri"/>
@@ -18740,15 +18883,24 @@
               <a:buNone/>
             </a:pPr>
             <a:r>
-              <a:rPr lang="en-US" sz="1800">
+              <a:rPr lang="en-US" sz="1800" dirty="0">
                 <a:latin typeface="Calibri"/>
                 <a:ea typeface="Calibri"/>
                 <a:cs typeface="Calibri"/>
                 <a:sym typeface="Calibri"/>
               </a:rPr>
-              <a:t>import seaborn as sns</a:t>
+              <a:t>import seaborn as </a:t>
             </a:r>
-            <a:endParaRPr sz="1800">
+            <a:r>
+              <a:rPr lang="en-US" sz="1800" dirty="0" err="1">
+                <a:latin typeface="Calibri"/>
+                <a:ea typeface="Calibri"/>
+                <a:cs typeface="Calibri"/>
+                <a:sym typeface="Calibri"/>
+              </a:rPr>
+              <a:t>sns</a:t>
+            </a:r>
+            <a:endParaRPr sz="1800" dirty="0">
               <a:latin typeface="Calibri"/>
               <a:ea typeface="Calibri"/>
               <a:cs typeface="Calibri"/>

--- a/analytics_dashboards.pptx
+++ b/analytics_dashboards.pptx
@@ -5,7 +5,7 @@
     <p:sldMasterId id="2147483659" r:id="rId1"/>
   </p:sldMasterIdLst>
   <p:notesMasterIdLst>
-    <p:notesMasterId r:id="rId7"/>
+    <p:notesMasterId r:id="rId8"/>
   </p:notesMasterIdLst>
   <p:sldIdLst>
     <p:sldId id="256" r:id="rId2"/>
@@ -13,6 +13,7 @@
     <p:sldId id="258" r:id="rId4"/>
     <p:sldId id="259" r:id="rId5"/>
     <p:sldId id="260" r:id="rId6"/>
+    <p:sldId id="261" r:id="rId7"/>
   </p:sldIdLst>
   <p:sldSz cx="12192000" cy="6858000"/>
   <p:notesSz cx="6858000" cy="9144000"/>
@@ -18969,7 +18970,7 @@
               <a:buNone/>
             </a:pPr>
             <a:r>
-              <a:rPr lang="en-US" sz="2400" b="1">
+              <a:rPr lang="en-US" sz="2400" b="1" dirty="0">
                 <a:latin typeface="Calibri"/>
                 <a:ea typeface="Calibri"/>
                 <a:cs typeface="Calibri"/>
@@ -18977,7 +18978,7 @@
               </a:rPr>
               <a:t>Databases optimized for analytics.</a:t>
             </a:r>
-            <a:endParaRPr sz="2400" b="1">
+            <a:endParaRPr sz="2400" b="1" dirty="0">
               <a:latin typeface="Calibri"/>
               <a:ea typeface="Calibri"/>
               <a:cs typeface="Calibri"/>
@@ -18994,7 +18995,7 @@
               </a:spcAft>
               <a:buNone/>
             </a:pPr>
-            <a:endParaRPr>
+            <a:endParaRPr dirty="0">
               <a:latin typeface="Calibri"/>
               <a:ea typeface="Calibri"/>
               <a:cs typeface="Calibri"/>
@@ -19012,7 +19013,7 @@
               <a:buNone/>
             </a:pPr>
             <a:r>
-              <a:rPr lang="en-US">
+              <a:rPr lang="en-US" dirty="0">
                 <a:latin typeface="Calibri"/>
                 <a:ea typeface="Calibri"/>
                 <a:cs typeface="Calibri"/>
@@ -19020,7 +19021,7 @@
               </a:rPr>
               <a:t>Databases can be optimized for OLTP (On-Line Transactional Processing) or OLAP (On-Line Analytical Processing). For analytics we need OLAP databases.</a:t>
             </a:r>
-            <a:endParaRPr>
+            <a:endParaRPr dirty="0">
               <a:latin typeface="Calibri"/>
               <a:ea typeface="Calibri"/>
               <a:cs typeface="Calibri"/>
@@ -19038,7 +19039,7 @@
               <a:buNone/>
             </a:pPr>
             <a:r>
-              <a:rPr lang="en-US">
+              <a:rPr lang="en-US" dirty="0">
                 <a:latin typeface="Calibri"/>
                 <a:ea typeface="Calibri"/>
                 <a:cs typeface="Calibri"/>
@@ -19046,7 +19047,7 @@
               </a:rPr>
               <a:t>They achieve high performance of queries by using columnar indexes, massive parallelism, taking advantage of large memory and GPU.</a:t>
             </a:r>
-            <a:endParaRPr>
+            <a:endParaRPr dirty="0">
               <a:latin typeface="Calibri"/>
               <a:ea typeface="Calibri"/>
               <a:cs typeface="Calibri"/>
@@ -19063,7 +19064,7 @@
               </a:spcAft>
               <a:buNone/>
             </a:pPr>
-            <a:endParaRPr>
+            <a:endParaRPr dirty="0">
               <a:latin typeface="Calibri"/>
               <a:ea typeface="Calibri"/>
               <a:cs typeface="Calibri"/>
@@ -19086,7 +19087,7 @@
               <a:buNone/>
             </a:pPr>
             <a:r>
-              <a:rPr lang="en-US">
+              <a:rPr lang="en-US" dirty="0">
                 <a:latin typeface="Calibri"/>
                 <a:ea typeface="Calibri"/>
                 <a:cs typeface="Calibri"/>
@@ -19094,7 +19095,7 @@
               </a:rPr>
               <a:t>Columnar Indexes:</a:t>
             </a:r>
-            <a:endParaRPr>
+            <a:endParaRPr dirty="0">
               <a:latin typeface="Calibri"/>
               <a:ea typeface="Calibri"/>
               <a:cs typeface="Calibri"/>
@@ -19117,7 +19118,7 @@
               <a:buNone/>
             </a:pPr>
             <a:r>
-              <a:rPr lang="en-US">
+              <a:rPr lang="en-US" dirty="0">
                 <a:latin typeface="Calibri"/>
                 <a:ea typeface="Calibri"/>
                 <a:cs typeface="Calibri"/>
@@ -19125,7 +19126,7 @@
               </a:rPr>
               <a:t>Here is a short video (4 min) made long time ago (in 2011) showing performance advantage of columnar store indexes in Microsoft SQL server.</a:t>
             </a:r>
-            <a:endParaRPr>
+            <a:endParaRPr dirty="0">
               <a:latin typeface="Calibri"/>
               <a:ea typeface="Calibri"/>
               <a:cs typeface="Calibri"/>
@@ -19142,7 +19143,7 @@
               </a:spcAft>
               <a:buNone/>
             </a:pPr>
-            <a:endParaRPr>
+            <a:endParaRPr dirty="0">
               <a:latin typeface="Calibri"/>
               <a:ea typeface="Calibri"/>
               <a:cs typeface="Calibri"/>
@@ -19165,15 +19166,51 @@
               <a:buNone/>
             </a:pPr>
             <a:r>
-              <a:rPr lang="en-US">
+              <a:rPr lang="en-US" dirty="0">
                 <a:latin typeface="Calibri"/>
                 <a:ea typeface="Calibri"/>
                 <a:cs typeface="Calibri"/>
                 <a:sym typeface="Calibri"/>
               </a:rPr>
-              <a:t> - https://www.youtube.com/watch?v=vPN8_PCsJm4</a:t>
+              <a:t> - https://</a:t>
             </a:r>
-            <a:endParaRPr>
+            <a:r>
+              <a:rPr lang="en-US" dirty="0" err="1">
+                <a:latin typeface="Calibri"/>
+                <a:ea typeface="Calibri"/>
+                <a:cs typeface="Calibri"/>
+                <a:sym typeface="Calibri"/>
+              </a:rPr>
+              <a:t>www.youtube.com</a:t>
+            </a:r>
+            <a:r>
+              <a:rPr lang="en-US" dirty="0">
+                <a:latin typeface="Calibri"/>
+                <a:ea typeface="Calibri"/>
+                <a:cs typeface="Calibri"/>
+                <a:sym typeface="Calibri"/>
+              </a:rPr>
+              <a:t>/</a:t>
+            </a:r>
+            <a:r>
+              <a:rPr lang="en-US" dirty="0" err="1">
+                <a:latin typeface="Calibri"/>
+                <a:ea typeface="Calibri"/>
+                <a:cs typeface="Calibri"/>
+                <a:sym typeface="Calibri"/>
+              </a:rPr>
+              <a:t>watch?v</a:t>
+            </a:r>
+            <a:r>
+              <a:rPr lang="en-US" dirty="0">
+                <a:latin typeface="Calibri"/>
+                <a:ea typeface="Calibri"/>
+                <a:cs typeface="Calibri"/>
+                <a:sym typeface="Calibri"/>
+              </a:rPr>
+              <a:t>=vPN8_PCsJm4</a:t>
+            </a:r>
+            <a:endParaRPr dirty="0">
               <a:latin typeface="Calibri"/>
               <a:ea typeface="Calibri"/>
               <a:cs typeface="Calibri"/>
@@ -19190,7 +19227,7 @@
               </a:spcAft>
               <a:buNone/>
             </a:pPr>
-            <a:endParaRPr>
+            <a:endParaRPr dirty="0">
               <a:latin typeface="Calibri"/>
               <a:ea typeface="Calibri"/>
               <a:cs typeface="Calibri"/>
@@ -19213,7 +19250,7 @@
               <a:buNone/>
             </a:pPr>
             <a:r>
-              <a:rPr lang="en-US">
+              <a:rPr lang="en-US" dirty="0">
                 <a:latin typeface="Calibri"/>
                 <a:ea typeface="Calibri"/>
                 <a:cs typeface="Calibri"/>
@@ -19221,7 +19258,7 @@
               </a:rPr>
               <a:t>The video demonstrates that columnar indexing is at least 40 times faster than traditional index. The query was done over a 2 Billion rows "fact" table.</a:t>
             </a:r>
-            <a:endParaRPr>
+            <a:endParaRPr dirty="0">
               <a:latin typeface="Calibri"/>
               <a:ea typeface="Calibri"/>
               <a:cs typeface="Calibri"/>
@@ -19239,7 +19276,7 @@
               <a:buNone/>
             </a:pPr>
             <a:r>
-              <a:rPr lang="en-US">
+              <a:rPr lang="en-US" dirty="0">
                 <a:latin typeface="Calibri"/>
                 <a:ea typeface="Calibri"/>
                 <a:cs typeface="Calibri"/>
@@ -19247,7 +19284,7 @@
               </a:rPr>
               <a:t>Note - this video is ~8 years old. Since then MS SQL Server made lots of other performance improvements. </a:t>
             </a:r>
-            <a:endParaRPr>
+            <a:endParaRPr dirty="0">
               <a:latin typeface="Calibri"/>
               <a:ea typeface="Calibri"/>
               <a:cs typeface="Calibri"/>
@@ -19264,7 +19301,7 @@
               </a:spcAft>
               <a:buNone/>
             </a:pPr>
-            <a:endParaRPr>
+            <a:endParaRPr dirty="0">
               <a:solidFill>
                 <a:schemeClr val="dk1"/>
               </a:solidFill>
@@ -19285,7 +19322,7 @@
               <a:buNone/>
             </a:pPr>
             <a:r>
-              <a:rPr lang="en-US">
+              <a:rPr lang="en-US" dirty="0">
                 <a:solidFill>
                   <a:schemeClr val="dk1"/>
                 </a:solidFill>
@@ -19296,7 +19333,7 @@
               </a:rPr>
               <a:t>Note: first release of MS SQL Server was on April 24, 1989, 30 years!!</a:t>
             </a:r>
-            <a:endParaRPr>
+            <a:endParaRPr dirty="0">
               <a:solidFill>
                 <a:schemeClr val="dk1"/>
               </a:solidFill>
@@ -19316,7 +19353,7 @@
               </a:spcAft>
               <a:buNone/>
             </a:pPr>
-            <a:endParaRPr>
+            <a:endParaRPr dirty="0">
               <a:latin typeface="Calibri"/>
               <a:ea typeface="Calibri"/>
               <a:cs typeface="Calibri"/>
@@ -19339,7 +19376,7 @@
               <a:buNone/>
             </a:pPr>
             <a:r>
-              <a:rPr lang="en-US">
+              <a:rPr lang="en-US" dirty="0">
                 <a:latin typeface="Calibri"/>
                 <a:ea typeface="Calibri"/>
                 <a:cs typeface="Calibri"/>
@@ -19347,7 +19384,7 @@
               </a:rPr>
               <a:t>Modern hardware is much faster than that used in the above video.</a:t>
             </a:r>
-            <a:endParaRPr>
+            <a:endParaRPr dirty="0">
               <a:latin typeface="Calibri"/>
               <a:ea typeface="Calibri"/>
               <a:cs typeface="Calibri"/>
@@ -19370,7 +19407,7 @@
               <a:buNone/>
             </a:pPr>
             <a:r>
-              <a:rPr lang="en-US">
+              <a:rPr lang="en-US" dirty="0">
                 <a:latin typeface="Calibri"/>
                 <a:ea typeface="Calibri"/>
                 <a:cs typeface="Calibri"/>
@@ -19378,7 +19415,7 @@
               </a:rPr>
               <a:t>Columnar store indexing is standard/default nowadays.</a:t>
             </a:r>
-            <a:endParaRPr>
+            <a:endParaRPr dirty="0">
               <a:latin typeface="Calibri"/>
               <a:ea typeface="Calibri"/>
               <a:cs typeface="Calibri"/>
@@ -19401,7 +19438,7 @@
               <a:buNone/>
             </a:pPr>
             <a:r>
-              <a:rPr lang="en-US">
+              <a:rPr lang="en-US" dirty="0">
                 <a:latin typeface="Calibri"/>
                 <a:ea typeface="Calibri"/>
                 <a:cs typeface="Calibri"/>
@@ -19409,7 +19446,7 @@
               </a:rPr>
               <a:t>And of course it is available on Microsoft SQL Server on Azure cloud.</a:t>
             </a:r>
-            <a:endParaRPr>
+            <a:endParaRPr dirty="0">
               <a:latin typeface="Calibri"/>
               <a:ea typeface="Calibri"/>
               <a:cs typeface="Calibri"/>
@@ -19427,7 +19464,7 @@
               <a:buNone/>
             </a:pPr>
             <a:r>
-              <a:rPr lang="en-US">
+              <a:rPr lang="en-US" dirty="0">
                 <a:latin typeface="Calibri"/>
                 <a:ea typeface="Calibri"/>
                 <a:cs typeface="Calibri"/>
@@ -19435,7 +19472,7 @@
               </a:rPr>
               <a:t>Microsoft SQL Datawarehouse on Azure cloud - fast OLAP solution.</a:t>
             </a:r>
-            <a:endParaRPr>
+            <a:endParaRPr dirty="0">
               <a:latin typeface="Calibri"/>
               <a:ea typeface="Calibri"/>
               <a:cs typeface="Calibri"/>
@@ -19458,15 +19495,69 @@
               <a:buNone/>
             </a:pPr>
             <a:r>
-              <a:rPr lang="en-US">
+              <a:rPr lang="en-US" dirty="0">
                 <a:latin typeface="Calibri"/>
                 <a:ea typeface="Calibri"/>
                 <a:cs typeface="Calibri"/>
                 <a:sym typeface="Calibri"/>
               </a:rPr>
-              <a:t>- https://azure.microsoft.com/en-us/services/sql-data-warehouse/</a:t>
+              <a:t>- https://</a:t>
             </a:r>
-            <a:endParaRPr>
+            <a:r>
+              <a:rPr lang="en-US" dirty="0" err="1">
+                <a:latin typeface="Calibri"/>
+                <a:ea typeface="Calibri"/>
+                <a:cs typeface="Calibri"/>
+                <a:sym typeface="Calibri"/>
+              </a:rPr>
+              <a:t>azure.microsoft.com</a:t>
+            </a:r>
+            <a:r>
+              <a:rPr lang="en-US" dirty="0">
+                <a:latin typeface="Calibri"/>
+                <a:ea typeface="Calibri"/>
+                <a:cs typeface="Calibri"/>
+                <a:sym typeface="Calibri"/>
+              </a:rPr>
+              <a:t>/</a:t>
+            </a:r>
+            <a:r>
+              <a:rPr lang="en-US" dirty="0" err="1">
+                <a:latin typeface="Calibri"/>
+                <a:ea typeface="Calibri"/>
+                <a:cs typeface="Calibri"/>
+                <a:sym typeface="Calibri"/>
+              </a:rPr>
+              <a:t>en</a:t>
+            </a:r>
+            <a:r>
+              <a:rPr lang="en-US" dirty="0">
+                <a:latin typeface="Calibri"/>
+                <a:ea typeface="Calibri"/>
+                <a:cs typeface="Calibri"/>
+                <a:sym typeface="Calibri"/>
+              </a:rPr>
+              <a:t>-us/services/</a:t>
+            </a:r>
+            <a:r>
+              <a:rPr lang="en-US" dirty="0" err="1">
+                <a:latin typeface="Calibri"/>
+                <a:ea typeface="Calibri"/>
+                <a:cs typeface="Calibri"/>
+                <a:sym typeface="Calibri"/>
+              </a:rPr>
+              <a:t>sql</a:t>
+            </a:r>
+            <a:r>
+              <a:rPr lang="en-US" dirty="0">
+                <a:latin typeface="Calibri"/>
+                <a:ea typeface="Calibri"/>
+                <a:cs typeface="Calibri"/>
+                <a:sym typeface="Calibri"/>
+              </a:rPr>
+              <a:t>-data-warehouse/</a:t>
+            </a:r>
+            <a:endParaRPr dirty="0">
               <a:latin typeface="Calibri"/>
               <a:ea typeface="Calibri"/>
               <a:cs typeface="Calibri"/>
@@ -19489,7 +19580,7 @@
               <a:buNone/>
             </a:pPr>
             <a:r>
-              <a:rPr lang="en-US">
+              <a:rPr lang="en-US" dirty="0">
                 <a:latin typeface="Calibri"/>
                 <a:ea typeface="Calibri"/>
                 <a:cs typeface="Calibri"/>
@@ -19497,7 +19588,7 @@
               </a:rPr>
               <a:t>Power BI - Standard Microsoft Business Intelligence tool</a:t>
             </a:r>
-            <a:endParaRPr>
+            <a:endParaRPr dirty="0">
               <a:latin typeface="Calibri"/>
               <a:ea typeface="Calibri"/>
               <a:cs typeface="Calibri"/>
@@ -19520,15 +19611,24 @@
               <a:buNone/>
             </a:pPr>
             <a:r>
-              <a:rPr lang="en-US">
+              <a:rPr lang="en-US" dirty="0">
                 <a:latin typeface="Calibri"/>
                 <a:ea typeface="Calibri"/>
                 <a:cs typeface="Calibri"/>
                 <a:sym typeface="Calibri"/>
               </a:rPr>
-              <a:t>- https://powerbi.microsoft.com</a:t>
+              <a:t>- https://</a:t>
             </a:r>
-            <a:endParaRPr>
+            <a:r>
+              <a:rPr lang="en-US" dirty="0" err="1">
+                <a:latin typeface="Calibri"/>
+                <a:ea typeface="Calibri"/>
+                <a:cs typeface="Calibri"/>
+                <a:sym typeface="Calibri"/>
+              </a:rPr>
+              <a:t>powerbi.microsoft.com</a:t>
+            </a:r>
+            <a:endParaRPr dirty="0">
               <a:latin typeface="Calibri"/>
               <a:ea typeface="Calibri"/>
               <a:cs typeface="Calibri"/>
@@ -19551,15 +19651,33 @@
               <a:buNone/>
             </a:pPr>
             <a:r>
-              <a:rPr lang="en-US">
+              <a:rPr lang="en-US" dirty="0">
                 <a:latin typeface="Calibri"/>
                 <a:ea typeface="Calibri"/>
                 <a:cs typeface="Calibri"/>
                 <a:sym typeface="Calibri"/>
               </a:rPr>
-              <a:t>Demo of how fast Power BI works with MS SQL Server - 500+ Mln rows of data</a:t>
+              <a:t>Demo of how fast Power BI works with MS SQL Server - 500+ </a:t>
             </a:r>
-            <a:endParaRPr>
+            <a:r>
+              <a:rPr lang="en-US" dirty="0" err="1">
+                <a:latin typeface="Calibri"/>
+                <a:ea typeface="Calibri"/>
+                <a:cs typeface="Calibri"/>
+                <a:sym typeface="Calibri"/>
+              </a:rPr>
+              <a:t>Mln</a:t>
+            </a:r>
+            <a:r>
+              <a:rPr lang="en-US" dirty="0">
+                <a:latin typeface="Calibri"/>
+                <a:ea typeface="Calibri"/>
+                <a:cs typeface="Calibri"/>
+                <a:sym typeface="Calibri"/>
+              </a:rPr>
+              <a:t> rows of data</a:t>
+            </a:r>
+            <a:endParaRPr dirty="0">
               <a:latin typeface="Calibri"/>
               <a:ea typeface="Calibri"/>
               <a:cs typeface="Calibri"/>
@@ -19577,15 +19695,51 @@
               <a:buNone/>
             </a:pPr>
             <a:r>
-              <a:rPr lang="en-US">
+              <a:rPr lang="en-US" dirty="0">
                 <a:latin typeface="Calibri"/>
                 <a:ea typeface="Calibri"/>
                 <a:cs typeface="Calibri"/>
                 <a:sym typeface="Calibri"/>
               </a:rPr>
-              <a:t>- https://www.youtube.com/watch?v=mQyFp2MSl-s</a:t>
+              <a:t>- https://</a:t>
             </a:r>
-            <a:endParaRPr>
+            <a:r>
+              <a:rPr lang="en-US" dirty="0" err="1">
+                <a:latin typeface="Calibri"/>
+                <a:ea typeface="Calibri"/>
+                <a:cs typeface="Calibri"/>
+                <a:sym typeface="Calibri"/>
+              </a:rPr>
+              <a:t>www.youtube.com</a:t>
+            </a:r>
+            <a:r>
+              <a:rPr lang="en-US" dirty="0">
+                <a:latin typeface="Calibri"/>
+                <a:ea typeface="Calibri"/>
+                <a:cs typeface="Calibri"/>
+                <a:sym typeface="Calibri"/>
+              </a:rPr>
+              <a:t>/</a:t>
+            </a:r>
+            <a:r>
+              <a:rPr lang="en-US" dirty="0" err="1">
+                <a:latin typeface="Calibri"/>
+                <a:ea typeface="Calibri"/>
+                <a:cs typeface="Calibri"/>
+                <a:sym typeface="Calibri"/>
+              </a:rPr>
+              <a:t>watch?v</a:t>
+            </a:r>
+            <a:r>
+              <a:rPr lang="en-US" dirty="0">
+                <a:latin typeface="Calibri"/>
+                <a:ea typeface="Calibri"/>
+                <a:cs typeface="Calibri"/>
+                <a:sym typeface="Calibri"/>
+              </a:rPr>
+              <a:t>=mQyFp2MSl-s</a:t>
+            </a:r>
+            <a:endParaRPr dirty="0">
               <a:latin typeface="Calibri"/>
               <a:ea typeface="Calibri"/>
               <a:cs typeface="Calibri"/>
@@ -20026,7 +20180,7 @@
               <a:buNone/>
             </a:pPr>
             <a:r>
-              <a:rPr lang="en-US" sz="2400" b="1">
+              <a:rPr lang="en-US" sz="2400" b="1" dirty="0">
                 <a:latin typeface="Calibri"/>
                 <a:ea typeface="Calibri"/>
                 <a:cs typeface="Calibri"/>
@@ -20034,7 +20188,7 @@
               </a:rPr>
               <a:t>About Einstein Analytics (EA):</a:t>
             </a:r>
-            <a:endParaRPr>
+            <a:endParaRPr dirty="0">
               <a:latin typeface="Calibri"/>
               <a:ea typeface="Calibri"/>
               <a:cs typeface="Calibri"/>
@@ -20052,7 +20206,7 @@
               <a:buNone/>
             </a:pPr>
             <a:r>
-              <a:rPr lang="en-US">
+              <a:rPr lang="en-US" dirty="0">
                 <a:latin typeface="Calibri"/>
                 <a:ea typeface="Calibri"/>
                 <a:cs typeface="Calibri"/>
@@ -20060,7 +20214,7 @@
               </a:rPr>
               <a:t>EA stores data not in regular SQL database, but in files and so called "inverted indexes" (II).</a:t>
             </a:r>
-            <a:endParaRPr>
+            <a:endParaRPr dirty="0">
               <a:latin typeface="Calibri"/>
               <a:ea typeface="Calibri"/>
               <a:cs typeface="Calibri"/>
@@ -20078,7 +20232,7 @@
               <a:buNone/>
             </a:pPr>
             <a:r>
-              <a:rPr lang="en-US">
+              <a:rPr lang="en-US" dirty="0">
                 <a:latin typeface="Calibri"/>
                 <a:ea typeface="Calibri"/>
                 <a:cs typeface="Calibri"/>
@@ -20086,7 +20240,7 @@
               </a:rPr>
               <a:t>The motivation for selecting this technology was to have fast interactive data access.</a:t>
             </a:r>
-            <a:endParaRPr>
+            <a:endParaRPr dirty="0">
               <a:latin typeface="Calibri"/>
               <a:ea typeface="Calibri"/>
               <a:cs typeface="Calibri"/>
@@ -20104,7 +20258,7 @@
               <a:buNone/>
             </a:pPr>
             <a:r>
-              <a:rPr lang="en-US">
+              <a:rPr lang="en-US" dirty="0">
                 <a:latin typeface="Calibri"/>
                 <a:ea typeface="Calibri"/>
                 <a:cs typeface="Calibri"/>
@@ -20112,7 +20266,7 @@
               </a:rPr>
               <a:t>The price to pay - the slowness of creating these "inverted indexes".</a:t>
             </a:r>
-            <a:endParaRPr>
+            <a:endParaRPr dirty="0">
               <a:latin typeface="Calibri"/>
               <a:ea typeface="Calibri"/>
               <a:cs typeface="Calibri"/>
@@ -20130,7 +20284,7 @@
               <a:buNone/>
             </a:pPr>
             <a:r>
-              <a:rPr lang="en-US">
+              <a:rPr lang="en-US" dirty="0">
                 <a:latin typeface="Calibri"/>
                 <a:ea typeface="Calibri"/>
                 <a:cs typeface="Calibri"/>
@@ -20138,7 +20292,7 @@
               </a:rPr>
               <a:t>Every time you add data - you need to rebuild the whole index.</a:t>
             </a:r>
-            <a:endParaRPr>
+            <a:endParaRPr dirty="0">
               <a:latin typeface="Calibri"/>
               <a:ea typeface="Calibri"/>
               <a:cs typeface="Calibri"/>
@@ -20156,7 +20310,7 @@
               <a:buNone/>
             </a:pPr>
             <a:r>
-              <a:rPr lang="en-US">
+              <a:rPr lang="en-US" dirty="0">
                 <a:latin typeface="Calibri"/>
                 <a:ea typeface="Calibri"/>
                 <a:cs typeface="Calibri"/>
@@ -20164,7 +20318,7 @@
               </a:rPr>
               <a:t>This article gives a nice explanation of what is II:</a:t>
             </a:r>
-            <a:endParaRPr>
+            <a:endParaRPr dirty="0">
               <a:latin typeface="Calibri"/>
               <a:ea typeface="Calibri"/>
               <a:cs typeface="Calibri"/>
@@ -20182,15 +20336,33 @@
               <a:buNone/>
             </a:pPr>
             <a:r>
-              <a:rPr lang="en-US">
+              <a:rPr lang="en-US" dirty="0">
                 <a:latin typeface="Calibri"/>
                 <a:ea typeface="Calibri"/>
                 <a:cs typeface="Calibri"/>
                 <a:sym typeface="Calibri"/>
               </a:rPr>
-              <a:t> - https://www.eternussolutions.com/2016/11/13/10-things-love-wave-analytics/</a:t>
+              <a:t> - https://</a:t>
             </a:r>
-            <a:endParaRPr>
+            <a:r>
+              <a:rPr lang="en-US" dirty="0" err="1">
+                <a:latin typeface="Calibri"/>
+                <a:ea typeface="Calibri"/>
+                <a:cs typeface="Calibri"/>
+                <a:sym typeface="Calibri"/>
+              </a:rPr>
+              <a:t>www.eternussolutions.com</a:t>
+            </a:r>
+            <a:r>
+              <a:rPr lang="en-US" dirty="0">
+                <a:latin typeface="Calibri"/>
+                <a:ea typeface="Calibri"/>
+                <a:cs typeface="Calibri"/>
+                <a:sym typeface="Calibri"/>
+              </a:rPr>
+              <a:t>/2016/11/13/10-things-love-wave-analytics/</a:t>
+            </a:r>
+            <a:endParaRPr dirty="0">
               <a:latin typeface="Calibri"/>
               <a:ea typeface="Calibri"/>
               <a:cs typeface="Calibri"/>
@@ -20208,7 +20380,7 @@
               <a:buNone/>
             </a:pPr>
             <a:r>
-              <a:rPr lang="en-US">
+              <a:rPr lang="en-US" dirty="0">
                 <a:latin typeface="Calibri"/>
                 <a:ea typeface="Calibri"/>
                 <a:cs typeface="Calibri"/>
@@ -20216,7 +20388,7 @@
               </a:rPr>
               <a:t>And here is a picture showing the data - and its inverted index.</a:t>
             </a:r>
-            <a:endParaRPr>
+            <a:endParaRPr dirty="0">
               <a:latin typeface="Calibri"/>
               <a:ea typeface="Calibri"/>
               <a:cs typeface="Calibri"/>
@@ -20288,7 +20460,7 @@
               <a:buNone/>
             </a:pPr>
             <a:r>
-              <a:rPr lang="en-US">
+              <a:rPr lang="en-US" dirty="0">
                 <a:latin typeface="Calibri"/>
                 <a:ea typeface="Calibri"/>
                 <a:cs typeface="Calibri"/>
@@ -20296,7 +20468,7 @@
               </a:rPr>
               <a:t>I've first worked with an SQL database with compressed bitmap indexes in 2001-2002. The database was called "Sybase IQ".</a:t>
             </a:r>
-            <a:endParaRPr>
+            <a:endParaRPr dirty="0">
               <a:latin typeface="Calibri"/>
               <a:ea typeface="Calibri"/>
               <a:cs typeface="Calibri"/>
@@ -20314,7 +20486,7 @@
               <a:buNone/>
             </a:pPr>
             <a:r>
-              <a:rPr lang="en-US">
+              <a:rPr lang="en-US" dirty="0">
                 <a:latin typeface="Calibri"/>
                 <a:ea typeface="Calibri"/>
                 <a:cs typeface="Calibri"/>
@@ -20322,7 +20494,7 @@
               </a:rPr>
               <a:t>It was an SQL database for doing analytics (as opposed to transactional processing).</a:t>
             </a:r>
-            <a:endParaRPr>
+            <a:endParaRPr dirty="0">
               <a:latin typeface="Calibri"/>
               <a:ea typeface="Calibri"/>
               <a:cs typeface="Calibri"/>
@@ -20339,7 +20511,7 @@
               </a:spcAft>
               <a:buNone/>
             </a:pPr>
-            <a:endParaRPr>
+            <a:endParaRPr dirty="0">
               <a:latin typeface="Calibri"/>
               <a:ea typeface="Calibri"/>
               <a:cs typeface="Calibri"/>
@@ -20357,7 +20529,7 @@
               <a:buNone/>
             </a:pPr>
             <a:r>
-              <a:rPr lang="en-US">
+              <a:rPr lang="en-US" dirty="0">
                 <a:latin typeface="Calibri"/>
                 <a:ea typeface="Calibri"/>
                 <a:cs typeface="Calibri"/>
@@ -20365,7 +20537,7 @@
               </a:rPr>
               <a:t>Since then most SQL database vendors have adopted this "columnar" indexing. They switched from row-oriented storage and indexing to compressed column-oriented storage. </a:t>
             </a:r>
-            <a:endParaRPr>
+            <a:endParaRPr dirty="0">
               <a:latin typeface="Calibri"/>
               <a:ea typeface="Calibri"/>
               <a:cs typeface="Calibri"/>
@@ -20383,7 +20555,7 @@
               <a:buNone/>
             </a:pPr>
             <a:r>
-              <a:rPr lang="en-US">
+              <a:rPr lang="en-US" dirty="0">
                 <a:latin typeface="Calibri"/>
                 <a:ea typeface="Calibri"/>
                 <a:cs typeface="Calibri"/>
@@ -20391,7 +20563,7 @@
               </a:rPr>
               <a:t>This is basically equivalent to the "Inverted Index" idea.</a:t>
             </a:r>
-            <a:endParaRPr>
+            <a:endParaRPr dirty="0">
               <a:latin typeface="Calibri"/>
               <a:ea typeface="Calibri"/>
               <a:cs typeface="Calibri"/>
@@ -20408,7 +20580,7 @@
               </a:spcAft>
               <a:buNone/>
             </a:pPr>
-            <a:endParaRPr>
+            <a:endParaRPr dirty="0">
               <a:latin typeface="Calibri"/>
               <a:ea typeface="Calibri"/>
               <a:cs typeface="Calibri"/>
@@ -20426,7 +20598,7 @@
               <a:buNone/>
             </a:pPr>
             <a:r>
-              <a:rPr lang="en-US">
+              <a:rPr lang="en-US" dirty="0">
                 <a:latin typeface="Calibri"/>
                 <a:ea typeface="Calibri"/>
                 <a:cs typeface="Calibri"/>
@@ -20434,7 +20606,7 @@
               </a:rPr>
               <a:t>Modern SQL databases can provide performance much faster than EA. You just need to select an implementation with appropriate characteristics.</a:t>
             </a:r>
-            <a:endParaRPr>
+            <a:endParaRPr dirty="0">
               <a:latin typeface="Calibri"/>
               <a:ea typeface="Calibri"/>
               <a:cs typeface="Calibri"/>
@@ -20451,7 +20623,7 @@
               </a:spcAft>
               <a:buNone/>
             </a:pPr>
-            <a:endParaRPr>
+            <a:endParaRPr dirty="0">
               <a:latin typeface="Calibri"/>
               <a:ea typeface="Calibri"/>
               <a:cs typeface="Calibri"/>
@@ -20469,7 +20641,7 @@
               <a:buNone/>
             </a:pPr>
             <a:r>
-              <a:rPr lang="en-US">
+              <a:rPr lang="en-US" dirty="0">
                 <a:latin typeface="Calibri"/>
                 <a:ea typeface="Calibri"/>
                 <a:cs typeface="Calibri"/>
@@ -20477,7 +20649,7 @@
               </a:rPr>
               <a:t>For example, on AWS (or other clouds) you can select a GPU-based SQL database on a server with terabytes of memory.</a:t>
             </a:r>
-            <a:endParaRPr>
+            <a:endParaRPr dirty="0">
               <a:latin typeface="Calibri"/>
               <a:ea typeface="Calibri"/>
               <a:cs typeface="Calibri"/>
@@ -20495,7 +20667,7 @@
               <a:buNone/>
             </a:pPr>
             <a:r>
-              <a:rPr lang="en-US">
+              <a:rPr lang="en-US" dirty="0">
                 <a:latin typeface="Calibri"/>
                 <a:ea typeface="Calibri"/>
                 <a:cs typeface="Calibri"/>
@@ -20503,7 +20675,7 @@
               </a:rPr>
               <a:t>This database can query the data and give updates with a speed of a live movie (milliseconds).</a:t>
             </a:r>
-            <a:endParaRPr>
+            <a:endParaRPr dirty="0">
               <a:latin typeface="Calibri"/>
               <a:ea typeface="Calibri"/>
               <a:cs typeface="Calibri"/>
@@ -20521,7 +20693,7 @@
               <a:buNone/>
             </a:pPr>
             <a:r>
-              <a:rPr lang="en-US">
+              <a:rPr lang="en-US" dirty="0">
                 <a:latin typeface="Calibri"/>
                 <a:ea typeface="Calibri"/>
                 <a:cs typeface="Calibri"/>
@@ -20529,7 +20701,7 @@
               </a:rPr>
               <a:t>And we can still use conventional ETL tools and enjoy fast data load speeds.</a:t>
             </a:r>
-            <a:endParaRPr>
+            <a:endParaRPr dirty="0">
               <a:latin typeface="Calibri"/>
               <a:ea typeface="Calibri"/>
               <a:cs typeface="Calibri"/>
@@ -20547,7 +20719,7 @@
               <a:buNone/>
             </a:pPr>
             <a:r>
-              <a:rPr lang="en-US">
+              <a:rPr lang="en-US" dirty="0">
                 <a:latin typeface="Calibri"/>
                 <a:ea typeface="Calibri"/>
                 <a:cs typeface="Calibri"/>
@@ -20555,7 +20727,7 @@
               </a:rPr>
               <a:t>And it will be probably cheaper than EA.</a:t>
             </a:r>
-            <a:endParaRPr>
+            <a:endParaRPr dirty="0">
               <a:latin typeface="Calibri"/>
               <a:ea typeface="Calibri"/>
               <a:cs typeface="Calibri"/>
@@ -20813,6 +20985,578 @@
         </p:txBody>
       </p:sp>
     </p:spTree>
+  </p:cSld>
+  <p:clrMapOvr>
+    <a:masterClrMapping/>
+  </p:clrMapOvr>
+</p:sld>
+</file>
+
+<file path=ppt/slides/slide6.xml><?xml version="1.0" encoding="utf-8"?>
+<p:sld xmlns:a="http://schemas.openxmlformats.org/drawingml/2006/main" xmlns:r="http://schemas.openxmlformats.org/officeDocument/2006/relationships" xmlns:p="http://schemas.openxmlformats.org/presentationml/2006/main">
+  <p:cSld>
+    <p:spTree>
+      <p:nvGrpSpPr>
+        <p:cNvPr id="1" name=""/>
+        <p:cNvGrpSpPr/>
+        <p:nvPr/>
+      </p:nvGrpSpPr>
+      <p:grpSpPr>
+        <a:xfrm>
+          <a:off x="0" y="0"/>
+          <a:ext cx="0" cy="0"/>
+          <a:chOff x="0" y="0"/>
+          <a:chExt cx="0" cy="0"/>
+        </a:xfrm>
+      </p:grpSpPr>
+      <p:sp>
+        <p:nvSpPr>
+          <p:cNvPr id="2" name="TextBox 1">
+            <a:extLst>
+              <a:ext uri="{FF2B5EF4-FFF2-40B4-BE49-F238E27FC236}">
+                <a16:creationId xmlns:a16="http://schemas.microsoft.com/office/drawing/2014/main" id="{263A6C75-68B8-5644-948E-180B3A70F546}"/>
+              </a:ext>
+            </a:extLst>
+          </p:cNvPr>
+          <p:cNvSpPr txBox="1"/>
+          <p:nvPr/>
+        </p:nvSpPr>
+        <p:spPr>
+          <a:xfrm>
+            <a:off x="120316" y="108284"/>
+            <a:ext cx="6015789" cy="461665"/>
+          </a:xfrm>
+          <a:prstGeom prst="rect">
+            <a:avLst/>
+          </a:prstGeom>
+          <a:noFill/>
+        </p:spPr>
+        <p:txBody>
+          <a:bodyPr wrap="square" rtlCol="0">
+            <a:spAutoFit/>
+          </a:bodyPr>
+          <a:lstStyle/>
+          <a:p>
+            <a:r>
+              <a:rPr lang="en-US" sz="2400" b="1" dirty="0">
+                <a:latin typeface="Arial" panose="020B0604020202020204" pitchFamily="34" charset="0"/>
+                <a:cs typeface="Arial" panose="020B0604020202020204" pitchFamily="34" charset="0"/>
+              </a:rPr>
+              <a:t>Columnar Index = </a:t>
+            </a:r>
+            <a:r>
+              <a:rPr lang="en-US" sz="2400" b="1" dirty="0" err="1">
+                <a:latin typeface="Arial" panose="020B0604020202020204" pitchFamily="34" charset="0"/>
+                <a:cs typeface="Arial" panose="020B0604020202020204" pitchFamily="34" charset="0"/>
+              </a:rPr>
+              <a:t>Columnstore</a:t>
+            </a:r>
+            <a:r>
+              <a:rPr lang="en-US" sz="2400" b="1" dirty="0">
+                <a:latin typeface="Arial" panose="020B0604020202020204" pitchFamily="34" charset="0"/>
+                <a:cs typeface="Arial" panose="020B0604020202020204" pitchFamily="34" charset="0"/>
+              </a:rPr>
+              <a:t> Indexes</a:t>
+            </a:r>
+          </a:p>
+        </p:txBody>
+      </p:sp>
+      <p:sp>
+        <p:nvSpPr>
+          <p:cNvPr id="3" name="TextBox 2">
+            <a:extLst>
+              <a:ext uri="{FF2B5EF4-FFF2-40B4-BE49-F238E27FC236}">
+                <a16:creationId xmlns:a16="http://schemas.microsoft.com/office/drawing/2014/main" id="{175A4C8B-3597-654F-9DC6-BEBE8FF288E1}"/>
+              </a:ext>
+            </a:extLst>
+          </p:cNvPr>
+          <p:cNvSpPr txBox="1"/>
+          <p:nvPr/>
+        </p:nvSpPr>
+        <p:spPr>
+          <a:xfrm>
+            <a:off x="108283" y="770021"/>
+            <a:ext cx="7086601" cy="2031325"/>
+          </a:xfrm>
+          <a:prstGeom prst="rect">
+            <a:avLst/>
+          </a:prstGeom>
+          <a:noFill/>
+        </p:spPr>
+        <p:txBody>
+          <a:bodyPr wrap="square" rtlCol="0">
+            <a:spAutoFit/>
+          </a:bodyPr>
+          <a:lstStyle/>
+          <a:p>
+            <a:r>
+              <a:rPr lang="en-US" dirty="0"/>
+              <a:t>A column-oriented DBMS (or columnar database management system) stores data tables by column rather than by row. Mostly used for analytical queries on large tables. Query performance can be 10-40 times faster than in traditional row-accessing DBMS.</a:t>
+            </a:r>
+          </a:p>
+          <a:p>
+            <a:endParaRPr lang="en-US" dirty="0"/>
+          </a:p>
+          <a:p>
+            <a:r>
+              <a:rPr lang="en-US" dirty="0"/>
+              <a:t>But inserts are slower (need to add and compress) - not suited for OLTP transactional databases.</a:t>
+            </a:r>
+          </a:p>
+          <a:p>
+            <a:endParaRPr lang="en-US" dirty="0"/>
+          </a:p>
+          <a:p>
+            <a:r>
+              <a:rPr lang="en-US" dirty="0"/>
+              <a:t>Column data is of uniform type – therefore it can be compressed better than row-oriented data (using bitmap indexes and sorting). </a:t>
+            </a:r>
+          </a:p>
+        </p:txBody>
+      </p:sp>
+      <p:pic>
+        <p:nvPicPr>
+          <p:cNvPr id="4" name="Picture 3">
+            <a:extLst>
+              <a:ext uri="{FF2B5EF4-FFF2-40B4-BE49-F238E27FC236}">
+                <a16:creationId xmlns:a16="http://schemas.microsoft.com/office/drawing/2014/main" id="{701914E6-B684-EF42-BA16-C01A7614821D}"/>
+              </a:ext>
+            </a:extLst>
+          </p:cNvPr>
+          <p:cNvPicPr>
+            <a:picLocks noChangeAspect="1"/>
+          </p:cNvPicPr>
+          <p:nvPr/>
+        </p:nvPicPr>
+        <p:blipFill>
+          <a:blip r:embed="rId2" cstate="email">
+            <a:extLst>
+              <a:ext uri="{28A0092B-C50C-407E-A947-70E740481C1C}">
+                <a14:useLocalDpi xmlns:a14="http://schemas.microsoft.com/office/drawing/2010/main"/>
+              </a:ext>
+            </a:extLst>
+          </a:blip>
+          <a:stretch>
+            <a:fillRect/>
+          </a:stretch>
+        </p:blipFill>
+        <p:spPr>
+          <a:xfrm>
+            <a:off x="8372642" y="108284"/>
+            <a:ext cx="3683000" cy="1879600"/>
+          </a:xfrm>
+          <a:prstGeom prst="rect">
+            <a:avLst/>
+          </a:prstGeom>
+        </p:spPr>
+      </p:pic>
+      <p:graphicFrame>
+        <p:nvGraphicFramePr>
+          <p:cNvPr id="5" name="Table 4">
+            <a:extLst>
+              <a:ext uri="{FF2B5EF4-FFF2-40B4-BE49-F238E27FC236}">
+                <a16:creationId xmlns:a16="http://schemas.microsoft.com/office/drawing/2014/main" id="{377DE5E6-0D8B-2547-A9FF-70ADBADC8F8C}"/>
+              </a:ext>
+            </a:extLst>
+          </p:cNvPr>
+          <p:cNvGraphicFramePr>
+            <a:graphicFrameLocks noGrp="1"/>
+          </p:cNvGraphicFramePr>
+          <p:nvPr>
+            <p:extLst>
+              <p:ext uri="{D42A27DB-BD31-4B8C-83A1-F6EECF244321}">
+                <p14:modId xmlns:p14="http://schemas.microsoft.com/office/powerpoint/2010/main" val="1138924180"/>
+              </p:ext>
+            </p:extLst>
+          </p:nvPr>
+        </p:nvGraphicFramePr>
+        <p:xfrm>
+          <a:off x="120316" y="2934783"/>
+          <a:ext cx="7303168" cy="3604742"/>
+        </p:xfrm>
+        <a:graphic>
+          <a:graphicData uri="http://schemas.openxmlformats.org/drawingml/2006/table">
+            <a:tbl>
+              <a:tblPr firstRow="1" bandRow="1">
+                <a:tableStyleId>{5C22544A-7EE6-4342-B048-85BDC9FD1C3A}</a:tableStyleId>
+              </a:tblPr>
+              <a:tblGrid>
+                <a:gridCol w="3651584">
+                  <a:extLst>
+                    <a:ext uri="{9D8B030D-6E8A-4147-A177-3AD203B41FA5}">
+                      <a16:colId xmlns:a16="http://schemas.microsoft.com/office/drawing/2014/main" val="2504409829"/>
+                    </a:ext>
+                  </a:extLst>
+                </a:gridCol>
+                <a:gridCol w="3651584">
+                  <a:extLst>
+                    <a:ext uri="{9D8B030D-6E8A-4147-A177-3AD203B41FA5}">
+                      <a16:colId xmlns:a16="http://schemas.microsoft.com/office/drawing/2014/main" val="1923324498"/>
+                    </a:ext>
+                  </a:extLst>
+                </a:gridCol>
+              </a:tblGrid>
+              <a:tr h="0">
+                <a:tc>
+                  <a:txBody>
+                    <a:bodyPr/>
+                    <a:lstStyle/>
+                    <a:p>
+                      <a:r>
+                        <a:rPr lang="en-US" dirty="0"/>
+                        <a:t>Traditional Row-storing DB</a:t>
+                      </a:r>
+                    </a:p>
+                  </a:txBody>
+                  <a:tcPr/>
+                </a:tc>
+                <a:tc>
+                  <a:txBody>
+                    <a:bodyPr/>
+                    <a:lstStyle/>
+                    <a:p>
+                      <a:r>
+                        <a:rPr lang="en-US" dirty="0"/>
+                        <a:t>Columnar storing DB</a:t>
+                      </a:r>
+                    </a:p>
+                  </a:txBody>
+                  <a:tcPr/>
+                </a:tc>
+                <a:extLst>
+                  <a:ext uri="{0D108BD9-81ED-4DB2-BD59-A6C34878D82A}">
+                    <a16:rowId xmlns:a16="http://schemas.microsoft.com/office/drawing/2014/main" val="327520369"/>
+                  </a:ext>
+                </a:extLst>
+              </a:tr>
+              <a:tr h="852420">
+                <a:tc>
+                  <a:txBody>
+                    <a:bodyPr/>
+                    <a:lstStyle/>
+                    <a:p>
+                      <a:r>
+                        <a:rPr lang="en-US" dirty="0"/>
+                        <a:t>Excessive disk IO – read whole rows, discards most columns</a:t>
+                      </a:r>
+                    </a:p>
+                  </a:txBody>
+                  <a:tcPr/>
+                </a:tc>
+                <a:tc>
+                  <a:txBody>
+                    <a:bodyPr/>
+                    <a:lstStyle/>
+                    <a:p>
+                      <a:r>
+                        <a:rPr lang="en-US" dirty="0"/>
+                        <a:t>Disk IO smaller because we need to read only few columns. This allows to fit more rows into memory, thus making the query much faster </a:t>
+                      </a:r>
+                      <a:r>
+                        <a:rPr lang="en-US"/>
+                        <a:t>(all-in-memory).</a:t>
+                      </a:r>
+                      <a:endParaRPr lang="en-US" dirty="0"/>
+                    </a:p>
+                  </a:txBody>
+                  <a:tcPr/>
+                </a:tc>
+                <a:extLst>
+                  <a:ext uri="{0D108BD9-81ED-4DB2-BD59-A6C34878D82A}">
+                    <a16:rowId xmlns:a16="http://schemas.microsoft.com/office/drawing/2014/main" val="687469239"/>
+                  </a:ext>
+                </a:extLst>
+              </a:tr>
+              <a:tr h="587222">
+                <a:tc>
+                  <a:txBody>
+                    <a:bodyPr/>
+                    <a:lstStyle/>
+                    <a:p>
+                      <a:r>
+                        <a:rPr lang="en-US" dirty="0"/>
+                        <a:t>Compression is not very good.</a:t>
+                      </a:r>
+                    </a:p>
+                  </a:txBody>
+                  <a:tcPr/>
+                </a:tc>
+                <a:tc>
+                  <a:txBody>
+                    <a:bodyPr/>
+                    <a:lstStyle/>
+                    <a:p>
+                      <a:r>
+                        <a:rPr lang="en-US" dirty="0"/>
+                        <a:t>Good data compression using the fact that all data in one column has the same type.</a:t>
+                      </a:r>
+                    </a:p>
+                  </a:txBody>
+                  <a:tcPr/>
+                </a:tc>
+                <a:extLst>
+                  <a:ext uri="{0D108BD9-81ED-4DB2-BD59-A6C34878D82A}">
+                    <a16:rowId xmlns:a16="http://schemas.microsoft.com/office/drawing/2014/main" val="55498359"/>
+                  </a:ext>
+                </a:extLst>
+              </a:tr>
+              <a:tr h="454624">
+                <a:tc>
+                  <a:txBody>
+                    <a:bodyPr/>
+                    <a:lstStyle/>
+                    <a:p>
+                      <a:pPr marL="0" marR="0" lvl="0" indent="0" algn="l" defTabSz="914400" rtl="0" eaLnBrk="1" fontAlgn="auto" latinLnBrk="0" hangingPunct="1">
+                        <a:lnSpc>
+                          <a:spcPct val="100000"/>
+                        </a:lnSpc>
+                        <a:spcBef>
+                          <a:spcPts val="0"/>
+                        </a:spcBef>
+                        <a:spcAft>
+                          <a:spcPts val="0"/>
+                        </a:spcAft>
+                        <a:buClr>
+                          <a:srgbClr val="000000"/>
+                        </a:buClr>
+                        <a:buSzTx/>
+                        <a:buFont typeface="Arial"/>
+                        <a:buNone/>
+                        <a:tabLst/>
+                        <a:defRPr/>
+                      </a:pPr>
+                      <a:r>
+                        <a:rPr lang="en-US" dirty="0"/>
+                        <a:t>Good random access.</a:t>
+                      </a:r>
+                    </a:p>
+                  </a:txBody>
+                  <a:tcPr/>
+                </a:tc>
+                <a:tc>
+                  <a:txBody>
+                    <a:bodyPr/>
+                    <a:lstStyle/>
+                    <a:p>
+                      <a:r>
+                        <a:rPr lang="en-US" dirty="0"/>
+                        <a:t>Good for analytics, not so good for random access.</a:t>
+                      </a:r>
+                    </a:p>
+                  </a:txBody>
+                  <a:tcPr/>
+                </a:tc>
+                <a:extLst>
+                  <a:ext uri="{0D108BD9-81ED-4DB2-BD59-A6C34878D82A}">
+                    <a16:rowId xmlns:a16="http://schemas.microsoft.com/office/drawing/2014/main" val="309893754"/>
+                  </a:ext>
+                </a:extLst>
+              </a:tr>
+              <a:tr h="297506">
+                <a:tc>
+                  <a:txBody>
+                    <a:bodyPr/>
+                    <a:lstStyle/>
+                    <a:p>
+                      <a:pPr marL="0" marR="0" lvl="0" indent="0" algn="l" defTabSz="914400" rtl="0" eaLnBrk="1" fontAlgn="auto" latinLnBrk="0" hangingPunct="1">
+                        <a:lnSpc>
+                          <a:spcPct val="100000"/>
+                        </a:lnSpc>
+                        <a:spcBef>
+                          <a:spcPts val="0"/>
+                        </a:spcBef>
+                        <a:spcAft>
+                          <a:spcPts val="0"/>
+                        </a:spcAft>
+                        <a:buClr>
+                          <a:srgbClr val="000000"/>
+                        </a:buClr>
+                        <a:buSzTx/>
+                        <a:buFont typeface="Arial"/>
+                        <a:buNone/>
+                        <a:tabLst/>
+                        <a:defRPr/>
+                      </a:pPr>
+                      <a:r>
+                        <a:rPr lang="en-US" dirty="0"/>
+                        <a:t>Can use clustered and </a:t>
+                      </a:r>
+                      <a:r>
+                        <a:rPr lang="en-US" dirty="0" err="1"/>
+                        <a:t>nonclustered</a:t>
+                      </a:r>
+                      <a:r>
+                        <a:rPr lang="en-US" dirty="0"/>
+                        <a:t> indexes.</a:t>
+                      </a:r>
+                    </a:p>
+                  </a:txBody>
+                  <a:tcPr/>
+                </a:tc>
+                <a:tc>
+                  <a:txBody>
+                    <a:bodyPr/>
+                    <a:lstStyle/>
+                    <a:p>
+                      <a:pPr marL="0" marR="0" lvl="0" indent="0" algn="l" defTabSz="914400" rtl="0" eaLnBrk="1" fontAlgn="auto" latinLnBrk="0" hangingPunct="1">
+                        <a:lnSpc>
+                          <a:spcPct val="100000"/>
+                        </a:lnSpc>
+                        <a:spcBef>
+                          <a:spcPts val="0"/>
+                        </a:spcBef>
+                        <a:spcAft>
+                          <a:spcPts val="0"/>
+                        </a:spcAft>
+                        <a:buClr>
+                          <a:srgbClr val="000000"/>
+                        </a:buClr>
+                        <a:buSzTx/>
+                        <a:buFont typeface="Arial"/>
+                        <a:buNone/>
+                        <a:tabLst/>
+                        <a:defRPr/>
+                      </a:pPr>
+                      <a:r>
+                        <a:rPr lang="en-US" dirty="0" err="1"/>
+                        <a:t>Columnstore</a:t>
+                      </a:r>
+                      <a:r>
+                        <a:rPr lang="en-US" dirty="0"/>
+                        <a:t> index is usually clustered. But also can use separate </a:t>
+                      </a:r>
+                      <a:r>
+                        <a:rPr lang="en-US" dirty="0" err="1"/>
+                        <a:t>nonclustered</a:t>
+                      </a:r>
+                      <a:r>
+                        <a:rPr lang="en-US" dirty="0"/>
+                        <a:t> indexes for some columns.</a:t>
+                      </a:r>
+                    </a:p>
+                  </a:txBody>
+                  <a:tcPr/>
+                </a:tc>
+                <a:extLst>
+                  <a:ext uri="{0D108BD9-81ED-4DB2-BD59-A6C34878D82A}">
+                    <a16:rowId xmlns:a16="http://schemas.microsoft.com/office/drawing/2014/main" val="4187341525"/>
+                  </a:ext>
+                </a:extLst>
+              </a:tr>
+              <a:tr h="457538">
+                <a:tc>
+                  <a:txBody>
+                    <a:bodyPr/>
+                    <a:lstStyle/>
+                    <a:p>
+                      <a:pPr marL="0" marR="0" lvl="0" indent="0" algn="l" defTabSz="914400" rtl="0" eaLnBrk="1" fontAlgn="auto" latinLnBrk="0" hangingPunct="1">
+                        <a:lnSpc>
+                          <a:spcPct val="100000"/>
+                        </a:lnSpc>
+                        <a:spcBef>
+                          <a:spcPts val="0"/>
+                        </a:spcBef>
+                        <a:spcAft>
+                          <a:spcPts val="0"/>
+                        </a:spcAft>
+                        <a:buClr>
+                          <a:srgbClr val="000000"/>
+                        </a:buClr>
+                        <a:buSzTx/>
+                        <a:buFont typeface="Arial"/>
+                        <a:buNone/>
+                        <a:tabLst/>
+                        <a:defRPr/>
+                      </a:pPr>
+                      <a:r>
+                        <a:rPr lang="en-US" dirty="0"/>
+                        <a:t>Good for transactions (OLTP)</a:t>
+                      </a:r>
+                    </a:p>
+                    <a:p>
+                      <a:endParaRPr lang="en-US" dirty="0"/>
+                    </a:p>
+                  </a:txBody>
+                  <a:tcPr/>
+                </a:tc>
+                <a:tc>
+                  <a:txBody>
+                    <a:bodyPr/>
+                    <a:lstStyle/>
+                    <a:p>
+                      <a:pPr marL="0" marR="0" lvl="0" indent="0" algn="l" defTabSz="914400" rtl="0" eaLnBrk="1" fontAlgn="auto" latinLnBrk="0" hangingPunct="1">
+                        <a:lnSpc>
+                          <a:spcPct val="100000"/>
+                        </a:lnSpc>
+                        <a:spcBef>
+                          <a:spcPts val="0"/>
+                        </a:spcBef>
+                        <a:spcAft>
+                          <a:spcPts val="0"/>
+                        </a:spcAft>
+                        <a:buClr>
+                          <a:srgbClr val="000000"/>
+                        </a:buClr>
+                        <a:buSzTx/>
+                        <a:buFont typeface="Arial"/>
+                        <a:buNone/>
+                        <a:tabLst/>
+                        <a:defRPr/>
+                      </a:pPr>
+                      <a:r>
+                        <a:rPr lang="en-US" dirty="0"/>
+                        <a:t>Good for read-only analytical queries in big fact tables (OLAP)</a:t>
+                      </a:r>
+                    </a:p>
+                  </a:txBody>
+                  <a:tcPr/>
+                </a:tc>
+                <a:extLst>
+                  <a:ext uri="{0D108BD9-81ED-4DB2-BD59-A6C34878D82A}">
+                    <a16:rowId xmlns:a16="http://schemas.microsoft.com/office/drawing/2014/main" val="4131844801"/>
+                  </a:ext>
+                </a:extLst>
+              </a:tr>
+            </a:tbl>
+          </a:graphicData>
+        </a:graphic>
+      </p:graphicFrame>
+      <p:pic>
+        <p:nvPicPr>
+          <p:cNvPr id="6" name="Picture 5">
+            <a:extLst>
+              <a:ext uri="{FF2B5EF4-FFF2-40B4-BE49-F238E27FC236}">
+                <a16:creationId xmlns:a16="http://schemas.microsoft.com/office/drawing/2014/main" id="{7F9824DD-4EDC-7E43-AAE2-3E9CD88A7B7A}"/>
+              </a:ext>
+            </a:extLst>
+          </p:cNvPr>
+          <p:cNvPicPr>
+            <a:picLocks noChangeAspect="1"/>
+          </p:cNvPicPr>
+          <p:nvPr/>
+        </p:nvPicPr>
+        <p:blipFill>
+          <a:blip r:embed="rId3"/>
+          <a:stretch>
+            <a:fillRect/>
+          </a:stretch>
+        </p:blipFill>
+        <p:spPr>
+          <a:xfrm>
+            <a:off x="8372642" y="2709110"/>
+            <a:ext cx="3733721" cy="2380247"/>
+          </a:xfrm>
+          <a:prstGeom prst="rect">
+            <a:avLst/>
+          </a:prstGeom>
+        </p:spPr>
+      </p:pic>
+    </p:spTree>
+    <p:extLst>
+      <p:ext uri="{BB962C8B-B14F-4D97-AF65-F5344CB8AC3E}">
+        <p14:creationId xmlns:p14="http://schemas.microsoft.com/office/powerpoint/2010/main" val="1515266594"/>
+      </p:ext>
+    </p:extLst>
   </p:cSld>
   <p:clrMapOvr>
     <a:masterClrMapping/>

--- a/analytics_dashboards.pptx
+++ b/analytics_dashboards.pptx
@@ -16321,7 +16321,7 @@
               <a:buNone/>
             </a:pPr>
             <a:r>
-              <a:rPr lang="en-US" sz="1800" dirty="0">
+              <a:rPr lang="en-US" sz="1600" dirty="0">
                 <a:latin typeface="Calibri"/>
                 <a:ea typeface="Calibri"/>
                 <a:cs typeface="Calibri"/>
@@ -16329,7 +16329,7 @@
               </a:rPr>
               <a:t>There are many tools on the market to help visualize data in graphs and dashboards.</a:t>
             </a:r>
-            <a:endParaRPr sz="1800" dirty="0">
+            <a:endParaRPr sz="1600" dirty="0">
               <a:latin typeface="Calibri"/>
               <a:ea typeface="Calibri"/>
               <a:cs typeface="Calibri"/>
@@ -16346,7 +16346,37 @@
               </a:spcAft>
               <a:buNone/>
             </a:pPr>
-            <a:endParaRPr sz="1800" dirty="0">
+            <a:r>
+              <a:rPr lang="en-US" sz="1600" dirty="0">
+                <a:latin typeface="Calibri"/>
+                <a:ea typeface="Calibri"/>
+                <a:cs typeface="Calibri"/>
+                <a:sym typeface="Calibri"/>
+              </a:rPr>
+              <a:t>An </a:t>
+            </a:r>
+            <a:r>
+              <a:rPr lang="en-US" sz="1600" b="1" dirty="0">
+                <a:solidFill>
+                  <a:srgbClr val="1155CC"/>
+                </a:solidFill>
+                <a:latin typeface="Calibri"/>
+                <a:ea typeface="Calibri"/>
+                <a:cs typeface="Calibri"/>
+                <a:sym typeface="Calibri"/>
+              </a:rPr>
+              <a:t>interactive dashboard</a:t>
+            </a:r>
+            <a:r>
+              <a:rPr lang="en-US" sz="1600" dirty="0">
+                <a:latin typeface="Calibri"/>
+                <a:ea typeface="Calibri"/>
+                <a:cs typeface="Calibri"/>
+                <a:sym typeface="Calibri"/>
+              </a:rPr>
+              <a:t> is a combination of graphs, text fields, and controls </a:t>
+            </a:r>
+            <a:endParaRPr sz="1600" dirty="0">
               <a:latin typeface="Calibri"/>
               <a:ea typeface="Calibri"/>
               <a:cs typeface="Calibri"/>
@@ -16364,36 +16394,15 @@
               <a:buNone/>
             </a:pPr>
             <a:r>
-              <a:rPr lang="en-US" sz="1800" dirty="0">
-                <a:latin typeface="Calibri"/>
-                <a:ea typeface="Calibri"/>
-                <a:cs typeface="Calibri"/>
-                <a:sym typeface="Calibri"/>
-              </a:rPr>
-              <a:t>An </a:t>
-            </a:r>
-            <a:r>
-              <a:rPr lang="en-US" sz="1800" b="1" dirty="0">
-                <a:solidFill>
-                  <a:srgbClr val="1155CC"/>
-                </a:solidFill>
-                <a:latin typeface="Calibri"/>
-                <a:ea typeface="Calibri"/>
-                <a:cs typeface="Calibri"/>
-                <a:sym typeface="Calibri"/>
-              </a:rPr>
-              <a:t>interactive dashboard</a:t>
-            </a:r>
-            <a:r>
-              <a:rPr lang="en-US" sz="1800" dirty="0">
-                <a:latin typeface="Calibri"/>
-                <a:ea typeface="Calibri"/>
-                <a:cs typeface="Calibri"/>
-                <a:sym typeface="Calibri"/>
-              </a:rPr>
-              <a:t> is a combination of graphs, text fields, and controls </a:t>
-            </a:r>
-            <a:endParaRPr sz="1800" dirty="0">
+              <a:rPr lang="en-US" sz="1600" dirty="0">
+                <a:latin typeface="Calibri"/>
+                <a:ea typeface="Calibri"/>
+                <a:cs typeface="Calibri"/>
+                <a:sym typeface="Calibri"/>
+              </a:rPr>
+              <a:t>allowing user to select the data, filter data (for example, by date range or</a:t>
+            </a:r>
+            <a:endParaRPr sz="1600" dirty="0">
               <a:latin typeface="Calibri"/>
               <a:ea typeface="Calibri"/>
               <a:cs typeface="Calibri"/>
@@ -16411,15 +16420,15 @@
               <a:buNone/>
             </a:pPr>
             <a:r>
-              <a:rPr lang="en-US" sz="1800" dirty="0">
-                <a:latin typeface="Calibri"/>
-                <a:ea typeface="Calibri"/>
-                <a:cs typeface="Calibri"/>
-                <a:sym typeface="Calibri"/>
-              </a:rPr>
-              <a:t>allowing user to select the data, filter data (for example, by date range or</a:t>
-            </a:r>
-            <a:endParaRPr sz="1800" dirty="0">
+              <a:rPr lang="en-US" sz="1600" dirty="0">
+                <a:latin typeface="Calibri"/>
+                <a:ea typeface="Calibri"/>
+                <a:cs typeface="Calibri"/>
+                <a:sym typeface="Calibri"/>
+              </a:rPr>
+              <a:t>by geography or by user),  aggregate, compare. etc.</a:t>
+            </a:r>
+            <a:endParaRPr sz="1600" dirty="0">
               <a:latin typeface="Calibri"/>
               <a:ea typeface="Calibri"/>
               <a:cs typeface="Calibri"/>
@@ -16437,80 +16446,195 @@
               <a:buNone/>
             </a:pPr>
             <a:r>
-              <a:rPr lang="en-US" sz="1800" dirty="0">
-                <a:latin typeface="Calibri"/>
-                <a:ea typeface="Calibri"/>
-                <a:cs typeface="Calibri"/>
-                <a:sym typeface="Calibri"/>
-              </a:rPr>
-              <a:t>by geography or by user),  aggregate, compare. etc.</a:t>
-            </a:r>
-            <a:endParaRPr sz="1800" dirty="0">
-              <a:latin typeface="Calibri"/>
+              <a:rPr lang="en-US" sz="1600" dirty="0">
+                <a:latin typeface="Calibri"/>
+                <a:ea typeface="Calibri"/>
+                <a:cs typeface="Calibri"/>
+                <a:sym typeface="Calibri"/>
+              </a:rPr>
+              <a:t>The data queries are usually formulated in SQL</a:t>
+            </a:r>
+          </a:p>
+          <a:p>
+            <a:pPr marL="0" lvl="0" indent="0" algn="l" rtl="0">
+              <a:spcBef>
+                <a:spcPts val="0"/>
+              </a:spcBef>
+              <a:spcAft>
+                <a:spcPts val="0"/>
+              </a:spcAft>
+              <a:buNone/>
+            </a:pPr>
+            <a:r>
+              <a:rPr lang="en-US" sz="1600" dirty="0">
+                <a:latin typeface="Calibri"/>
+                <a:ea typeface="Calibri"/>
+                <a:cs typeface="Calibri"/>
+                <a:sym typeface="Calibri"/>
+              </a:rPr>
+              <a:t>Most common dashboards are: </a:t>
+            </a:r>
+          </a:p>
+          <a:p>
+            <a:pPr lvl="0"/>
+            <a:endParaRPr lang="en-US" sz="1600" dirty="0">
+              <a:latin typeface="+mj-lt"/>
               <a:ea typeface="Calibri"/>
               <a:cs typeface="Calibri"/>
               <a:sym typeface="Calibri"/>
             </a:endParaRPr>
           </a:p>
           <a:p>
-            <a:pPr marL="0" lvl="0" indent="0" algn="l" rtl="0">
-              <a:spcBef>
-                <a:spcPts val="0"/>
-              </a:spcBef>
-              <a:spcAft>
-                <a:spcPts val="0"/>
-              </a:spcAft>
-              <a:buNone/>
+            <a:pPr marL="285750" lvl="0" indent="-285750">
+              <a:buSzPct val="100000"/>
+              <a:buFont typeface="Wingdings" pitchFamily="2" charset="2"/>
+              <a:buChar char="§"/>
             </a:pPr>
-            <a:endParaRPr sz="1800" dirty="0">
-              <a:latin typeface="Calibri"/>
+            <a:r>
+              <a:rPr lang="en-US" sz="1600" dirty="0">
+                <a:solidFill>
+                  <a:schemeClr val="dk1"/>
+                </a:solidFill>
+                <a:latin typeface="+mj-lt"/>
+                <a:ea typeface="Calibri"/>
+                <a:cs typeface="Calibri"/>
+                <a:sym typeface="Calibri"/>
+              </a:rPr>
+              <a:t>Microsoft Power BI - </a:t>
+            </a:r>
+            <a:r>
+              <a:rPr lang="en-US" sz="1600" dirty="0">
+                <a:latin typeface="+mj-lt"/>
+                <a:hlinkClick r:id="rId3"/>
+              </a:rPr>
+              <a:t>https://powerbi.microsoft.com/en-us/</a:t>
+            </a:r>
+            <a:endParaRPr lang="en-US" sz="1600" dirty="0">
+              <a:solidFill>
+                <a:schemeClr val="dk1"/>
+              </a:solidFill>
+              <a:latin typeface="+mj-lt"/>
               <a:ea typeface="Calibri"/>
               <a:cs typeface="Calibri"/>
               <a:sym typeface="Calibri"/>
             </a:endParaRPr>
           </a:p>
           <a:p>
-            <a:pPr marL="0" lvl="0" indent="0" algn="l" rtl="0">
-              <a:spcBef>
-                <a:spcPts val="0"/>
-              </a:spcBef>
-              <a:spcAft>
-                <a:spcPts val="0"/>
-              </a:spcAft>
-              <a:buNone/>
+            <a:pPr marL="285750" lvl="0" indent="-285750">
+              <a:buSzPct val="100000"/>
+              <a:buFont typeface="Wingdings" pitchFamily="2" charset="2"/>
+              <a:buChar char="§"/>
             </a:pPr>
             <a:r>
-              <a:rPr lang="en-US" sz="1800" dirty="0">
-                <a:latin typeface="Calibri"/>
-                <a:ea typeface="Calibri"/>
-                <a:cs typeface="Calibri"/>
-                <a:sym typeface="Calibri"/>
-              </a:rPr>
-              <a:t>The data queries are usually formulated in SQL</a:t>
-            </a:r>
-            <a:endParaRPr sz="1800" dirty="0">
-              <a:latin typeface="Calibri"/>
+              <a:rPr lang="en-US" sz="1600" dirty="0">
+                <a:solidFill>
+                  <a:schemeClr val="dk1"/>
+                </a:solidFill>
+                <a:latin typeface="+mj-lt"/>
+                <a:ea typeface="Calibri"/>
+                <a:cs typeface="Calibri"/>
+                <a:sym typeface="Calibri"/>
+              </a:rPr>
+              <a:t>Tableau - </a:t>
+            </a:r>
+            <a:r>
+              <a:rPr lang="en-US" sz="1600" dirty="0">
+                <a:latin typeface="+mj-lt"/>
+                <a:hlinkClick r:id="rId4"/>
+              </a:rPr>
+              <a:t>https://www.tableau.com/</a:t>
+            </a:r>
+            <a:endParaRPr sz="1600" dirty="0">
+              <a:latin typeface="+mj-lt"/>
               <a:ea typeface="Calibri"/>
               <a:cs typeface="Calibri"/>
               <a:sym typeface="Calibri"/>
             </a:endParaRPr>
           </a:p>
           <a:p>
-            <a:pPr marL="0" lvl="0" indent="0" algn="l" rtl="0">
-              <a:spcBef>
-                <a:spcPts val="0"/>
-              </a:spcBef>
-              <a:spcAft>
-                <a:spcPts val="0"/>
-              </a:spcAft>
-              <a:buNone/>
+            <a:pPr marL="285750" lvl="0" indent="-285750">
+              <a:buSzPct val="100000"/>
+              <a:buFont typeface="Wingdings" pitchFamily="2" charset="2"/>
+              <a:buChar char="§"/>
             </a:pPr>
-            <a:endParaRPr sz="1800" dirty="0">
-              <a:latin typeface="Calibri"/>
-              <a:ea typeface="Calibri"/>
-              <a:cs typeface="Calibri"/>
-              <a:sym typeface="Calibri"/>
-            </a:endParaRPr>
+            <a:r>
+              <a:rPr lang="en-US" sz="1600" dirty="0">
+                <a:latin typeface="+mj-lt"/>
+                <a:ea typeface="Calibri"/>
+                <a:cs typeface="Calibri"/>
+                <a:sym typeface="Calibri"/>
+              </a:rPr>
+              <a:t>Qlik - </a:t>
+            </a:r>
+            <a:r>
+              <a:rPr lang="en-US" sz="1600" dirty="0">
+                <a:latin typeface="+mj-lt"/>
+                <a:hlinkClick r:id="rId5"/>
+              </a:rPr>
+              <a:t>https://www.qlik.com/us/</a:t>
+            </a:r>
+            <a:r>
+              <a:rPr lang="en-US" sz="1600" dirty="0">
+                <a:latin typeface="+mj-lt"/>
+              </a:rPr>
+              <a:t>  </a:t>
+            </a:r>
+          </a:p>
+          <a:p>
+            <a:pPr marL="285750" lvl="0" indent="-285750">
+              <a:buSzPct val="100000"/>
+              <a:buFont typeface="Wingdings" pitchFamily="2" charset="2"/>
+              <a:buChar char="§"/>
+            </a:pPr>
+            <a:r>
+              <a:rPr lang="en-US" sz="1600" dirty="0">
+                <a:solidFill>
+                  <a:schemeClr val="dk1"/>
+                </a:solidFill>
+                <a:latin typeface="+mj-lt"/>
+                <a:ea typeface="Calibri"/>
+                <a:cs typeface="Calibri"/>
+                <a:sym typeface="Calibri"/>
+              </a:rPr>
+              <a:t>Google </a:t>
+            </a:r>
+            <a:r>
+              <a:rPr lang="en-US" sz="1600" dirty="0" err="1">
+                <a:solidFill>
+                  <a:schemeClr val="dk1"/>
+                </a:solidFill>
+                <a:latin typeface="+mj-lt"/>
+                <a:ea typeface="Calibri"/>
+                <a:cs typeface="Calibri"/>
+                <a:sym typeface="Calibri"/>
+              </a:rPr>
+              <a:t>DataStudio</a:t>
+            </a:r>
+            <a:r>
+              <a:rPr lang="en-US" sz="1600" dirty="0">
+                <a:solidFill>
+                  <a:schemeClr val="dk1"/>
+                </a:solidFill>
+                <a:latin typeface="+mj-lt"/>
+                <a:ea typeface="Calibri"/>
+                <a:cs typeface="Calibri"/>
+                <a:sym typeface="Calibri"/>
+              </a:rPr>
+              <a:t> - </a:t>
+            </a:r>
+            <a:r>
+              <a:rPr lang="en-US" sz="1600" dirty="0">
+                <a:latin typeface="+mj-lt"/>
+                <a:hlinkClick r:id="rId6"/>
+              </a:rPr>
+              <a:t>https://datastudio.google.com/</a:t>
+            </a:r>
+            <a:r>
+              <a:rPr lang="en-US" sz="1600" dirty="0">
+                <a:latin typeface="+mj-lt"/>
+              </a:rPr>
+              <a:t> </a:t>
+            </a:r>
           </a:p>
           <a:p>
             <a:pPr marL="0" lvl="0" indent="0" algn="l" rtl="0">
@@ -16527,43 +16651,7 @@
               <a:buFont typeface="Arial"/>
               <a:buNone/>
             </a:pPr>
-            <a:r>
-              <a:rPr lang="en-US" sz="1800" dirty="0">
-                <a:solidFill>
-                  <a:schemeClr val="dk1"/>
-                </a:solidFill>
-                <a:latin typeface="Calibri"/>
-                <a:ea typeface="Calibri"/>
-                <a:cs typeface="Calibri"/>
-                <a:sym typeface="Calibri"/>
-              </a:rPr>
-              <a:t>Here is a demo of how fast Microsoft Power BI works with MS SQL Server - 500+ </a:t>
-            </a:r>
-            <a:r>
-              <a:rPr lang="en-US" sz="1800" dirty="0" err="1">
-                <a:solidFill>
-                  <a:schemeClr val="dk1"/>
-                </a:solidFill>
-                <a:latin typeface="Calibri"/>
-                <a:ea typeface="Calibri"/>
-                <a:cs typeface="Calibri"/>
-                <a:sym typeface="Calibri"/>
-              </a:rPr>
-              <a:t>Mln</a:t>
-            </a:r>
-            <a:r>
-              <a:rPr lang="en-US" sz="1800" dirty="0">
-                <a:solidFill>
-                  <a:schemeClr val="dk1"/>
-                </a:solidFill>
-                <a:latin typeface="Calibri"/>
-                <a:ea typeface="Calibri"/>
-                <a:cs typeface="Calibri"/>
-                <a:sym typeface="Calibri"/>
-              </a:rPr>
-              <a:t> rows of data</a:t>
-            </a:r>
-            <a:endParaRPr sz="1800" dirty="0">
+            <a:endParaRPr lang="en-US" sz="1600" dirty="0">
               <a:solidFill>
                 <a:schemeClr val="dk1"/>
               </a:solidFill>
@@ -16589,19 +16677,43 @@
               <a:buNone/>
             </a:pPr>
             <a:r>
-              <a:rPr lang="en-US" sz="1800" dirty="0">
-                <a:solidFill>
-                  <a:schemeClr val="dk1"/>
-                </a:solidFill>
-                <a:latin typeface="Calibri"/>
-                <a:ea typeface="Calibri"/>
-                <a:cs typeface="Calibri"/>
-                <a:sym typeface="Calibri"/>
-              </a:rPr>
-              <a:t> -</a:t>
-            </a:r>
-            <a:r>
-              <a:rPr lang="en-US" sz="1800" dirty="0">
+              <a:rPr lang="en-US" sz="1600" dirty="0">
+                <a:solidFill>
+                  <a:schemeClr val="dk1"/>
+                </a:solidFill>
+                <a:latin typeface="Calibri"/>
+                <a:ea typeface="Calibri"/>
+                <a:cs typeface="Calibri"/>
+                <a:sym typeface="Calibri"/>
+              </a:rPr>
+              <a:t>Here is a demo of how fast Microsoft Power BI Premium works with MS SQL Server - 500+ </a:t>
+            </a:r>
+            <a:r>
+              <a:rPr lang="en-US" sz="1600" dirty="0" err="1">
+                <a:solidFill>
+                  <a:schemeClr val="dk1"/>
+                </a:solidFill>
+                <a:latin typeface="Calibri"/>
+                <a:ea typeface="Calibri"/>
+                <a:cs typeface="Calibri"/>
+                <a:sym typeface="Calibri"/>
+              </a:rPr>
+              <a:t>Mln</a:t>
+            </a:r>
+            <a:r>
+              <a:rPr lang="en-US" sz="1600" dirty="0">
+                <a:solidFill>
+                  <a:schemeClr val="dk1"/>
+                </a:solidFill>
+                <a:latin typeface="Calibri"/>
+                <a:ea typeface="Calibri"/>
+                <a:cs typeface="Calibri"/>
+                <a:sym typeface="Calibri"/>
+              </a:rPr>
+              <a:t> rows of data -</a:t>
+            </a:r>
+            <a:r>
+              <a:rPr lang="en-US" sz="1600" dirty="0">
                 <a:solidFill>
                   <a:schemeClr val="dk1"/>
                 </a:solidFill>
@@ -16612,12 +16724,12 @@
                 <a:ea typeface="Calibri"/>
                 <a:cs typeface="Calibri"/>
                 <a:sym typeface="Calibri"/>
-                <a:hlinkClick r:id="rId3"/>
+                <a:hlinkClick r:id="rId7"/>
               </a:rPr>
               <a:t> </a:t>
             </a:r>
             <a:r>
-              <a:rPr lang="en-US" sz="1800" u="sng" dirty="0">
+              <a:rPr lang="en-US" sz="1600" u="sng" dirty="0">
                 <a:solidFill>
                   <a:schemeClr val="hlink"/>
                 </a:solidFill>
@@ -16625,11 +16737,11 @@
                 <a:ea typeface="Calibri"/>
                 <a:cs typeface="Calibri"/>
                 <a:sym typeface="Calibri"/>
-                <a:hlinkClick r:id="rId3"/>
+                <a:hlinkClick r:id="rId7"/>
               </a:rPr>
               <a:t>https://www.youtube.com/watch?v=mQyFp2MSl-s</a:t>
             </a:r>
-            <a:endParaRPr sz="1800" dirty="0">
+            <a:endParaRPr sz="1600" dirty="0">
               <a:solidFill>
                 <a:schemeClr val="dk1"/>
               </a:solidFill>
@@ -16655,7 +16767,7 @@
               <a:buNone/>
             </a:pPr>
             <a:r>
-              <a:rPr lang="en-US" sz="1800" dirty="0">
+              <a:rPr lang="en-US" sz="1600" dirty="0">
                 <a:solidFill>
                   <a:schemeClr val="dk1"/>
                 </a:solidFill>
@@ -16667,7 +16779,7 @@
               <a:t>And here is a demo of </a:t>
             </a:r>
             <a:r>
-              <a:rPr lang="en-US" sz="1800" dirty="0" err="1">
+              <a:rPr lang="en-US" sz="1600" dirty="0" err="1">
                 <a:solidFill>
                   <a:schemeClr val="dk1"/>
                 </a:solidFill>
@@ -16679,7 +16791,7 @@
               <a:t>Kinetica</a:t>
             </a:r>
             <a:r>
-              <a:rPr lang="en-US" sz="1800" dirty="0">
+              <a:rPr lang="en-US" sz="1600" dirty="0">
                 <a:solidFill>
                   <a:schemeClr val="dk1"/>
                 </a:solidFill>
@@ -16690,7 +16802,7 @@
               </a:rPr>
               <a:t> DB using Tableau &amp; Power BI:</a:t>
             </a:r>
-            <a:endParaRPr sz="1800" dirty="0">
+            <a:endParaRPr sz="1600" dirty="0">
               <a:solidFill>
                 <a:schemeClr val="dk1"/>
               </a:solidFill>
@@ -16716,7 +16828,7 @@
               <a:buNone/>
             </a:pPr>
             <a:r>
-              <a:rPr lang="en-US" sz="1800" dirty="0">
+              <a:rPr lang="en-US" sz="1600" dirty="0">
                 <a:solidFill>
                   <a:schemeClr val="dk1"/>
                 </a:solidFill>
@@ -16728,7 +16840,7 @@
               <a:t> -</a:t>
             </a:r>
             <a:r>
-              <a:rPr lang="en-US" sz="1800" dirty="0">
+              <a:rPr lang="en-US" sz="1600" dirty="0">
                 <a:solidFill>
                   <a:schemeClr val="dk1"/>
                 </a:solidFill>
@@ -16739,12 +16851,12 @@
                 <a:ea typeface="Calibri"/>
                 <a:cs typeface="Calibri"/>
                 <a:sym typeface="Calibri"/>
-                <a:hlinkClick r:id="rId4"/>
+                <a:hlinkClick r:id="rId8"/>
               </a:rPr>
               <a:t> </a:t>
             </a:r>
             <a:r>
-              <a:rPr lang="en-US" sz="1800" u="sng" dirty="0">
+              <a:rPr lang="en-US" sz="1600" u="sng" dirty="0">
                 <a:solidFill>
                   <a:schemeClr val="hlink"/>
                 </a:solidFill>
@@ -16752,11 +16864,11 @@
                 <a:ea typeface="Calibri"/>
                 <a:cs typeface="Calibri"/>
                 <a:sym typeface="Calibri"/>
-                <a:hlinkClick r:id="rId4"/>
+                <a:hlinkClick r:id="rId8"/>
               </a:rPr>
               <a:t>https://www.youtube.com/watch?v=7XliLU7ZC_s</a:t>
             </a:r>
-            <a:endParaRPr sz="1800" u="sng" dirty="0">
+            <a:endParaRPr sz="1600" u="sng" dirty="0">
               <a:solidFill>
                 <a:schemeClr val="hlink"/>
               </a:solidFill>
@@ -16781,7 +16893,7 @@
               <a:buFont typeface="Arial"/>
               <a:buNone/>
             </a:pPr>
-            <a:endParaRPr sz="1800" dirty="0">
+            <a:endParaRPr sz="1600" dirty="0">
               <a:solidFill>
                 <a:schemeClr val="dk1"/>
               </a:solidFill>
@@ -16807,7 +16919,7 @@
               <a:buNone/>
             </a:pPr>
             <a:r>
-              <a:rPr lang="en-US" sz="1800" dirty="0">
+              <a:rPr lang="en-US" sz="1600" dirty="0">
                 <a:solidFill>
                   <a:schemeClr val="dk1"/>
                 </a:solidFill>
@@ -16818,7 +16930,7 @@
               </a:rPr>
               <a:t>Notice:</a:t>
             </a:r>
-            <a:endParaRPr sz="1800" dirty="0">
+            <a:endParaRPr sz="1600" dirty="0">
               <a:solidFill>
                 <a:schemeClr val="dk1"/>
               </a:solidFill>
@@ -16844,7 +16956,7 @@
               <a:buNone/>
             </a:pPr>
             <a:r>
-              <a:rPr lang="en-US" sz="1800" dirty="0">
+              <a:rPr lang="en-US" sz="1600" dirty="0">
                 <a:solidFill>
                   <a:schemeClr val="dk1"/>
                 </a:solidFill>
@@ -16855,7 +16967,7 @@
               </a:rPr>
               <a:t> - sub-second response on billions of rows of data</a:t>
             </a:r>
-            <a:endParaRPr sz="1800" dirty="0">
+            <a:endParaRPr sz="1600" dirty="0">
               <a:solidFill>
                 <a:schemeClr val="dk1"/>
               </a:solidFill>
@@ -16881,7 +16993,7 @@
               <a:buNone/>
             </a:pPr>
             <a:r>
-              <a:rPr lang="en-US" sz="1800" dirty="0">
+              <a:rPr lang="en-US" sz="1600" dirty="0">
                 <a:solidFill>
                   <a:schemeClr val="dk1"/>
                 </a:solidFill>
@@ -16893,7 +17005,7 @@
               <a:t> - not need to create indexes, no wait time, fast load (even live streaming) of data (modern databases use </a:t>
             </a:r>
             <a:r>
-              <a:rPr lang="en-US" sz="1800" dirty="0" err="1">
+              <a:rPr lang="en-US" sz="1600" dirty="0" err="1">
                 <a:solidFill>
                   <a:schemeClr val="dk1"/>
                 </a:solidFill>
@@ -16905,7 +17017,7 @@
               <a:t>columnstore</a:t>
             </a:r>
             <a:r>
-              <a:rPr lang="en-US" sz="1800" dirty="0">
+              <a:rPr lang="en-US" sz="1600" dirty="0">
                 <a:solidFill>
                   <a:schemeClr val="dk1"/>
                 </a:solidFill>
@@ -16916,7 +17028,7 @@
               </a:rPr>
               <a:t> indexes - and are highly parallelized)</a:t>
             </a:r>
-            <a:endParaRPr sz="1800" dirty="0">
+            <a:endParaRPr sz="1600" dirty="0">
               <a:solidFill>
                 <a:schemeClr val="dk1"/>
               </a:solidFill>
@@ -16937,7 +17049,7 @@
               <a:buNone/>
             </a:pPr>
             <a:r>
-              <a:rPr lang="en-US" sz="1100" dirty="0">
+              <a:rPr lang="en-US" sz="1000" dirty="0">
                 <a:solidFill>
                   <a:schemeClr val="dk1"/>
                 </a:solidFill>
@@ -16945,61 +17057,27 @@
               <a:t>-</a:t>
             </a:r>
             <a:r>
-              <a:rPr lang="en-US" sz="1100" dirty="0">
+              <a:rPr lang="en-US" sz="1000" dirty="0">
                 <a:solidFill>
                   <a:schemeClr val="dk1"/>
                 </a:solidFill>
                 <a:uFill>
                   <a:noFill/>
                 </a:uFill>
-                <a:hlinkClick r:id="rId5"/>
+                <a:hlinkClick r:id="rId9"/>
               </a:rPr>
               <a:t> </a:t>
             </a:r>
             <a:r>
-              <a:rPr lang="en-US" sz="1100" u="sng" dirty="0">
+              <a:rPr lang="en-US" sz="1000" u="sng" dirty="0">
                 <a:solidFill>
                   <a:schemeClr val="hlink"/>
                 </a:solidFill>
-                <a:hlinkClick r:id="rId5"/>
+                <a:hlinkClick r:id="rId9"/>
               </a:rPr>
               <a:t>https://docs.microsoft.com/en-us/sql/relational-databases/indexes/columnstore-indexes-overview?view=sql-server-2017</a:t>
             </a:r>
-            <a:endParaRPr sz="1800" dirty="0">
-              <a:latin typeface="Calibri"/>
-              <a:ea typeface="Calibri"/>
-              <a:cs typeface="Calibri"/>
-              <a:sym typeface="Calibri"/>
-            </a:endParaRPr>
-          </a:p>
-          <a:p>
-            <a:pPr marL="0" lvl="0" indent="0" algn="l" rtl="0">
-              <a:spcBef>
-                <a:spcPts val="0"/>
-              </a:spcBef>
-              <a:spcAft>
-                <a:spcPts val="0"/>
-              </a:spcAft>
-              <a:buNone/>
-            </a:pPr>
-            <a:endParaRPr sz="1800" dirty="0">
-              <a:latin typeface="Calibri"/>
-              <a:ea typeface="Calibri"/>
-              <a:cs typeface="Calibri"/>
-              <a:sym typeface="Calibri"/>
-            </a:endParaRPr>
-          </a:p>
-          <a:p>
-            <a:pPr marL="0" lvl="0" indent="0" algn="l" rtl="0">
-              <a:spcBef>
-                <a:spcPts val="0"/>
-              </a:spcBef>
-              <a:spcAft>
-                <a:spcPts val="0"/>
-              </a:spcAft>
-              <a:buNone/>
-            </a:pPr>
-            <a:endParaRPr sz="1800" dirty="0">
+            <a:endParaRPr sz="1000" dirty="0">
               <a:latin typeface="Calibri"/>
               <a:ea typeface="Calibri"/>
               <a:cs typeface="Calibri"/>
@@ -17015,7 +17093,7 @@
           <p:nvPr/>
         </p:nvPicPr>
         <p:blipFill>
-          <a:blip r:embed="rId6" cstate="email">
+          <a:blip r:embed="rId10" cstate="email">
             <a:alphaModFix/>
             <a:extLst>
               <a:ext uri="{28A0092B-C50C-407E-A947-70E740481C1C}">
@@ -17048,7 +17126,7 @@
           <p:nvPr/>
         </p:nvPicPr>
         <p:blipFill>
-          <a:blip r:embed="rId7" cstate="email">
+          <a:blip r:embed="rId11" cstate="email">
             <a:alphaModFix/>
             <a:extLst>
               <a:ext uri="{28A0092B-C50C-407E-A947-70E740481C1C}">
@@ -17099,39 +17177,6 @@
           <a:chExt cx="0" cy="0"/>
         </a:xfrm>
       </p:grpSpPr>
-      <p:pic>
-        <p:nvPicPr>
-          <p:cNvPr id="97" name="Google Shape;97;p14"/>
-          <p:cNvPicPr preferRelativeResize="0"/>
-          <p:nvPr/>
-        </p:nvPicPr>
-        <p:blipFill>
-          <a:blip r:embed="rId3" cstate="email">
-            <a:alphaModFix/>
-            <a:extLst>
-              <a:ext uri="{28A0092B-C50C-407E-A947-70E740481C1C}">
-                <a14:useLocalDpi xmlns:a14="http://schemas.microsoft.com/office/drawing/2010/main"/>
-              </a:ext>
-            </a:extLst>
-          </a:blip>
-          <a:stretch>
-            <a:fillRect/>
-          </a:stretch>
-        </p:blipFill>
-        <p:spPr>
-          <a:xfrm>
-            <a:off x="6197600" y="152400"/>
-            <a:ext cx="5994400" cy="6553200"/>
-          </a:xfrm>
-          <a:prstGeom prst="rect">
-            <a:avLst/>
-          </a:prstGeom>
-          <a:noFill/>
-          <a:ln>
-            <a:noFill/>
-          </a:ln>
-        </p:spPr>
-      </p:pic>
       <p:sp>
         <p:nvSpPr>
           <p:cNvPr id="98" name="Google Shape;98;p14"/>
@@ -17140,8 +17185,8 @@
         </p:nvSpPr>
         <p:spPr>
           <a:xfrm>
-            <a:off x="0" y="76200"/>
-            <a:ext cx="6097500" cy="6285600"/>
+            <a:off x="-1" y="76200"/>
+            <a:ext cx="5631705" cy="6781800"/>
           </a:xfrm>
           <a:prstGeom prst="rect">
             <a:avLst/>
@@ -17167,11 +17212,11 @@
               <a:buNone/>
             </a:pPr>
             <a:r>
-              <a:rPr lang="en-US" sz="1200"/>
+              <a:rPr lang="en-US" sz="1200" dirty="0"/>
               <a:t>The top leaders for analytics platforms are </a:t>
             </a:r>
             <a:r>
-              <a:rPr lang="en-US" sz="1200" b="1">
+              <a:rPr lang="en-US" sz="1200" b="1" dirty="0">
                 <a:solidFill>
                   <a:srgbClr val="FF0000"/>
                 </a:solidFill>
@@ -17179,11 +17224,11 @@
               <a:t>Microsoft</a:t>
             </a:r>
             <a:r>
-              <a:rPr lang="en-US" sz="1200"/>
+              <a:rPr lang="en-US" sz="1200" dirty="0"/>
               <a:t> and </a:t>
             </a:r>
             <a:r>
-              <a:rPr lang="en-US" sz="1200" b="1">
+              <a:rPr lang="en-US" sz="1200" b="1" dirty="0">
                 <a:solidFill>
                   <a:srgbClr val="FF0000"/>
                 </a:solidFill>
@@ -17191,10 +17236,10 @@
               <a:t>Tableau</a:t>
             </a:r>
             <a:r>
-              <a:rPr lang="en-US" sz="1200"/>
+              <a:rPr lang="en-US" sz="1200" dirty="0"/>
               <a:t>. </a:t>
             </a:r>
-            <a:endParaRPr sz="1200"/>
+            <a:endParaRPr sz="1200" dirty="0"/>
           </a:p>
           <a:p>
             <a:pPr marL="0" lvl="0" indent="0" algn="l" rtl="0">
@@ -17207,10 +17252,10 @@
               <a:buNone/>
             </a:pPr>
             <a:r>
-              <a:rPr lang="en-US" sz="1200"/>
+              <a:rPr lang="en-US" sz="1200" dirty="0"/>
               <a:t>Both use standard SQL to get data.</a:t>
             </a:r>
-            <a:endParaRPr sz="1200"/>
+            <a:endParaRPr sz="1200" dirty="0"/>
           </a:p>
           <a:p>
             <a:pPr marL="0" lvl="0" indent="0" algn="l" rtl="0">
@@ -17223,15 +17268,15 @@
               <a:buNone/>
             </a:pPr>
             <a:r>
-              <a:rPr lang="en-US" sz="1200" u="sng">
+              <a:rPr lang="en-US" sz="1200" u="sng" dirty="0">
                 <a:solidFill>
                   <a:schemeClr val="hlink"/>
                 </a:solidFill>
-                <a:hlinkClick r:id="rId4"/>
+                <a:hlinkClick r:id="rId3"/>
               </a:rPr>
               <a:t>https://www.gartner.com/doc/reprints?id=1-65P04FG&amp;ct=190125</a:t>
             </a:r>
-            <a:endParaRPr sz="1200"/>
+            <a:endParaRPr sz="1200" dirty="0"/>
           </a:p>
           <a:p>
             <a:pPr marL="0" lvl="0" indent="0" algn="l" rtl="0">
@@ -17243,7 +17288,7 @@
               </a:spcAft>
               <a:buNone/>
             </a:pPr>
-            <a:endParaRPr sz="1200"/>
+            <a:endParaRPr sz="1200" dirty="0"/>
           </a:p>
           <a:p>
             <a:pPr marL="0" lvl="0" indent="0" algn="l" rtl="0">
@@ -17261,14 +17306,14 @@
               <a:buNone/>
             </a:pPr>
             <a:r>
-              <a:rPr lang="en-US" sz="1800" b="1">
+              <a:rPr lang="en-US" sz="1800" b="1" dirty="0">
                 <a:solidFill>
                   <a:schemeClr val="dk1"/>
                 </a:solidFill>
               </a:rPr>
               <a:t>Which database to use?</a:t>
             </a:r>
-            <a:endParaRPr sz="1800" b="1">
+            <a:endParaRPr sz="1800" b="1" dirty="0">
               <a:solidFill>
                 <a:schemeClr val="dk1"/>
               </a:solidFill>
@@ -17289,7 +17334,7 @@
               <a:buFont typeface="Arial"/>
               <a:buNone/>
             </a:pPr>
-            <a:endParaRPr sz="1200">
+            <a:endParaRPr sz="1200" dirty="0">
               <a:solidFill>
                 <a:schemeClr val="dk1"/>
               </a:solidFill>
@@ -17311,14 +17356,14 @@
               <a:buNone/>
             </a:pPr>
             <a:r>
-              <a:rPr lang="en-US" sz="1200">
+              <a:rPr lang="en-US" sz="1200" dirty="0">
                 <a:solidFill>
                   <a:schemeClr val="dk1"/>
                 </a:solidFill>
               </a:rPr>
               <a:t>There are many options for SQL database.</a:t>
             </a:r>
-            <a:endParaRPr sz="1200">
+            <a:endParaRPr sz="1200" dirty="0">
               <a:solidFill>
                 <a:schemeClr val="dk1"/>
               </a:solidFill>
@@ -17335,14 +17380,14 @@
               <a:buNone/>
             </a:pPr>
             <a:r>
-              <a:rPr lang="en-US" sz="1200">
+              <a:rPr lang="en-US" sz="1200" dirty="0">
                 <a:solidFill>
                   <a:schemeClr val="dk1"/>
                 </a:solidFill>
               </a:rPr>
               <a:t>For example, on Azure Cloud - Azure SQL Data Warehouse </a:t>
             </a:r>
-            <a:endParaRPr sz="1200">
+            <a:endParaRPr sz="1200" dirty="0">
               <a:solidFill>
                 <a:schemeClr val="dk1"/>
               </a:solidFill>
@@ -17364,7 +17409,7 @@
               <a:buNone/>
             </a:pPr>
             <a:r>
-              <a:rPr lang="en-US" sz="1200">
+              <a:rPr lang="en-US" sz="1200" dirty="0">
                 <a:solidFill>
                   <a:schemeClr val="dk1"/>
                 </a:solidFill>
@@ -17372,23 +17417,23 @@
               <a:t>   - </a:t>
             </a:r>
             <a:r>
-              <a:rPr lang="en-US" sz="1200" u="sng">
+              <a:rPr lang="en-US" sz="1200" u="sng" dirty="0">
                 <a:solidFill>
                   <a:schemeClr val="hlink"/>
                 </a:solidFill>
-                <a:hlinkClick r:id="rId5"/>
+                <a:hlinkClick r:id="rId4"/>
               </a:rPr>
               <a:t>https://azure.microsoft.com/en-us/services/sql-data-warehouse/</a:t>
             </a:r>
             <a:r>
-              <a:rPr lang="en-US" sz="1200">
+              <a:rPr lang="en-US" sz="1200" dirty="0">
                 <a:solidFill>
                   <a:schemeClr val="dk1"/>
                 </a:solidFill>
               </a:rPr>
               <a:t> </a:t>
             </a:r>
-            <a:endParaRPr sz="1200">
+            <a:endParaRPr sz="1200" dirty="0">
               <a:solidFill>
                 <a:schemeClr val="dk1"/>
               </a:solidFill>
@@ -17410,7 +17455,7 @@
               <a:buNone/>
             </a:pPr>
             <a:r>
-              <a:rPr lang="en-US" sz="1200">
+              <a:rPr lang="en-US" sz="1200" dirty="0">
                 <a:solidFill>
                   <a:schemeClr val="dk1"/>
                 </a:solidFill>
@@ -17418,15 +17463,15 @@
               <a:t>  BI &amp; Power BI - </a:t>
             </a:r>
             <a:r>
-              <a:rPr lang="en-US" sz="1200" u="sng">
+              <a:rPr lang="en-US" sz="1200" u="sng" dirty="0">
                 <a:solidFill>
                   <a:schemeClr val="hlink"/>
                 </a:solidFill>
-                <a:hlinkClick r:id="rId6"/>
+                <a:hlinkClick r:id="rId5"/>
               </a:rPr>
               <a:t>https://powerbi.microsoft.com/en-us/</a:t>
             </a:r>
-            <a:endParaRPr sz="1200">
+            <a:endParaRPr sz="1200" dirty="0">
               <a:solidFill>
                 <a:schemeClr val="dk1"/>
               </a:solidFill>
@@ -17442,7 +17487,7 @@
               </a:spcAft>
               <a:buNone/>
             </a:pPr>
-            <a:endParaRPr sz="1200">
+            <a:endParaRPr sz="1200" dirty="0">
               <a:solidFill>
                 <a:schemeClr val="dk1"/>
               </a:solidFill>
@@ -17459,14 +17504,30 @@
               <a:buNone/>
             </a:pPr>
             <a:r>
-              <a:rPr lang="en-US" sz="1200">
-                <a:solidFill>
-                  <a:schemeClr val="dk1"/>
-                </a:solidFill>
-              </a:rPr>
-              <a:t>On Google Cloud we can use "Cloud SQL" (managed PostgreSQL) or BigQuery.</a:t>
-            </a:r>
-            <a:endParaRPr sz="1200">
+              <a:rPr lang="en-US" sz="1200" dirty="0">
+                <a:solidFill>
+                  <a:schemeClr val="dk1"/>
+                </a:solidFill>
+              </a:rPr>
+              <a:t>On Google Cloud we can use "Cloud SQL" (managed PostgreSQL) or </a:t>
+            </a:r>
+            <a:r>
+              <a:rPr lang="en-US" sz="1200" dirty="0" err="1">
+                <a:solidFill>
+                  <a:schemeClr val="dk1"/>
+                </a:solidFill>
+              </a:rPr>
+              <a:t>BigQuery</a:t>
+            </a:r>
+            <a:r>
+              <a:rPr lang="en-US" sz="1200" dirty="0">
+                <a:solidFill>
+                  <a:schemeClr val="dk1"/>
+                </a:solidFill>
+              </a:rPr>
+              <a:t>.</a:t>
+            </a:r>
+            <a:endParaRPr sz="1200" dirty="0">
               <a:solidFill>
                 <a:schemeClr val="dk1"/>
               </a:solidFill>
@@ -17482,7 +17543,7 @@
               </a:spcAft>
               <a:buNone/>
             </a:pPr>
-            <a:endParaRPr sz="1200">
+            <a:endParaRPr sz="1200" dirty="0">
               <a:solidFill>
                 <a:schemeClr val="dk1"/>
               </a:solidFill>
@@ -17499,14 +17560,14 @@
               <a:buNone/>
             </a:pPr>
             <a:r>
-              <a:rPr lang="en-US" sz="1200">
+              <a:rPr lang="en-US" sz="1200" dirty="0">
                 <a:solidFill>
                   <a:schemeClr val="dk1"/>
                 </a:solidFill>
               </a:rPr>
               <a:t>We can also consider GPU-based databases, for example:</a:t>
             </a:r>
-            <a:endParaRPr sz="1200">
+            <a:endParaRPr sz="1200" dirty="0">
               <a:solidFill>
                 <a:schemeClr val="dk1"/>
               </a:solidFill>
@@ -17528,14 +17589,30 @@
               <a:buNone/>
             </a:pPr>
             <a:r>
-              <a:rPr lang="en-US" sz="1200">
-                <a:solidFill>
-                  <a:schemeClr val="dk1"/>
-                </a:solidFill>
-              </a:rPr>
-              <a:t> - Kinetica on Google Cloud</a:t>
-            </a:r>
-            <a:endParaRPr sz="1200">
+              <a:rPr lang="en-US" sz="1200" dirty="0">
+                <a:solidFill>
+                  <a:schemeClr val="dk1"/>
+                </a:solidFill>
+              </a:rPr>
+              <a:t> - </a:t>
+            </a:r>
+            <a:r>
+              <a:rPr lang="en-US" sz="1200" dirty="0" err="1">
+                <a:solidFill>
+                  <a:schemeClr val="dk1"/>
+                </a:solidFill>
+              </a:rPr>
+              <a:t>Kinetica</a:t>
+            </a:r>
+            <a:r>
+              <a:rPr lang="en-US" sz="1200" dirty="0">
+                <a:solidFill>
+                  <a:schemeClr val="dk1"/>
+                </a:solidFill>
+              </a:rPr>
+              <a:t> on Google Cloud</a:t>
+            </a:r>
+            <a:endParaRPr sz="1200" dirty="0">
               <a:solidFill>
                 <a:schemeClr val="dk1"/>
               </a:solidFill>
@@ -17557,7 +17634,7 @@
               <a:buNone/>
             </a:pPr>
             <a:r>
-              <a:rPr lang="en-US" sz="1200">
+              <a:rPr lang="en-US" sz="1200" dirty="0">
                 <a:solidFill>
                   <a:schemeClr val="dk1"/>
                 </a:solidFill>
@@ -17565,15 +17642,15 @@
               <a:t>    - </a:t>
             </a:r>
             <a:r>
-              <a:rPr lang="en-US" sz="1200" u="sng">
+              <a:rPr lang="en-US" sz="1200" u="sng" dirty="0">
                 <a:solidFill>
                   <a:schemeClr val="hlink"/>
                 </a:solidFill>
-                <a:hlinkClick r:id="rId7"/>
+                <a:hlinkClick r:id="rId6"/>
               </a:rPr>
               <a:t>https://www.kinetica.com/partner/google-cloud-platform/</a:t>
             </a:r>
-            <a:endParaRPr sz="1200">
+            <a:endParaRPr sz="1200" dirty="0">
               <a:solidFill>
                 <a:schemeClr val="dk1"/>
               </a:solidFill>
@@ -17590,7 +17667,7 @@
               <a:buNone/>
             </a:pPr>
             <a:r>
-              <a:rPr lang="en-US" sz="1200">
+              <a:rPr lang="en-US" sz="1200" dirty="0">
                 <a:solidFill>
                   <a:schemeClr val="dk1"/>
                 </a:solidFill>
@@ -17598,10 +17675,18 @@
               <a:t> - </a:t>
             </a:r>
             <a:r>
-              <a:rPr lang="en-US" sz="1200"/>
-              <a:t>MapD = OmniSci</a:t>
-            </a:r>
-            <a:endParaRPr sz="1200"/>
+              <a:rPr lang="en-US" sz="1200" dirty="0" err="1"/>
+              <a:t>MapD</a:t>
+            </a:r>
+            <a:r>
+              <a:rPr lang="en-US" sz="1200" dirty="0"/>
+              <a:t> = </a:t>
+            </a:r>
+            <a:r>
+              <a:rPr lang="en-US" sz="1200" dirty="0" err="1"/>
+              <a:t>OmniSci</a:t>
+            </a:r>
+            <a:endParaRPr sz="1200" dirty="0"/>
           </a:p>
           <a:p>
             <a:pPr marL="0" lvl="0" indent="0" algn="l" rtl="0">
@@ -17614,23 +17699,23 @@
               <a:buNone/>
             </a:pPr>
             <a:r>
-              <a:rPr lang="en-US" sz="1200"/>
+              <a:rPr lang="en-US" sz="1200" dirty="0"/>
               <a:t>   - </a:t>
             </a:r>
             <a:r>
-              <a:rPr lang="en-US" sz="1200" u="sng">
+              <a:rPr lang="en-US" sz="1200" u="sng" dirty="0">
                 <a:solidFill>
                   <a:schemeClr val="hlink"/>
                 </a:solidFill>
-                <a:hlinkClick r:id="rId8"/>
+                <a:hlinkClick r:id="rId7"/>
               </a:rPr>
               <a:t>https://www.omnisci.com/</a:t>
             </a:r>
             <a:r>
-              <a:rPr lang="en-US" sz="1200"/>
+              <a:rPr lang="en-US" sz="1200" dirty="0"/>
               <a:t> </a:t>
             </a:r>
-            <a:endParaRPr sz="1200"/>
+            <a:endParaRPr sz="1200" dirty="0"/>
           </a:p>
           <a:p>
             <a:pPr marL="0" lvl="0" indent="0" algn="l" rtl="0">
@@ -17642,7 +17727,7 @@
               </a:spcAft>
               <a:buNone/>
             </a:pPr>
-            <a:endParaRPr sz="1200"/>
+            <a:endParaRPr sz="1200" dirty="0"/>
           </a:p>
           <a:p>
             <a:pPr marL="0" lvl="0" indent="0" algn="l" rtl="0">
@@ -17655,10 +17740,34 @@
               <a:buNone/>
             </a:pPr>
             <a:r>
-              <a:rPr lang="en-US" sz="1200"/>
-              <a:t>Similar options are available on AWS: Amazon RDS (PostgreSQL), Redshift, SnowFlake, Aurora, kinetica, MapD, etc.</a:t>
-            </a:r>
-            <a:endParaRPr sz="1200"/>
+              <a:rPr lang="en-US" sz="1200" dirty="0"/>
+              <a:t>Similar options are available on AWS: Amazon RDS (PostgreSQL), Redshift, </a:t>
+            </a:r>
+            <a:r>
+              <a:rPr lang="en-US" sz="1200" dirty="0" err="1"/>
+              <a:t>SnowFlake</a:t>
+            </a:r>
+            <a:r>
+              <a:rPr lang="en-US" sz="1200" dirty="0"/>
+              <a:t>, Aurora, </a:t>
+            </a:r>
+            <a:r>
+              <a:rPr lang="en-US" sz="1200" dirty="0" err="1"/>
+              <a:t>kinetica</a:t>
+            </a:r>
+            <a:r>
+              <a:rPr lang="en-US" sz="1200" dirty="0"/>
+              <a:t>, </a:t>
+            </a:r>
+            <a:r>
+              <a:rPr lang="en-US" sz="1200" dirty="0" err="1"/>
+              <a:t>MapD</a:t>
+            </a:r>
+            <a:r>
+              <a:rPr lang="en-US" sz="1200" dirty="0"/>
+              <a:t>, etc.</a:t>
+            </a:r>
+            <a:endParaRPr sz="1200" dirty="0"/>
           </a:p>
           <a:p>
             <a:pPr marL="0" lvl="0" indent="0" algn="l" rtl="0">
@@ -17670,7 +17779,7 @@
               </a:spcAft>
               <a:buNone/>
             </a:pPr>
-            <a:endParaRPr sz="1200"/>
+            <a:endParaRPr sz="1200" dirty="0"/>
           </a:p>
           <a:p>
             <a:pPr marL="0" lvl="0" indent="0" algn="l" rtl="0">
@@ -17683,14 +17792,46 @@
               <a:buNone/>
             </a:pPr>
             <a:r>
-              <a:rPr lang="en-US" sz="1200">
-                <a:solidFill>
-                  <a:schemeClr val="dk1"/>
-                </a:solidFill>
-              </a:rPr>
-              <a:t>Generally for sizes more than 1TB it is preferable to have a distributed DB like Google BigQuery (or Amazon SnowFlake.net)</a:t>
-            </a:r>
-            <a:endParaRPr sz="1200">
+              <a:rPr lang="en-US" sz="1200" dirty="0">
+                <a:solidFill>
+                  <a:schemeClr val="dk1"/>
+                </a:solidFill>
+              </a:rPr>
+              <a:t>Generally for sizes more than 1TB it is preferable to have a distributed DB like Google </a:t>
+            </a:r>
+            <a:r>
+              <a:rPr lang="en-US" sz="1200" dirty="0" err="1">
+                <a:solidFill>
+                  <a:schemeClr val="dk1"/>
+                </a:solidFill>
+              </a:rPr>
+              <a:t>BigQuery</a:t>
+            </a:r>
+            <a:r>
+              <a:rPr lang="en-US" sz="1200" dirty="0">
+                <a:solidFill>
+                  <a:schemeClr val="dk1"/>
+                </a:solidFill>
+              </a:rPr>
+              <a:t> (or Amazon </a:t>
+            </a:r>
+            <a:r>
+              <a:rPr lang="en-US" sz="1200" dirty="0" err="1">
+                <a:solidFill>
+                  <a:schemeClr val="dk1"/>
+                </a:solidFill>
+              </a:rPr>
+              <a:t>SnowFlake.net</a:t>
+            </a:r>
+            <a:r>
+              <a:rPr lang="en-US" sz="1200" dirty="0">
+                <a:solidFill>
+                  <a:schemeClr val="dk1"/>
+                </a:solidFill>
+              </a:rPr>
+              <a:t>)</a:t>
+            </a:r>
+            <a:endParaRPr sz="1200" dirty="0">
               <a:solidFill>
                 <a:schemeClr val="dk1"/>
               </a:solidFill>
@@ -17707,7 +17848,7 @@
               <a:buNone/>
             </a:pPr>
             <a:r>
-              <a:rPr lang="en-US" sz="1200">
+              <a:rPr lang="en-US" sz="1200" dirty="0">
                 <a:solidFill>
                   <a:schemeClr val="dk1"/>
                 </a:solidFill>
@@ -17715,15 +17856,15 @@
               <a:t>	</a:t>
             </a:r>
             <a:r>
-              <a:rPr lang="en-US" sz="1200" u="sng">
+              <a:rPr lang="en-US" sz="1200" u="sng" dirty="0">
                 <a:solidFill>
                   <a:schemeClr val="hlink"/>
                 </a:solidFill>
-                <a:hlinkClick r:id="rId9"/>
+                <a:hlinkClick r:id="rId8"/>
               </a:rPr>
               <a:t>https://statsbot.co/blog/modern-data-warehouse</a:t>
             </a:r>
-            <a:endParaRPr sz="1200" u="sng">
+            <a:endParaRPr sz="1200" u="sng" dirty="0">
               <a:solidFill>
                 <a:schemeClr val="hlink"/>
               </a:solidFill>
@@ -17739,7 +17880,7 @@
               </a:spcAft>
               <a:buNone/>
             </a:pPr>
-            <a:endParaRPr sz="1200">
+            <a:endParaRPr sz="1200" dirty="0">
               <a:solidFill>
                 <a:schemeClr val="dk1"/>
               </a:solidFill>
@@ -17756,14 +17897,14 @@
               <a:buNone/>
             </a:pPr>
             <a:r>
-              <a:rPr lang="en-US" sz="1200">
+              <a:rPr lang="en-US" sz="1200" dirty="0">
                 <a:solidFill>
                   <a:schemeClr val="dk1"/>
                 </a:solidFill>
               </a:rPr>
               <a:t>Speed depends on the size of the data too.</a:t>
             </a:r>
-            <a:endParaRPr sz="1200">
+            <a:endParaRPr sz="1200" dirty="0">
               <a:solidFill>
                 <a:schemeClr val="dk1"/>
               </a:solidFill>
@@ -17780,14 +17921,14 @@
               <a:buNone/>
             </a:pPr>
             <a:r>
-              <a:rPr lang="en-US" sz="1200">
+              <a:rPr lang="en-US" sz="1200" dirty="0">
                 <a:solidFill>
                   <a:schemeClr val="dk1"/>
                 </a:solidFill>
               </a:rPr>
               <a:t>At small sizes (&lt;1TB) single-node solutions are faster (GPU-based are fastest).</a:t>
             </a:r>
-            <a:endParaRPr sz="1200">
+            <a:endParaRPr sz="1200" dirty="0">
               <a:solidFill>
                 <a:schemeClr val="dk1"/>
               </a:solidFill>
@@ -17804,14 +17945,62 @@
               <a:buNone/>
             </a:pPr>
             <a:r>
-              <a:rPr lang="en-US" sz="1200">
-                <a:solidFill>
-                  <a:schemeClr val="dk1"/>
-                </a:solidFill>
-              </a:rPr>
-              <a:t>So it maybe either one reasonably fast DB (Azure SQL Datawarehouse), or two databases - on big - but slow (Google BigQuery), and second smaller - but very fast (omnisci MapD GPU DB for interactive visual querying)</a:t>
-            </a:r>
-            <a:endParaRPr sz="1200">
+              <a:rPr lang="en-US" sz="1200" dirty="0">
+                <a:solidFill>
+                  <a:schemeClr val="dk1"/>
+                </a:solidFill>
+              </a:rPr>
+              <a:t>So it maybe either one reasonably fast DB (Azure SQL Datawarehouse), or two databases - on big - but slow (Google </a:t>
+            </a:r>
+            <a:r>
+              <a:rPr lang="en-US" sz="1200" dirty="0" err="1">
+                <a:solidFill>
+                  <a:schemeClr val="dk1"/>
+                </a:solidFill>
+              </a:rPr>
+              <a:t>BigQuery</a:t>
+            </a:r>
+            <a:r>
+              <a:rPr lang="en-US" sz="1200" dirty="0">
+                <a:solidFill>
+                  <a:schemeClr val="dk1"/>
+                </a:solidFill>
+              </a:rPr>
+              <a:t>), and second smaller - but very fast (</a:t>
+            </a:r>
+            <a:r>
+              <a:rPr lang="en-US" sz="1200" dirty="0" err="1">
+                <a:solidFill>
+                  <a:schemeClr val="dk1"/>
+                </a:solidFill>
+              </a:rPr>
+              <a:t>omnisci</a:t>
+            </a:r>
+            <a:r>
+              <a:rPr lang="en-US" sz="1200" dirty="0">
+                <a:solidFill>
+                  <a:schemeClr val="dk1"/>
+                </a:solidFill>
+              </a:rPr>
+              <a:t> </a:t>
+            </a:r>
+            <a:r>
+              <a:rPr lang="en-US" sz="1200" dirty="0" err="1">
+                <a:solidFill>
+                  <a:schemeClr val="dk1"/>
+                </a:solidFill>
+              </a:rPr>
+              <a:t>MapD</a:t>
+            </a:r>
+            <a:r>
+              <a:rPr lang="en-US" sz="1200" dirty="0">
+                <a:solidFill>
+                  <a:schemeClr val="dk1"/>
+                </a:solidFill>
+              </a:rPr>
+              <a:t> GPU DB for interactive visual querying)</a:t>
+            </a:r>
+            <a:endParaRPr sz="1200" dirty="0">
               <a:solidFill>
                 <a:schemeClr val="dk1"/>
               </a:solidFill>
@@ -17828,7 +18017,7 @@
               <a:buNone/>
             </a:pPr>
             <a:r>
-              <a:rPr lang="en-US" sz="1200">
+              <a:rPr lang="en-US" sz="1200" dirty="0">
                 <a:solidFill>
                   <a:schemeClr val="dk1"/>
                 </a:solidFill>
@@ -17836,7 +18025,52 @@
               <a:t> -</a:t>
             </a:r>
             <a:r>
-              <a:rPr lang="en-US" sz="1200">
+              <a:rPr lang="en-US" sz="1200" dirty="0">
+                <a:solidFill>
+                  <a:schemeClr val="dk1"/>
+                </a:solidFill>
+                <a:uFill>
+                  <a:noFill/>
+                </a:uFill>
+                <a:hlinkClick r:id="rId9"/>
+              </a:rPr>
+              <a:t> </a:t>
+            </a:r>
+            <a:r>
+              <a:rPr lang="en-US" sz="1200" u="sng" dirty="0">
+                <a:solidFill>
+                  <a:schemeClr val="hlink"/>
+                </a:solidFill>
+                <a:hlinkClick r:id="rId9"/>
+              </a:rPr>
+              <a:t>https://fivetran.com/blog/warehouse-benchmark</a:t>
+            </a:r>
+            <a:endParaRPr sz="1200" u="sng" dirty="0">
+              <a:solidFill>
+                <a:schemeClr val="hlink"/>
+              </a:solidFill>
+            </a:endParaRPr>
+          </a:p>
+          <a:p>
+            <a:pPr marL="0" lvl="0" indent="0" algn="l" rtl="0">
+              <a:spcBef>
+                <a:spcPts val="0"/>
+              </a:spcBef>
+              <a:spcAft>
+                <a:spcPts val="0"/>
+              </a:spcAft>
+              <a:buNone/>
+            </a:pPr>
+            <a:r>
+              <a:rPr lang="en-US" sz="1200" dirty="0">
+                <a:solidFill>
+                  <a:schemeClr val="dk1"/>
+                </a:solidFill>
+              </a:rPr>
+              <a:t> -</a:t>
+            </a:r>
+            <a:r>
+              <a:rPr lang="en-US" sz="1200" dirty="0">
                 <a:solidFill>
                   <a:schemeClr val="dk1"/>
                 </a:solidFill>
@@ -17848,63 +18082,54 @@
               <a:t> </a:t>
             </a:r>
             <a:r>
-              <a:rPr lang="en-US" sz="1200" u="sng">
+              <a:rPr lang="en-US" sz="1200" u="sng" dirty="0">
                 <a:solidFill>
                   <a:schemeClr val="hlink"/>
                 </a:solidFill>
                 <a:hlinkClick r:id="rId10"/>
               </a:rPr>
-              <a:t>https://fivetran.com/blog/warehouse-benchmark</a:t>
-            </a:r>
-            <a:endParaRPr sz="1200" u="sng">
-              <a:solidFill>
-                <a:schemeClr val="hlink"/>
-              </a:solidFill>
-            </a:endParaRPr>
-          </a:p>
-          <a:p>
-            <a:pPr marL="0" lvl="0" indent="0" algn="l" rtl="0">
-              <a:spcBef>
-                <a:spcPts val="0"/>
-              </a:spcBef>
-              <a:spcAft>
-                <a:spcPts val="0"/>
-              </a:spcAft>
-              <a:buNone/>
-            </a:pPr>
-            <a:r>
-              <a:rPr lang="en-US" sz="1200">
-                <a:solidFill>
-                  <a:schemeClr val="dk1"/>
-                </a:solidFill>
-              </a:rPr>
-              <a:t> -</a:t>
-            </a:r>
-            <a:r>
-              <a:rPr lang="en-US" sz="1200">
-                <a:solidFill>
-                  <a:schemeClr val="dk1"/>
-                </a:solidFill>
-                <a:uFill>
-                  <a:noFill/>
-                </a:uFill>
-                <a:hlinkClick r:id="rId11"/>
-              </a:rPr>
-              <a:t> </a:t>
-            </a:r>
-            <a:r>
-              <a:rPr lang="en-US" sz="1200" u="sng">
-                <a:solidFill>
-                  <a:schemeClr val="hlink"/>
-                </a:solidFill>
-                <a:hlinkClick r:id="rId11"/>
-              </a:rPr>
               <a:t>https://www.omnisci.com/demos/</a:t>
             </a:r>
-            <a:endParaRPr sz="1200"/>
+            <a:endParaRPr sz="1200" dirty="0"/>
           </a:p>
         </p:txBody>
       </p:sp>
+      <p:pic>
+        <p:nvPicPr>
+          <p:cNvPr id="2" name="Picture 1">
+            <a:extLst>
+              <a:ext uri="{FF2B5EF4-FFF2-40B4-BE49-F238E27FC236}">
+                <a16:creationId xmlns:a16="http://schemas.microsoft.com/office/drawing/2014/main" id="{340FA918-49D9-E34F-A2D6-4AE71DCA1C6C}"/>
+              </a:ext>
+            </a:extLst>
+          </p:cNvPr>
+          <p:cNvPicPr>
+            <a:picLocks noChangeAspect="1"/>
+          </p:cNvPicPr>
+          <p:nvPr/>
+        </p:nvPicPr>
+        <p:blipFill>
+          <a:blip r:embed="rId11" cstate="email">
+            <a:extLst>
+              <a:ext uri="{28A0092B-C50C-407E-A947-70E740481C1C}">
+                <a14:useLocalDpi xmlns:a14="http://schemas.microsoft.com/office/drawing/2010/main"/>
+              </a:ext>
+            </a:extLst>
+          </a:blip>
+          <a:stretch>
+            <a:fillRect/>
+          </a:stretch>
+        </p:blipFill>
+        <p:spPr>
+          <a:xfrm>
+            <a:off x="5631705" y="14208"/>
+            <a:ext cx="6569964" cy="6858000"/>
+          </a:xfrm>
+          <a:prstGeom prst="rect">
+            <a:avLst/>
+          </a:prstGeom>
+        </p:spPr>
+      </p:pic>
     </p:spTree>
   </p:cSld>
   <p:clrMapOvr>
@@ -18832,6 +19057,9 @@
             </a:pPr>
             <a:r>
               <a:rPr lang="en-US" sz="1800" dirty="0">
+                <a:solidFill>
+                  <a:srgbClr val="0070C0"/>
+                </a:solidFill>
                 <a:latin typeface="Calibri"/>
                 <a:ea typeface="Calibri"/>
                 <a:cs typeface="Calibri"/>
@@ -18841,6 +19069,9 @@
             </a:r>
             <a:r>
               <a:rPr lang="en-US" sz="1800" dirty="0" err="1">
+                <a:solidFill>
+                  <a:srgbClr val="0070C0"/>
+                </a:solidFill>
                 <a:latin typeface="Calibri"/>
                 <a:ea typeface="Calibri"/>
                 <a:cs typeface="Calibri"/>
@@ -18850,6 +19081,9 @@
             </a:r>
             <a:r>
               <a:rPr lang="en-US" sz="1800" dirty="0">
+                <a:solidFill>
+                  <a:srgbClr val="0070C0"/>
+                </a:solidFill>
                 <a:latin typeface="Calibri"/>
                 <a:ea typeface="Calibri"/>
                 <a:cs typeface="Calibri"/>
@@ -18859,6 +19093,9 @@
             </a:r>
             <a:r>
               <a:rPr lang="en-US" sz="1800" dirty="0" err="1">
+                <a:solidFill>
+                  <a:srgbClr val="0070C0"/>
+                </a:solidFill>
                 <a:latin typeface="Calibri"/>
                 <a:ea typeface="Calibri"/>
                 <a:cs typeface="Calibri"/>
@@ -18867,6 +19104,9 @@
               <a:t>plt</a:t>
             </a:r>
             <a:endParaRPr sz="1800" dirty="0">
+              <a:solidFill>
+                <a:srgbClr val="0070C0"/>
+              </a:solidFill>
               <a:latin typeface="Calibri"/>
               <a:ea typeface="Calibri"/>
               <a:cs typeface="Calibri"/>
@@ -18885,6 +19125,9 @@
             </a:pPr>
             <a:r>
               <a:rPr lang="en-US" sz="1800" dirty="0">
+                <a:solidFill>
+                  <a:srgbClr val="0070C0"/>
+                </a:solidFill>
                 <a:latin typeface="Calibri"/>
                 <a:ea typeface="Calibri"/>
                 <a:cs typeface="Calibri"/>
@@ -18894,6 +19137,9 @@
             </a:r>
             <a:r>
               <a:rPr lang="en-US" sz="1800" dirty="0" err="1">
+                <a:solidFill>
+                  <a:srgbClr val="0070C0"/>
+                </a:solidFill>
                 <a:latin typeface="Calibri"/>
                 <a:ea typeface="Calibri"/>
                 <a:cs typeface="Calibri"/>
@@ -18902,6 +19148,9 @@
               <a:t>sns</a:t>
             </a:r>
             <a:endParaRPr sz="1800" dirty="0">
+              <a:solidFill>
+                <a:srgbClr val="0070C0"/>
+              </a:solidFill>
               <a:latin typeface="Calibri"/>
               <a:ea typeface="Calibri"/>
               <a:cs typeface="Calibri"/>
@@ -18944,7 +19193,7 @@
         <p:spPr>
           <a:xfrm>
             <a:off x="0" y="0"/>
-            <a:ext cx="5882400" cy="6429300"/>
+            <a:ext cx="5882400" cy="6858000"/>
           </a:xfrm>
           <a:prstGeom prst="rect">
             <a:avLst/>
@@ -19463,6 +19712,23 @@
               </a:spcAft>
               <a:buNone/>
             </a:pPr>
+            <a:endParaRPr lang="en-US" dirty="0">
+              <a:latin typeface="Calibri"/>
+              <a:ea typeface="Calibri"/>
+              <a:cs typeface="Calibri"/>
+              <a:sym typeface="Calibri"/>
+            </a:endParaRPr>
+          </a:p>
+          <a:p>
+            <a:pPr marL="0" lvl="0" indent="0" algn="l" rtl="0">
+              <a:spcBef>
+                <a:spcPts val="0"/>
+              </a:spcBef>
+              <a:spcAft>
+                <a:spcPts val="0"/>
+              </a:spcAft>
+              <a:buNone/>
+            </a:pPr>
             <a:r>
               <a:rPr lang="en-US" dirty="0">
                 <a:latin typeface="Calibri"/>
@@ -19557,7 +19823,15 @@
               </a:rPr>
               <a:t>-data-warehouse/</a:t>
             </a:r>
-            <a:endParaRPr dirty="0">
+          </a:p>
+          <a:p>
+            <a:pPr lvl="0">
+              <a:buClr>
+                <a:schemeClr val="dk1"/>
+              </a:buClr>
+              <a:buSzPts val="1100"/>
+            </a:pPr>
+            <a:endParaRPr lang="en-US" dirty="0">
               <a:latin typeface="Calibri"/>
               <a:ea typeface="Calibri"/>
               <a:cs typeface="Calibri"/>
@@ -19565,19 +19839,11 @@
             </a:endParaRPr>
           </a:p>
           <a:p>
-            <a:pPr marL="0" lvl="0" indent="0" algn="l" rtl="0">
-              <a:spcBef>
-                <a:spcPts val="0"/>
-              </a:spcBef>
-              <a:spcAft>
-                <a:spcPts val="0"/>
-              </a:spcAft>
+            <a:pPr lvl="0">
               <a:buClr>
                 <a:schemeClr val="dk1"/>
               </a:buClr>
               <a:buSzPts val="1100"/>
-              <a:buFont typeface="Arial"/>
-              <a:buNone/>
             </a:pPr>
             <a:r>
               <a:rPr lang="en-US" dirty="0">
@@ -19586,29 +19852,15 @@
                 <a:cs typeface="Calibri"/>
                 <a:sym typeface="Calibri"/>
               </a:rPr>
-              <a:t>Power BI - Standard Microsoft Business Intelligence tool</a:t>
-            </a:r>
-            <a:endParaRPr dirty="0">
-              <a:latin typeface="Calibri"/>
-              <a:ea typeface="Calibri"/>
-              <a:cs typeface="Calibri"/>
-              <a:sym typeface="Calibri"/>
-            </a:endParaRPr>
-          </a:p>
-          <a:p>
-            <a:pPr marL="0" lvl="0" indent="0" algn="l" rtl="0">
-              <a:spcBef>
-                <a:spcPts val="0"/>
-              </a:spcBef>
-              <a:spcAft>
-                <a:spcPts val="0"/>
-              </a:spcAft>
+              <a:t>SSAS = Microsoft SQL Server Analysis Services – uses tabular models </a:t>
+            </a:r>
+          </a:p>
+          <a:p>
+            <a:pPr lvl="0">
               <a:buClr>
                 <a:schemeClr val="dk1"/>
               </a:buClr>
               <a:buSzPts val="1100"/>
-              <a:buFont typeface="Arial"/>
-              <a:buNone/>
             </a:pPr>
             <a:r>
               <a:rPr lang="en-US" dirty="0">
@@ -19617,38 +19869,15 @@
                 <a:cs typeface="Calibri"/>
                 <a:sym typeface="Calibri"/>
               </a:rPr>
-              <a:t>- https://</a:t>
-            </a:r>
-            <a:r>
-              <a:rPr lang="en-US" dirty="0" err="1">
-                <a:latin typeface="Calibri"/>
-                <a:ea typeface="Calibri"/>
-                <a:cs typeface="Calibri"/>
-                <a:sym typeface="Calibri"/>
-              </a:rPr>
-              <a:t>powerbi.microsoft.com</a:t>
-            </a:r>
-            <a:endParaRPr dirty="0">
-              <a:latin typeface="Calibri"/>
-              <a:ea typeface="Calibri"/>
-              <a:cs typeface="Calibri"/>
-              <a:sym typeface="Calibri"/>
-            </a:endParaRPr>
-          </a:p>
-          <a:p>
-            <a:pPr marL="0" lvl="0" indent="0" algn="l" rtl="0">
-              <a:spcBef>
-                <a:spcPts val="0"/>
-              </a:spcBef>
-              <a:spcAft>
-                <a:spcPts val="0"/>
-              </a:spcAft>
+              <a:t>( in-memory compressed databases) for serving fast queries to BI tools:</a:t>
+            </a:r>
+          </a:p>
+          <a:p>
+            <a:pPr lvl="0">
               <a:buClr>
                 <a:schemeClr val="dk1"/>
               </a:buClr>
               <a:buSzPts val="1100"/>
-              <a:buFont typeface="Arial"/>
-              <a:buNone/>
             </a:pPr>
             <a:r>
               <a:rPr lang="en-US" dirty="0">
@@ -19657,89 +19886,19 @@
                 <a:cs typeface="Calibri"/>
                 <a:sym typeface="Calibri"/>
               </a:rPr>
-              <a:t>Demo of how fast Power BI works with MS SQL Server - 500+ </a:t>
-            </a:r>
-            <a:r>
-              <a:rPr lang="en-US" dirty="0" err="1">
-                <a:latin typeface="Calibri"/>
-                <a:ea typeface="Calibri"/>
-                <a:cs typeface="Calibri"/>
-                <a:sym typeface="Calibri"/>
-              </a:rPr>
-              <a:t>Mln</a:t>
+              <a:t> - </a:t>
             </a:r>
             <a:r>
               <a:rPr lang="en-US" dirty="0">
-                <a:latin typeface="Calibri"/>
-                <a:ea typeface="Calibri"/>
-                <a:cs typeface="Calibri"/>
-                <a:sym typeface="Calibri"/>
-              </a:rPr>
-              <a:t> rows of data</a:t>
-            </a:r>
-            <a:endParaRPr dirty="0">
-              <a:latin typeface="Calibri"/>
-              <a:ea typeface="Calibri"/>
-              <a:cs typeface="Calibri"/>
-              <a:sym typeface="Calibri"/>
-            </a:endParaRPr>
-          </a:p>
-          <a:p>
-            <a:pPr marL="0" lvl="0" indent="0" algn="l" rtl="0">
-              <a:spcBef>
-                <a:spcPts val="0"/>
-              </a:spcBef>
-              <a:spcAft>
-                <a:spcPts val="0"/>
-              </a:spcAft>
-              <a:buNone/>
-            </a:pPr>
-            <a:r>
-              <a:rPr lang="en-US" dirty="0">
-                <a:latin typeface="Calibri"/>
-                <a:ea typeface="Calibri"/>
-                <a:cs typeface="Calibri"/>
-                <a:sym typeface="Calibri"/>
-              </a:rPr>
-              <a:t>- https://</a:t>
-            </a:r>
-            <a:r>
-              <a:rPr lang="en-US" dirty="0" err="1">
-                <a:latin typeface="Calibri"/>
-                <a:ea typeface="Calibri"/>
-                <a:cs typeface="Calibri"/>
-                <a:sym typeface="Calibri"/>
-              </a:rPr>
-              <a:t>www.youtube.com</a:t>
-            </a:r>
-            <a:r>
-              <a:rPr lang="en-US" dirty="0">
-                <a:latin typeface="Calibri"/>
-                <a:ea typeface="Calibri"/>
-                <a:cs typeface="Calibri"/>
-                <a:sym typeface="Calibri"/>
-              </a:rPr>
-              <a:t>/</a:t>
-            </a:r>
-            <a:r>
-              <a:rPr lang="en-US" dirty="0" err="1">
-                <a:latin typeface="Calibri"/>
-                <a:ea typeface="Calibri"/>
-                <a:cs typeface="Calibri"/>
-                <a:sym typeface="Calibri"/>
-              </a:rPr>
-              <a:t>watch?v</a:t>
-            </a:r>
-            <a:r>
-              <a:rPr lang="en-US" dirty="0">
-                <a:latin typeface="Calibri"/>
-                <a:ea typeface="Calibri"/>
-                <a:cs typeface="Calibri"/>
-                <a:sym typeface="Calibri"/>
-              </a:rPr>
-              <a:t>=mQyFp2MSl-s</a:t>
-            </a:r>
-            <a:endParaRPr dirty="0">
+                <a:hlinkClick r:id="rId3"/>
+              </a:rPr>
+              <a:t>https://en.wikipedia.org/wiki/Microsoft_Analysis_Services</a:t>
+            </a:r>
+            <a:r>
+              <a:rPr lang="en-US" dirty="0"/>
+              <a:t> </a:t>
+            </a:r>
+            <a:endParaRPr lang="en-US" dirty="0">
               <a:latin typeface="Calibri"/>
               <a:ea typeface="Calibri"/>
               <a:cs typeface="Calibri"/>
@@ -19756,8 +19915,8 @@
         </p:nvSpPr>
         <p:spPr>
           <a:xfrm>
-            <a:off x="6028050" y="0"/>
-            <a:ext cx="6164100" cy="3196800"/>
+            <a:off x="6028050" y="-1"/>
+            <a:ext cx="6164100" cy="4618495"/>
           </a:xfrm>
           <a:prstGeom prst="rect">
             <a:avLst/>
@@ -19773,25 +19932,48 @@
           </a:bodyPr>
           <a:lstStyle/>
           <a:p>
-            <a:pPr marL="0" lvl="0" indent="0" algn="l" rtl="0">
-              <a:spcBef>
-                <a:spcPts val="0"/>
-              </a:spcBef>
-              <a:spcAft>
-                <a:spcPts val="0"/>
-              </a:spcAft>
-              <a:buNone/>
+            <a:pPr lvl="0">
+              <a:buClr>
+                <a:schemeClr val="dk1"/>
+              </a:buClr>
+              <a:buSzPts val="1100"/>
             </a:pPr>
             <a:r>
-              <a:rPr lang="en-US">
-                <a:latin typeface="Calibri"/>
-                <a:ea typeface="Calibri"/>
-                <a:cs typeface="Calibri"/>
-                <a:sym typeface="Calibri"/>
-              </a:rPr>
-              <a:t>Demo of Kinetica DB using Tableau &amp; Power BI:</a:t>
-            </a:r>
-            <a:endParaRPr>
+              <a:rPr lang="en-US" dirty="0">
+                <a:latin typeface="Calibri"/>
+                <a:ea typeface="Calibri"/>
+                <a:cs typeface="Calibri"/>
+                <a:sym typeface="Calibri"/>
+              </a:rPr>
+              <a:t>Power BI - Standard Microsoft Business Intelligence tool</a:t>
+            </a:r>
+          </a:p>
+          <a:p>
+            <a:pPr lvl="0">
+              <a:buClr>
+                <a:schemeClr val="dk1"/>
+              </a:buClr>
+              <a:buSzPts val="1100"/>
+            </a:pPr>
+            <a:r>
+              <a:rPr lang="en-US" dirty="0">
+                <a:latin typeface="Calibri"/>
+                <a:ea typeface="Calibri"/>
+                <a:cs typeface="Calibri"/>
+                <a:sym typeface="Calibri"/>
+              </a:rPr>
+              <a:t>- https://</a:t>
+            </a:r>
+            <a:r>
+              <a:rPr lang="en-US" dirty="0" err="1">
+                <a:latin typeface="Calibri"/>
+                <a:ea typeface="Calibri"/>
+                <a:cs typeface="Calibri"/>
+                <a:sym typeface="Calibri"/>
+              </a:rPr>
+              <a:t>powerbi.microsoft.com</a:t>
+            </a:r>
+            <a:endParaRPr lang="en-US" dirty="0">
               <a:latin typeface="Calibri"/>
               <a:ea typeface="Calibri"/>
               <a:cs typeface="Calibri"/>
@@ -19799,25 +19981,13 @@
             </a:endParaRPr>
           </a:p>
           <a:p>
-            <a:pPr marL="0" lvl="0" indent="0" algn="l" rtl="0">
-              <a:spcBef>
-                <a:spcPts val="0"/>
-              </a:spcBef>
-              <a:spcAft>
-                <a:spcPts val="0"/>
-              </a:spcAft>
-              <a:buNone/>
+            <a:pPr lvl="0">
+              <a:buClr>
+                <a:schemeClr val="dk1"/>
+              </a:buClr>
+              <a:buSzPts val="1100"/>
             </a:pPr>
-            <a:r>
-              <a:rPr lang="en-US">
-                <a:latin typeface="Calibri"/>
-                <a:ea typeface="Calibri"/>
-                <a:cs typeface="Calibri"/>
-                <a:sym typeface="Calibri"/>
-              </a:rPr>
-              <a:t>- https://www.youtube.com/watch?v=7XliLU7ZC_s</a:t>
-            </a:r>
-            <a:endParaRPr>
+            <a:endParaRPr lang="en-US" dirty="0">
               <a:latin typeface="Calibri"/>
               <a:ea typeface="Calibri"/>
               <a:cs typeface="Calibri"/>
@@ -19825,6 +19995,94 @@
             </a:endParaRPr>
           </a:p>
           <a:p>
+            <a:pPr lvl="0">
+              <a:buClr>
+                <a:schemeClr val="dk1"/>
+              </a:buClr>
+              <a:buSzPts val="1100"/>
+            </a:pPr>
+            <a:r>
+              <a:rPr lang="en-US" dirty="0">
+                <a:latin typeface="Calibri"/>
+                <a:ea typeface="Calibri"/>
+                <a:cs typeface="Calibri"/>
+                <a:sym typeface="Calibri"/>
+              </a:rPr>
+              <a:t>Demo of how fast Power BI Premium works with MS SQL Server - 500+ </a:t>
+            </a:r>
+            <a:r>
+              <a:rPr lang="en-US" dirty="0" err="1">
+                <a:latin typeface="Calibri"/>
+                <a:ea typeface="Calibri"/>
+                <a:cs typeface="Calibri"/>
+                <a:sym typeface="Calibri"/>
+              </a:rPr>
+              <a:t>Mln</a:t>
+            </a:r>
+            <a:r>
+              <a:rPr lang="en-US" dirty="0">
+                <a:latin typeface="Calibri"/>
+                <a:ea typeface="Calibri"/>
+                <a:cs typeface="Calibri"/>
+                <a:sym typeface="Calibri"/>
+              </a:rPr>
+              <a:t> rows of data </a:t>
+            </a:r>
+          </a:p>
+          <a:p>
+            <a:pPr lvl="0">
+              <a:buClr>
+                <a:schemeClr val="dk1"/>
+              </a:buClr>
+              <a:buSzPts val="1100"/>
+            </a:pPr>
+            <a:r>
+              <a:rPr lang="en-US" dirty="0">
+                <a:latin typeface="Calibri"/>
+                <a:ea typeface="Calibri"/>
+                <a:cs typeface="Calibri"/>
+                <a:sym typeface="Calibri"/>
+              </a:rPr>
+              <a:t>- https://</a:t>
+            </a:r>
+            <a:r>
+              <a:rPr lang="en-US" dirty="0" err="1">
+                <a:latin typeface="Calibri"/>
+                <a:ea typeface="Calibri"/>
+                <a:cs typeface="Calibri"/>
+                <a:sym typeface="Calibri"/>
+              </a:rPr>
+              <a:t>www.youtube.com</a:t>
+            </a:r>
+            <a:r>
+              <a:rPr lang="en-US" dirty="0">
+                <a:latin typeface="Calibri"/>
+                <a:ea typeface="Calibri"/>
+                <a:cs typeface="Calibri"/>
+                <a:sym typeface="Calibri"/>
+              </a:rPr>
+              <a:t>/</a:t>
+            </a:r>
+            <a:r>
+              <a:rPr lang="en-US" dirty="0" err="1">
+                <a:latin typeface="Calibri"/>
+                <a:ea typeface="Calibri"/>
+                <a:cs typeface="Calibri"/>
+                <a:sym typeface="Calibri"/>
+              </a:rPr>
+              <a:t>watch?v</a:t>
+            </a:r>
+            <a:r>
+              <a:rPr lang="en-US" dirty="0">
+                <a:latin typeface="Calibri"/>
+                <a:ea typeface="Calibri"/>
+                <a:cs typeface="Calibri"/>
+                <a:sym typeface="Calibri"/>
+              </a:rPr>
+              <a:t>=mQyFp2MSl-s</a:t>
+            </a:r>
+          </a:p>
+          <a:p>
             <a:pPr marL="0" lvl="0" indent="0" algn="l" rtl="0">
               <a:spcBef>
                 <a:spcPts val="0"/>
@@ -19834,7 +20092,7 @@
               </a:spcAft>
               <a:buNone/>
             </a:pPr>
-            <a:endParaRPr>
+            <a:endParaRPr lang="en-US" dirty="0">
               <a:latin typeface="Calibri"/>
               <a:ea typeface="Calibri"/>
               <a:cs typeface="Calibri"/>
@@ -19852,15 +20110,33 @@
               <a:buNone/>
             </a:pPr>
             <a:r>
-              <a:rPr lang="en-US">
-                <a:latin typeface="Calibri"/>
-                <a:ea typeface="Calibri"/>
-                <a:cs typeface="Calibri"/>
-                <a:sym typeface="Calibri"/>
-              </a:rPr>
-              <a:t>Notice:</a:t>
-            </a:r>
-            <a:endParaRPr>
+              <a:rPr lang="en-US" dirty="0">
+                <a:latin typeface="Calibri"/>
+                <a:ea typeface="Calibri"/>
+                <a:cs typeface="Calibri"/>
+                <a:sym typeface="Calibri"/>
+              </a:rPr>
+              <a:t>Demo of </a:t>
+            </a:r>
+            <a:r>
+              <a:rPr lang="en-US" dirty="0" err="1">
+                <a:latin typeface="Calibri"/>
+                <a:ea typeface="Calibri"/>
+                <a:cs typeface="Calibri"/>
+                <a:sym typeface="Calibri"/>
+              </a:rPr>
+              <a:t>Kinetica</a:t>
+            </a:r>
+            <a:r>
+              <a:rPr lang="en-US" dirty="0">
+                <a:latin typeface="Calibri"/>
+                <a:ea typeface="Calibri"/>
+                <a:cs typeface="Calibri"/>
+                <a:sym typeface="Calibri"/>
+              </a:rPr>
+              <a:t> DB using Tableau &amp; Power BI:</a:t>
+            </a:r>
+            <a:endParaRPr dirty="0">
               <a:latin typeface="Calibri"/>
               <a:ea typeface="Calibri"/>
               <a:cs typeface="Calibri"/>
@@ -19878,15 +20154,51 @@
               <a:buNone/>
             </a:pPr>
             <a:r>
-              <a:rPr lang="en-US">
-                <a:latin typeface="Calibri"/>
-                <a:ea typeface="Calibri"/>
-                <a:cs typeface="Calibri"/>
-                <a:sym typeface="Calibri"/>
-              </a:rPr>
-              <a:t>- sub-second response on billions of rows of data</a:t>
-            </a:r>
-            <a:endParaRPr>
+              <a:rPr lang="en-US" dirty="0">
+                <a:latin typeface="Calibri"/>
+                <a:ea typeface="Calibri"/>
+                <a:cs typeface="Calibri"/>
+                <a:sym typeface="Calibri"/>
+              </a:rPr>
+              <a:t>- https://</a:t>
+            </a:r>
+            <a:r>
+              <a:rPr lang="en-US" dirty="0" err="1">
+                <a:latin typeface="Calibri"/>
+                <a:ea typeface="Calibri"/>
+                <a:cs typeface="Calibri"/>
+                <a:sym typeface="Calibri"/>
+              </a:rPr>
+              <a:t>www.youtube.com</a:t>
+            </a:r>
+            <a:r>
+              <a:rPr lang="en-US" dirty="0">
+                <a:latin typeface="Calibri"/>
+                <a:ea typeface="Calibri"/>
+                <a:cs typeface="Calibri"/>
+                <a:sym typeface="Calibri"/>
+              </a:rPr>
+              <a:t>/</a:t>
+            </a:r>
+            <a:r>
+              <a:rPr lang="en-US" dirty="0" err="1">
+                <a:latin typeface="Calibri"/>
+                <a:ea typeface="Calibri"/>
+                <a:cs typeface="Calibri"/>
+                <a:sym typeface="Calibri"/>
+              </a:rPr>
+              <a:t>watch?v</a:t>
+            </a:r>
+            <a:r>
+              <a:rPr lang="en-US" dirty="0">
+                <a:latin typeface="Calibri"/>
+                <a:ea typeface="Calibri"/>
+                <a:cs typeface="Calibri"/>
+                <a:sym typeface="Calibri"/>
+              </a:rPr>
+              <a:t>=7XliLU7ZC_s</a:t>
+            </a:r>
+            <a:endParaRPr dirty="0">
               <a:latin typeface="Calibri"/>
               <a:ea typeface="Calibri"/>
               <a:cs typeface="Calibri"/>
@@ -19903,16 +20215,7 @@
               </a:spcAft>
               <a:buNone/>
             </a:pPr>
-            <a:r>
-              <a:rPr lang="en-US">
-                <a:latin typeface="Calibri"/>
-                <a:ea typeface="Calibri"/>
-                <a:cs typeface="Calibri"/>
-                <a:sym typeface="Calibri"/>
-              </a:rPr>
-              <a:t>- not need to create indexes, no wait time, fast load (even live streaming) of data</a:t>
-            </a:r>
-            <a:endParaRPr>
+            <a:endParaRPr dirty="0">
               <a:latin typeface="Calibri"/>
               <a:ea typeface="Calibri"/>
               <a:cs typeface="Calibri"/>
@@ -19929,7 +20232,16 @@
               </a:spcAft>
               <a:buNone/>
             </a:pPr>
-            <a:endParaRPr>
+            <a:r>
+              <a:rPr lang="en-US" dirty="0">
+                <a:latin typeface="Calibri"/>
+                <a:ea typeface="Calibri"/>
+                <a:cs typeface="Calibri"/>
+                <a:sym typeface="Calibri"/>
+              </a:rPr>
+              <a:t>Notice:</a:t>
+            </a:r>
+            <a:endParaRPr dirty="0">
               <a:latin typeface="Calibri"/>
               <a:ea typeface="Calibri"/>
               <a:cs typeface="Calibri"/>
@@ -19947,15 +20259,15 @@
               <a:buNone/>
             </a:pPr>
             <a:r>
-              <a:rPr lang="en-US">
-                <a:latin typeface="Calibri"/>
-                <a:ea typeface="Calibri"/>
-                <a:cs typeface="Calibri"/>
-                <a:sym typeface="Calibri"/>
-              </a:rPr>
-              <a:t>Main points:</a:t>
-            </a:r>
-            <a:endParaRPr>
+              <a:rPr lang="en-US" dirty="0">
+                <a:latin typeface="Calibri"/>
+                <a:ea typeface="Calibri"/>
+                <a:cs typeface="Calibri"/>
+                <a:sym typeface="Calibri"/>
+              </a:rPr>
+              <a:t>- sub-second response on billions of rows of data</a:t>
+            </a:r>
+            <a:endParaRPr dirty="0">
               <a:latin typeface="Calibri"/>
               <a:ea typeface="Calibri"/>
               <a:cs typeface="Calibri"/>
@@ -19973,15 +20285,15 @@
               <a:buNone/>
             </a:pPr>
             <a:r>
-              <a:rPr lang="en-US">
-                <a:latin typeface="Calibri"/>
-                <a:ea typeface="Calibri"/>
-                <a:cs typeface="Calibri"/>
-                <a:sym typeface="Calibri"/>
-              </a:rPr>
-              <a:t>- you can select from many different BI tools - they all support SQL</a:t>
-            </a:r>
-            <a:endParaRPr>
+              <a:rPr lang="en-US" dirty="0">
+                <a:latin typeface="Calibri"/>
+                <a:ea typeface="Calibri"/>
+                <a:cs typeface="Calibri"/>
+                <a:sym typeface="Calibri"/>
+              </a:rPr>
+              <a:t>- not need to create indexes, no wait time, fast load (even live streaming) of data</a:t>
+            </a:r>
+            <a:endParaRPr dirty="0">
               <a:latin typeface="Calibri"/>
               <a:ea typeface="Calibri"/>
               <a:cs typeface="Calibri"/>
@@ -19998,16 +20310,7 @@
               </a:spcAft>
               <a:buNone/>
             </a:pPr>
-            <a:r>
-              <a:rPr lang="en-US">
-                <a:latin typeface="Calibri"/>
-                <a:ea typeface="Calibri"/>
-                <a:cs typeface="Calibri"/>
-                <a:sym typeface="Calibri"/>
-              </a:rPr>
-              <a:t>- you can select from many SQL databases - they are fast</a:t>
-            </a:r>
-            <a:endParaRPr>
+            <a:endParaRPr dirty="0">
               <a:latin typeface="Calibri"/>
               <a:ea typeface="Calibri"/>
               <a:cs typeface="Calibri"/>
@@ -20025,15 +20328,15 @@
               <a:buNone/>
             </a:pPr>
             <a:r>
-              <a:rPr lang="en-US">
-                <a:latin typeface="Calibri"/>
-                <a:ea typeface="Calibri"/>
-                <a:cs typeface="Calibri"/>
-                <a:sym typeface="Calibri"/>
-              </a:rPr>
-              <a:t>- you can simplify your development time using standard SQL features</a:t>
-            </a:r>
-            <a:endParaRPr>
+              <a:rPr lang="en-US" dirty="0">
+                <a:latin typeface="Calibri"/>
+                <a:ea typeface="Calibri"/>
+                <a:cs typeface="Calibri"/>
+                <a:sym typeface="Calibri"/>
+              </a:rPr>
+              <a:t>Main points:</a:t>
+            </a:r>
+            <a:endParaRPr dirty="0">
               <a:latin typeface="Calibri"/>
               <a:ea typeface="Calibri"/>
               <a:cs typeface="Calibri"/>
@@ -20051,15 +20354,15 @@
               <a:buNone/>
             </a:pPr>
             <a:r>
-              <a:rPr lang="en-US">
-                <a:latin typeface="Calibri"/>
-                <a:ea typeface="Calibri"/>
-                <a:cs typeface="Calibri"/>
-                <a:sym typeface="Calibri"/>
-              </a:rPr>
-              <a:t>- you can select dedicated hardware to tune your speed</a:t>
-            </a:r>
-            <a:endParaRPr>
+              <a:rPr lang="en-US" dirty="0">
+                <a:latin typeface="Calibri"/>
+                <a:ea typeface="Calibri"/>
+                <a:cs typeface="Calibri"/>
+                <a:sym typeface="Calibri"/>
+              </a:rPr>
+              <a:t>- you can select from many different BI tools - they all support SQL</a:t>
+            </a:r>
+            <a:endParaRPr dirty="0">
               <a:latin typeface="Calibri"/>
               <a:ea typeface="Calibri"/>
               <a:cs typeface="Calibri"/>
@@ -20077,15 +20380,15 @@
               <a:buNone/>
             </a:pPr>
             <a:r>
-              <a:rPr lang="en-US">
-                <a:latin typeface="Calibri"/>
-                <a:ea typeface="Calibri"/>
-                <a:cs typeface="Calibri"/>
-                <a:sym typeface="Calibri"/>
-              </a:rPr>
-              <a:t>- you can achieve very fast response time</a:t>
-            </a:r>
-            <a:endParaRPr>
+              <a:rPr lang="en-US" dirty="0">
+                <a:latin typeface="Calibri"/>
+                <a:ea typeface="Calibri"/>
+                <a:cs typeface="Calibri"/>
+                <a:sym typeface="Calibri"/>
+              </a:rPr>
+              <a:t>- you can select from many SQL databases - they are fast</a:t>
+            </a:r>
+            <a:endParaRPr dirty="0">
               <a:latin typeface="Calibri"/>
               <a:ea typeface="Calibri"/>
               <a:cs typeface="Calibri"/>
@@ -20103,7 +20406,85 @@
               <a:buNone/>
             </a:pPr>
             <a:r>
-              <a:rPr lang="en-US">
+              <a:rPr lang="en-US" dirty="0">
+                <a:latin typeface="Calibri"/>
+                <a:ea typeface="Calibri"/>
+                <a:cs typeface="Calibri"/>
+                <a:sym typeface="Calibri"/>
+              </a:rPr>
+              <a:t>- you can simplify your development time using standard SQL features</a:t>
+            </a:r>
+            <a:endParaRPr dirty="0">
+              <a:latin typeface="Calibri"/>
+              <a:ea typeface="Calibri"/>
+              <a:cs typeface="Calibri"/>
+              <a:sym typeface="Calibri"/>
+            </a:endParaRPr>
+          </a:p>
+          <a:p>
+            <a:pPr marL="0" lvl="0" indent="0" algn="l" rtl="0">
+              <a:spcBef>
+                <a:spcPts val="0"/>
+              </a:spcBef>
+              <a:spcAft>
+                <a:spcPts val="0"/>
+              </a:spcAft>
+              <a:buNone/>
+            </a:pPr>
+            <a:r>
+              <a:rPr lang="en-US" dirty="0">
+                <a:latin typeface="Calibri"/>
+                <a:ea typeface="Calibri"/>
+                <a:cs typeface="Calibri"/>
+                <a:sym typeface="Calibri"/>
+              </a:rPr>
+              <a:t>- you can select dedicated hardware to tune your speed</a:t>
+            </a:r>
+            <a:endParaRPr dirty="0">
+              <a:latin typeface="Calibri"/>
+              <a:ea typeface="Calibri"/>
+              <a:cs typeface="Calibri"/>
+              <a:sym typeface="Calibri"/>
+            </a:endParaRPr>
+          </a:p>
+          <a:p>
+            <a:pPr marL="0" lvl="0" indent="0" algn="l" rtl="0">
+              <a:spcBef>
+                <a:spcPts val="0"/>
+              </a:spcBef>
+              <a:spcAft>
+                <a:spcPts val="0"/>
+              </a:spcAft>
+              <a:buNone/>
+            </a:pPr>
+            <a:r>
+              <a:rPr lang="en-US" dirty="0">
+                <a:latin typeface="Calibri"/>
+                <a:ea typeface="Calibri"/>
+                <a:cs typeface="Calibri"/>
+                <a:sym typeface="Calibri"/>
+              </a:rPr>
+              <a:t>- you can achieve very fast response time</a:t>
+            </a:r>
+            <a:endParaRPr dirty="0">
+              <a:latin typeface="Calibri"/>
+              <a:ea typeface="Calibri"/>
+              <a:cs typeface="Calibri"/>
+              <a:sym typeface="Calibri"/>
+            </a:endParaRPr>
+          </a:p>
+          <a:p>
+            <a:pPr marL="0" lvl="0" indent="0" algn="l" rtl="0">
+              <a:spcBef>
+                <a:spcPts val="0"/>
+              </a:spcBef>
+              <a:spcAft>
+                <a:spcPts val="0"/>
+              </a:spcAft>
+              <a:buNone/>
+            </a:pPr>
+            <a:r>
+              <a:rPr lang="en-US" dirty="0">
                 <a:latin typeface="Calibri"/>
                 <a:ea typeface="Calibri"/>
                 <a:cs typeface="Calibri"/>
@@ -20111,7 +20492,7 @@
               </a:rPr>
               <a:t>- you can enjoy lower prices</a:t>
             </a:r>
-            <a:endParaRPr>
+            <a:endParaRPr dirty="0">
               <a:latin typeface="Calibri"/>
               <a:ea typeface="Calibri"/>
               <a:cs typeface="Calibri"/>

--- a/analytics_dashboards.pptx
+++ b/analytics_dashboards.pptx
@@ -5,16 +5,17 @@
     <p:sldMasterId id="2147483659" r:id="rId1"/>
   </p:sldMasterIdLst>
   <p:notesMasterIdLst>
-    <p:notesMasterId r:id="rId9"/>
+    <p:notesMasterId r:id="rId10"/>
   </p:notesMasterIdLst>
   <p:sldIdLst>
     <p:sldId id="256" r:id="rId2"/>
     <p:sldId id="257" r:id="rId3"/>
     <p:sldId id="258" r:id="rId4"/>
     <p:sldId id="262" r:id="rId5"/>
-    <p:sldId id="259" r:id="rId6"/>
-    <p:sldId id="260" r:id="rId7"/>
+    <p:sldId id="263" r:id="rId6"/>
+    <p:sldId id="259" r:id="rId7"/>
     <p:sldId id="261" r:id="rId8"/>
+    <p:sldId id="260" r:id="rId9"/>
   </p:sldIdLst>
   <p:sldSz cx="12192000" cy="6858000"/>
   <p:notesSz cx="6858000" cy="9144000"/>
@@ -2034,7 +2035,7 @@
             </a:pPr>
             <a:fld id="{00000000-1234-1234-1234-123412341234}" type="slidenum">
               <a:rPr lang="en-US"/>
-              <a:t>5</a:t>
+              <a:t>6</a:t>
             </a:fld>
             <a:endParaRPr/>
           </a:p>
@@ -2184,7 +2185,7 @@
             </a:pPr>
             <a:fld id="{00000000-1234-1234-1234-123412341234}" type="slidenum">
               <a:rPr lang="en-US"/>
-              <a:t>6</a:t>
+              <a:t>8</a:t>
             </a:fld>
             <a:endParaRPr/>
           </a:p>
@@ -19925,6 +19926,773 @@
   <p:cSld>
     <p:spTree>
       <p:nvGrpSpPr>
+        <p:cNvPr id="1" name=""/>
+        <p:cNvGrpSpPr/>
+        <p:nvPr/>
+      </p:nvGrpSpPr>
+      <p:grpSpPr>
+        <a:xfrm>
+          <a:off x="0" y="0"/>
+          <a:ext cx="0" cy="0"/>
+          <a:chOff x="0" y="0"/>
+          <a:chExt cx="0" cy="0"/>
+        </a:xfrm>
+      </p:grpSpPr>
+      <p:sp>
+        <p:nvSpPr>
+          <p:cNvPr id="2" name="TextBox 1">
+            <a:extLst>
+              <a:ext uri="{FF2B5EF4-FFF2-40B4-BE49-F238E27FC236}">
+                <a16:creationId xmlns:a16="http://schemas.microsoft.com/office/drawing/2014/main" id="{25130DB6-EAE0-B841-A247-A5E02499036A}"/>
+              </a:ext>
+            </a:extLst>
+          </p:cNvPr>
+          <p:cNvSpPr txBox="1"/>
+          <p:nvPr/>
+        </p:nvSpPr>
+        <p:spPr>
+          <a:xfrm>
+            <a:off x="0" y="93785"/>
+            <a:ext cx="5556738" cy="461665"/>
+          </a:xfrm>
+          <a:prstGeom prst="rect">
+            <a:avLst/>
+          </a:prstGeom>
+          <a:noFill/>
+        </p:spPr>
+        <p:txBody>
+          <a:bodyPr wrap="square" rtlCol="0">
+            <a:spAutoFit/>
+          </a:bodyPr>
+          <a:lstStyle/>
+          <a:p>
+            <a:r>
+              <a:rPr lang="en-US" sz="2400" b="1" dirty="0">
+                <a:latin typeface="Calibri"/>
+                <a:ea typeface="Calibri"/>
+                <a:cs typeface="Calibri"/>
+                <a:sym typeface="Calibri"/>
+              </a:rPr>
+              <a:t>Typical Data Organization for Analytics</a:t>
+            </a:r>
+          </a:p>
+        </p:txBody>
+      </p:sp>
+      <p:sp>
+        <p:nvSpPr>
+          <p:cNvPr id="3" name="Can 2">
+            <a:extLst>
+              <a:ext uri="{FF2B5EF4-FFF2-40B4-BE49-F238E27FC236}">
+                <a16:creationId xmlns:a16="http://schemas.microsoft.com/office/drawing/2014/main" id="{854B268A-643E-9B4F-B623-63EFBF3615A0}"/>
+              </a:ext>
+            </a:extLst>
+          </p:cNvPr>
+          <p:cNvSpPr/>
+          <p:nvPr/>
+        </p:nvSpPr>
+        <p:spPr>
+          <a:xfrm>
+            <a:off x="779216" y="978078"/>
+            <a:ext cx="984738" cy="1254369"/>
+          </a:xfrm>
+          <a:prstGeom prst="can">
+            <a:avLst/>
+          </a:prstGeom>
+        </p:spPr>
+        <p:style>
+          <a:lnRef idx="2">
+            <a:schemeClr val="accent1">
+              <a:shade val="50000"/>
+            </a:schemeClr>
+          </a:lnRef>
+          <a:fillRef idx="1">
+            <a:schemeClr val="accent1"/>
+          </a:fillRef>
+          <a:effectRef idx="0">
+            <a:schemeClr val="accent1"/>
+          </a:effectRef>
+          <a:fontRef idx="minor">
+            <a:schemeClr val="lt1"/>
+          </a:fontRef>
+        </p:style>
+        <p:txBody>
+          <a:bodyPr rtlCol="0" anchor="ctr"/>
+          <a:lstStyle/>
+          <a:p>
+            <a:pPr algn="ctr"/>
+            <a:r>
+              <a:rPr lang="en-US" dirty="0"/>
+              <a:t>OLTP</a:t>
+            </a:r>
+          </a:p>
+          <a:p>
+            <a:pPr algn="ctr"/>
+            <a:r>
+              <a:rPr lang="en-US" dirty="0"/>
+              <a:t>DB</a:t>
+            </a:r>
+          </a:p>
+        </p:txBody>
+      </p:sp>
+      <p:pic>
+        <p:nvPicPr>
+          <p:cNvPr id="1026" name="Picture 2" descr="Multiple Files Icon - 6244 - Dryicons">
+            <a:extLst>
+              <a:ext uri="{FF2B5EF4-FFF2-40B4-BE49-F238E27FC236}">
+                <a16:creationId xmlns:a16="http://schemas.microsoft.com/office/drawing/2014/main" id="{318D204D-22B8-154C-8595-E8A970098AE0}"/>
+              </a:ext>
+            </a:extLst>
+          </p:cNvPr>
+          <p:cNvPicPr>
+            <a:picLocks noChangeAspect="1" noChangeArrowheads="1"/>
+          </p:cNvPicPr>
+          <p:nvPr/>
+        </p:nvPicPr>
+        <p:blipFill>
+          <a:blip r:embed="rId2" cstate="email">
+            <a:extLst>
+              <a:ext uri="{28A0092B-C50C-407E-A947-70E740481C1C}">
+                <a14:useLocalDpi xmlns:a14="http://schemas.microsoft.com/office/drawing/2010/main"/>
+              </a:ext>
+            </a:extLst>
+          </a:blip>
+          <a:srcRect/>
+          <a:stretch>
+            <a:fillRect/>
+          </a:stretch>
+        </p:blipFill>
+        <p:spPr bwMode="auto">
+          <a:xfrm>
+            <a:off x="128586" y="2492977"/>
+            <a:ext cx="1184031" cy="1184031"/>
+          </a:xfrm>
+          <a:prstGeom prst="rect">
+            <a:avLst/>
+          </a:prstGeom>
+          <a:noFill/>
+          <a:extLst>
+            <a:ext uri="{909E8E84-426E-40DD-AFC4-6F175D3DCCD1}">
+              <a14:hiddenFill xmlns:a14="http://schemas.microsoft.com/office/drawing/2010/main">
+                <a:solidFill>
+                  <a:srgbClr val="FFFFFF"/>
+                </a:solidFill>
+              </a14:hiddenFill>
+            </a:ext>
+          </a:extLst>
+        </p:spPr>
+      </p:pic>
+      <p:sp>
+        <p:nvSpPr>
+          <p:cNvPr id="4" name="TextBox 3">
+            <a:extLst>
+              <a:ext uri="{FF2B5EF4-FFF2-40B4-BE49-F238E27FC236}">
+                <a16:creationId xmlns:a16="http://schemas.microsoft.com/office/drawing/2014/main" id="{65BB060B-5423-9043-8B16-33F8CFBAE9E8}"/>
+              </a:ext>
+            </a:extLst>
+          </p:cNvPr>
+          <p:cNvSpPr txBox="1"/>
+          <p:nvPr/>
+        </p:nvSpPr>
+        <p:spPr>
+          <a:xfrm>
+            <a:off x="280986" y="3763054"/>
+            <a:ext cx="679938" cy="307777"/>
+          </a:xfrm>
+          <a:prstGeom prst="rect">
+            <a:avLst/>
+          </a:prstGeom>
+          <a:noFill/>
+        </p:spPr>
+        <p:txBody>
+          <a:bodyPr wrap="square" rtlCol="0">
+            <a:spAutoFit/>
+          </a:bodyPr>
+          <a:lstStyle/>
+          <a:p>
+            <a:r>
+              <a:rPr lang="en-US" dirty="0"/>
+              <a:t>Files</a:t>
+            </a:r>
+          </a:p>
+        </p:txBody>
+      </p:sp>
+      <p:pic>
+        <p:nvPicPr>
+          <p:cNvPr id="1028" name="Picture 4" descr="Rest API Icon - Free Download, PNG and Vector">
+            <a:extLst>
+              <a:ext uri="{FF2B5EF4-FFF2-40B4-BE49-F238E27FC236}">
+                <a16:creationId xmlns:a16="http://schemas.microsoft.com/office/drawing/2014/main" id="{0811F92F-5393-A449-AC67-E99DFE48DF8A}"/>
+              </a:ext>
+            </a:extLst>
+          </p:cNvPr>
+          <p:cNvPicPr>
+            <a:picLocks noChangeAspect="1" noChangeArrowheads="1"/>
+          </p:cNvPicPr>
+          <p:nvPr/>
+        </p:nvPicPr>
+        <p:blipFill>
+          <a:blip r:embed="rId3" cstate="email">
+            <a:extLst>
+              <a:ext uri="{28A0092B-C50C-407E-A947-70E740481C1C}">
+                <a14:useLocalDpi xmlns:a14="http://schemas.microsoft.com/office/drawing/2010/main"/>
+              </a:ext>
+            </a:extLst>
+          </a:blip>
+          <a:srcRect/>
+          <a:stretch>
+            <a:fillRect/>
+          </a:stretch>
+        </p:blipFill>
+        <p:spPr bwMode="auto">
+          <a:xfrm>
+            <a:off x="820248" y="4156877"/>
+            <a:ext cx="984738" cy="984738"/>
+          </a:xfrm>
+          <a:prstGeom prst="rect">
+            <a:avLst/>
+          </a:prstGeom>
+          <a:noFill/>
+          <a:extLst>
+            <a:ext uri="{909E8E84-426E-40DD-AFC4-6F175D3DCCD1}">
+              <a14:hiddenFill xmlns:a14="http://schemas.microsoft.com/office/drawing/2010/main">
+                <a:solidFill>
+                  <a:srgbClr val="FFFFFF"/>
+                </a:solidFill>
+              </a14:hiddenFill>
+            </a:ext>
+          </a:extLst>
+        </p:spPr>
+      </p:pic>
+      <p:pic>
+        <p:nvPicPr>
+          <p:cNvPr id="1030" name="Picture 6" descr="Analytics, olap, big data icon - Download on Iconfinder">
+            <a:extLst>
+              <a:ext uri="{FF2B5EF4-FFF2-40B4-BE49-F238E27FC236}">
+                <a16:creationId xmlns:a16="http://schemas.microsoft.com/office/drawing/2014/main" id="{5BB445C1-D1D3-684A-BB8A-85774096627A}"/>
+              </a:ext>
+            </a:extLst>
+          </p:cNvPr>
+          <p:cNvPicPr>
+            <a:picLocks noChangeAspect="1" noChangeArrowheads="1"/>
+          </p:cNvPicPr>
+          <p:nvPr/>
+        </p:nvPicPr>
+        <p:blipFill rotWithShape="1">
+          <a:blip r:embed="rId4" cstate="email">
+            <a:extLst>
+              <a:ext uri="{28A0092B-C50C-407E-A947-70E740481C1C}">
+                <a14:useLocalDpi xmlns:a14="http://schemas.microsoft.com/office/drawing/2010/main"/>
+              </a:ext>
+            </a:extLst>
+          </a:blip>
+          <a:srcRect l="12325" t="12774" r="12388" b="11796"/>
+          <a:stretch/>
+        </p:blipFill>
+        <p:spPr bwMode="auto">
+          <a:xfrm>
+            <a:off x="4048551" y="2040538"/>
+            <a:ext cx="2112335" cy="2116339"/>
+          </a:xfrm>
+          <a:prstGeom prst="rect">
+            <a:avLst/>
+          </a:prstGeom>
+          <a:noFill/>
+          <a:extLst>
+            <a:ext uri="{909E8E84-426E-40DD-AFC4-6F175D3DCCD1}">
+              <a14:hiddenFill xmlns:a14="http://schemas.microsoft.com/office/drawing/2010/main">
+                <a:solidFill>
+                  <a:srgbClr val="FFFFFF"/>
+                </a:solidFill>
+              </a14:hiddenFill>
+            </a:ext>
+          </a:extLst>
+        </p:spPr>
+      </p:pic>
+      <p:sp>
+        <p:nvSpPr>
+          <p:cNvPr id="5" name="Right Arrow 4">
+            <a:extLst>
+              <a:ext uri="{FF2B5EF4-FFF2-40B4-BE49-F238E27FC236}">
+                <a16:creationId xmlns:a16="http://schemas.microsoft.com/office/drawing/2014/main" id="{C9126FF6-C14E-7B4F-BF11-8F22787B6C46}"/>
+              </a:ext>
+            </a:extLst>
+          </p:cNvPr>
+          <p:cNvSpPr/>
+          <p:nvPr/>
+        </p:nvSpPr>
+        <p:spPr>
+          <a:xfrm>
+            <a:off x="2166352" y="2478690"/>
+            <a:ext cx="1406769" cy="1312252"/>
+          </a:xfrm>
+          <a:prstGeom prst="rightArrow">
+            <a:avLst/>
+          </a:prstGeom>
+          <a:solidFill>
+            <a:schemeClr val="accent1">
+              <a:lumMod val="20000"/>
+              <a:lumOff val="80000"/>
+            </a:schemeClr>
+          </a:solidFill>
+          <a:ln>
+            <a:solidFill>
+              <a:schemeClr val="accent1"/>
+            </a:solidFill>
+          </a:ln>
+        </p:spPr>
+        <p:style>
+          <a:lnRef idx="2">
+            <a:schemeClr val="accent1">
+              <a:shade val="50000"/>
+            </a:schemeClr>
+          </a:lnRef>
+          <a:fillRef idx="1">
+            <a:schemeClr val="accent1"/>
+          </a:fillRef>
+          <a:effectRef idx="0">
+            <a:schemeClr val="accent1"/>
+          </a:effectRef>
+          <a:fontRef idx="minor">
+            <a:schemeClr val="lt1"/>
+          </a:fontRef>
+        </p:style>
+        <p:txBody>
+          <a:bodyPr rtlCol="0" anchor="ctr"/>
+          <a:lstStyle/>
+          <a:p>
+            <a:pPr algn="ctr"/>
+            <a:endParaRPr lang="en-US"/>
+          </a:p>
+        </p:txBody>
+      </p:sp>
+      <p:sp>
+        <p:nvSpPr>
+          <p:cNvPr id="9" name="Right Arrow 8">
+            <a:extLst>
+              <a:ext uri="{FF2B5EF4-FFF2-40B4-BE49-F238E27FC236}">
+                <a16:creationId xmlns:a16="http://schemas.microsoft.com/office/drawing/2014/main" id="{15835FB6-081A-CB44-A9F4-C47DBE54889D}"/>
+              </a:ext>
+            </a:extLst>
+          </p:cNvPr>
+          <p:cNvSpPr/>
+          <p:nvPr/>
+        </p:nvSpPr>
+        <p:spPr>
+          <a:xfrm>
+            <a:off x="6903065" y="3338503"/>
+            <a:ext cx="1406769" cy="452439"/>
+          </a:xfrm>
+          <a:prstGeom prst="rightArrow">
+            <a:avLst/>
+          </a:prstGeom>
+          <a:solidFill>
+            <a:schemeClr val="accent1">
+              <a:lumMod val="20000"/>
+              <a:lumOff val="80000"/>
+            </a:schemeClr>
+          </a:solidFill>
+          <a:ln>
+            <a:solidFill>
+              <a:schemeClr val="accent1"/>
+            </a:solidFill>
+          </a:ln>
+        </p:spPr>
+        <p:style>
+          <a:lnRef idx="2">
+            <a:schemeClr val="accent1">
+              <a:shade val="50000"/>
+            </a:schemeClr>
+          </a:lnRef>
+          <a:fillRef idx="1">
+            <a:schemeClr val="accent1"/>
+          </a:fillRef>
+          <a:effectRef idx="0">
+            <a:schemeClr val="accent1"/>
+          </a:effectRef>
+          <a:fontRef idx="minor">
+            <a:schemeClr val="lt1"/>
+          </a:fontRef>
+        </p:style>
+        <p:txBody>
+          <a:bodyPr rtlCol="0" anchor="ctr"/>
+          <a:lstStyle/>
+          <a:p>
+            <a:pPr algn="ctr"/>
+            <a:endParaRPr lang="en-US"/>
+          </a:p>
+        </p:txBody>
+      </p:sp>
+      <p:sp>
+        <p:nvSpPr>
+          <p:cNvPr id="10" name="Right Arrow 9">
+            <a:extLst>
+              <a:ext uri="{FF2B5EF4-FFF2-40B4-BE49-F238E27FC236}">
+                <a16:creationId xmlns:a16="http://schemas.microsoft.com/office/drawing/2014/main" id="{24322037-4F54-9E4D-A0FB-F0F681C10D99}"/>
+              </a:ext>
+            </a:extLst>
+          </p:cNvPr>
+          <p:cNvSpPr/>
+          <p:nvPr/>
+        </p:nvSpPr>
+        <p:spPr>
+          <a:xfrm rot="10800000">
+            <a:off x="6677510" y="2552691"/>
+            <a:ext cx="1406769" cy="452439"/>
+          </a:xfrm>
+          <a:prstGeom prst="rightArrow">
+            <a:avLst/>
+          </a:prstGeom>
+          <a:solidFill>
+            <a:schemeClr val="accent1">
+              <a:lumMod val="20000"/>
+              <a:lumOff val="80000"/>
+            </a:schemeClr>
+          </a:solidFill>
+          <a:ln>
+            <a:solidFill>
+              <a:schemeClr val="accent1"/>
+            </a:solidFill>
+          </a:ln>
+        </p:spPr>
+        <p:style>
+          <a:lnRef idx="2">
+            <a:schemeClr val="accent1">
+              <a:shade val="50000"/>
+            </a:schemeClr>
+          </a:lnRef>
+          <a:fillRef idx="1">
+            <a:schemeClr val="accent1"/>
+          </a:fillRef>
+          <a:effectRef idx="0">
+            <a:schemeClr val="accent1"/>
+          </a:effectRef>
+          <a:fontRef idx="minor">
+            <a:schemeClr val="lt1"/>
+          </a:fontRef>
+        </p:style>
+        <p:txBody>
+          <a:bodyPr rtlCol="0" anchor="ctr"/>
+          <a:lstStyle/>
+          <a:p>
+            <a:pPr algn="ctr"/>
+            <a:endParaRPr lang="en-US"/>
+          </a:p>
+        </p:txBody>
+      </p:sp>
+      <p:sp>
+        <p:nvSpPr>
+          <p:cNvPr id="6" name="TextBox 5">
+            <a:extLst>
+              <a:ext uri="{FF2B5EF4-FFF2-40B4-BE49-F238E27FC236}">
+                <a16:creationId xmlns:a16="http://schemas.microsoft.com/office/drawing/2014/main" id="{853F1EDF-504A-2F45-8374-23559C7C26DD}"/>
+              </a:ext>
+            </a:extLst>
+          </p:cNvPr>
+          <p:cNvSpPr txBox="1"/>
+          <p:nvPr/>
+        </p:nvSpPr>
+        <p:spPr>
+          <a:xfrm>
+            <a:off x="7015145" y="2232447"/>
+            <a:ext cx="1069134" cy="369332"/>
+          </a:xfrm>
+          <a:prstGeom prst="rect">
+            <a:avLst/>
+          </a:prstGeom>
+          <a:noFill/>
+        </p:spPr>
+        <p:txBody>
+          <a:bodyPr wrap="square" rtlCol="0">
+            <a:spAutoFit/>
+          </a:bodyPr>
+          <a:lstStyle/>
+          <a:p>
+            <a:r>
+              <a:rPr lang="en-US" sz="1800" dirty="0"/>
+              <a:t>Queries</a:t>
+            </a:r>
+          </a:p>
+        </p:txBody>
+      </p:sp>
+      <p:sp>
+        <p:nvSpPr>
+          <p:cNvPr id="12" name="TextBox 11">
+            <a:extLst>
+              <a:ext uri="{FF2B5EF4-FFF2-40B4-BE49-F238E27FC236}">
+                <a16:creationId xmlns:a16="http://schemas.microsoft.com/office/drawing/2014/main" id="{3482BCAC-B9B4-F045-8EF9-1BC8FFB72315}"/>
+              </a:ext>
+            </a:extLst>
+          </p:cNvPr>
+          <p:cNvSpPr txBox="1"/>
+          <p:nvPr/>
+        </p:nvSpPr>
+        <p:spPr>
+          <a:xfrm>
+            <a:off x="6929211" y="3736694"/>
+            <a:ext cx="1069134" cy="369332"/>
+          </a:xfrm>
+          <a:prstGeom prst="rect">
+            <a:avLst/>
+          </a:prstGeom>
+          <a:noFill/>
+        </p:spPr>
+        <p:txBody>
+          <a:bodyPr wrap="square" rtlCol="0">
+            <a:spAutoFit/>
+          </a:bodyPr>
+          <a:lstStyle/>
+          <a:p>
+            <a:r>
+              <a:rPr lang="en-US" sz="1800" dirty="0"/>
+              <a:t>Results</a:t>
+            </a:r>
+          </a:p>
+        </p:txBody>
+      </p:sp>
+      <p:pic>
+        <p:nvPicPr>
+          <p:cNvPr id="1032" name="Picture 8" descr="Interactive Dashboards - Benefits">
+            <a:extLst>
+              <a:ext uri="{FF2B5EF4-FFF2-40B4-BE49-F238E27FC236}">
+                <a16:creationId xmlns:a16="http://schemas.microsoft.com/office/drawing/2014/main" id="{35987B55-3385-A049-8191-961CDB844671}"/>
+              </a:ext>
+            </a:extLst>
+          </p:cNvPr>
+          <p:cNvPicPr>
+            <a:picLocks noChangeAspect="1" noChangeArrowheads="1"/>
+          </p:cNvPicPr>
+          <p:nvPr/>
+        </p:nvPicPr>
+        <p:blipFill>
+          <a:blip r:embed="rId5" cstate="email">
+            <a:extLst>
+              <a:ext uri="{28A0092B-C50C-407E-A947-70E740481C1C}">
+                <a14:useLocalDpi xmlns:a14="http://schemas.microsoft.com/office/drawing/2010/main"/>
+              </a:ext>
+            </a:extLst>
+          </a:blip>
+          <a:srcRect/>
+          <a:stretch>
+            <a:fillRect/>
+          </a:stretch>
+        </p:blipFill>
+        <p:spPr bwMode="auto">
+          <a:xfrm>
+            <a:off x="8852604" y="2232447"/>
+            <a:ext cx="3253943" cy="1968772"/>
+          </a:xfrm>
+          <a:prstGeom prst="rect">
+            <a:avLst/>
+          </a:prstGeom>
+          <a:noFill/>
+          <a:extLst>
+            <a:ext uri="{909E8E84-426E-40DD-AFC4-6F175D3DCCD1}">
+              <a14:hiddenFill xmlns:a14="http://schemas.microsoft.com/office/drawing/2010/main">
+                <a:solidFill>
+                  <a:srgbClr val="FFFFFF"/>
+                </a:solidFill>
+              </a14:hiddenFill>
+            </a:ext>
+          </a:extLst>
+        </p:spPr>
+      </p:pic>
+      <p:sp>
+        <p:nvSpPr>
+          <p:cNvPr id="7" name="TextBox 6">
+            <a:extLst>
+              <a:ext uri="{FF2B5EF4-FFF2-40B4-BE49-F238E27FC236}">
+                <a16:creationId xmlns:a16="http://schemas.microsoft.com/office/drawing/2014/main" id="{455B5DC0-E23C-EC49-96AC-723901C51D49}"/>
+              </a:ext>
+            </a:extLst>
+          </p:cNvPr>
+          <p:cNvSpPr txBox="1"/>
+          <p:nvPr/>
+        </p:nvSpPr>
+        <p:spPr>
+          <a:xfrm>
+            <a:off x="3573121" y="4201922"/>
+            <a:ext cx="3104389" cy="1200329"/>
+          </a:xfrm>
+          <a:prstGeom prst="rect">
+            <a:avLst/>
+          </a:prstGeom>
+          <a:noFill/>
+        </p:spPr>
+        <p:txBody>
+          <a:bodyPr wrap="square" rtlCol="0">
+            <a:spAutoFit/>
+          </a:bodyPr>
+          <a:lstStyle/>
+          <a:p>
+            <a:pPr algn="ctr"/>
+            <a:r>
+              <a:rPr lang="en-US" sz="1800" b="1" dirty="0">
+                <a:solidFill>
+                  <a:srgbClr val="0070C0"/>
+                </a:solidFill>
+              </a:rPr>
+              <a:t>OLAP database </a:t>
+            </a:r>
+            <a:br>
+              <a:rPr lang="en-US" sz="1800" b="1" dirty="0">
+                <a:solidFill>
+                  <a:srgbClr val="0070C0"/>
+                </a:solidFill>
+              </a:rPr>
+            </a:br>
+            <a:r>
+              <a:rPr lang="en-US" sz="1800" b="1" dirty="0">
+                <a:solidFill>
+                  <a:srgbClr val="0070C0"/>
+                </a:solidFill>
+              </a:rPr>
+              <a:t>with columnar storage </a:t>
+            </a:r>
+            <a:br>
+              <a:rPr lang="en-US" sz="1800" dirty="0"/>
+            </a:br>
+            <a:r>
+              <a:rPr lang="en-US" sz="1800" dirty="0"/>
+              <a:t>for fast and flexible querying</a:t>
+            </a:r>
+            <a:br>
+              <a:rPr lang="en-US" sz="1800" dirty="0"/>
+            </a:br>
+            <a:r>
+              <a:rPr lang="en-US" sz="1800" dirty="0"/>
+              <a:t>(a.k.a. Analytical Store).</a:t>
+            </a:r>
+          </a:p>
+        </p:txBody>
+      </p:sp>
+      <p:sp>
+        <p:nvSpPr>
+          <p:cNvPr id="8" name="TextBox 7">
+            <a:extLst>
+              <a:ext uri="{FF2B5EF4-FFF2-40B4-BE49-F238E27FC236}">
+                <a16:creationId xmlns:a16="http://schemas.microsoft.com/office/drawing/2014/main" id="{D0EF4D67-6F3D-4740-AB35-D5180A5AB412}"/>
+              </a:ext>
+            </a:extLst>
+          </p:cNvPr>
+          <p:cNvSpPr txBox="1"/>
+          <p:nvPr/>
+        </p:nvSpPr>
+        <p:spPr>
+          <a:xfrm>
+            <a:off x="6889421" y="5967919"/>
+            <a:ext cx="5217126" cy="584775"/>
+          </a:xfrm>
+          <a:prstGeom prst="rect">
+            <a:avLst/>
+          </a:prstGeom>
+          <a:noFill/>
+        </p:spPr>
+        <p:txBody>
+          <a:bodyPr wrap="square" rtlCol="0">
+            <a:spAutoFit/>
+          </a:bodyPr>
+          <a:lstStyle/>
+          <a:p>
+            <a:r>
+              <a:rPr lang="en-US" sz="1800" dirty="0"/>
+              <a:t>Rise and Fall of the OLAP Cubes:</a:t>
+            </a:r>
+          </a:p>
+          <a:p>
+            <a:r>
+              <a:rPr lang="en-US" dirty="0">
+                <a:hlinkClick r:id="rId6"/>
+              </a:rPr>
+              <a:t>https://www.holistics.io/blog/the-rise-and-fall-of-the-olap-cube/</a:t>
+            </a:r>
+            <a:r>
+              <a:rPr lang="en-US" dirty="0"/>
+              <a:t> </a:t>
+            </a:r>
+          </a:p>
+        </p:txBody>
+      </p:sp>
+      <p:sp>
+        <p:nvSpPr>
+          <p:cNvPr id="16" name="TextBox 15">
+            <a:extLst>
+              <a:ext uri="{FF2B5EF4-FFF2-40B4-BE49-F238E27FC236}">
+                <a16:creationId xmlns:a16="http://schemas.microsoft.com/office/drawing/2014/main" id="{1F06A897-448E-FC4A-91E6-06E28F891253}"/>
+              </a:ext>
+            </a:extLst>
+          </p:cNvPr>
+          <p:cNvSpPr txBox="1"/>
+          <p:nvPr/>
+        </p:nvSpPr>
+        <p:spPr>
+          <a:xfrm>
+            <a:off x="9002158" y="4218285"/>
+            <a:ext cx="3104389" cy="923330"/>
+          </a:xfrm>
+          <a:prstGeom prst="rect">
+            <a:avLst/>
+          </a:prstGeom>
+          <a:noFill/>
+        </p:spPr>
+        <p:txBody>
+          <a:bodyPr wrap="square" rtlCol="0">
+            <a:spAutoFit/>
+          </a:bodyPr>
+          <a:lstStyle/>
+          <a:p>
+            <a:pPr algn="ctr"/>
+            <a:r>
+              <a:rPr lang="en-US" sz="1800" b="1" dirty="0">
+                <a:solidFill>
+                  <a:srgbClr val="0070C0"/>
+                </a:solidFill>
+              </a:rPr>
+              <a:t>Interactive</a:t>
+            </a:r>
+          </a:p>
+          <a:p>
+            <a:pPr algn="ctr"/>
+            <a:r>
+              <a:rPr lang="en-US" sz="1800" b="1" dirty="0">
+                <a:solidFill>
+                  <a:srgbClr val="0070C0"/>
+                </a:solidFill>
+              </a:rPr>
+              <a:t>Dashboards</a:t>
+            </a:r>
+          </a:p>
+          <a:p>
+            <a:pPr algn="ctr"/>
+            <a:r>
+              <a:rPr lang="en-US" sz="1800" b="1" dirty="0">
+                <a:solidFill>
+                  <a:srgbClr val="0070C0"/>
+                </a:solidFill>
+              </a:rPr>
+              <a:t>(Power BI, Tableau, etc.)</a:t>
+            </a:r>
+            <a:endParaRPr lang="en-US" sz="1800" dirty="0"/>
+          </a:p>
+        </p:txBody>
+      </p:sp>
+    </p:spTree>
+    <p:extLst>
+      <p:ext uri="{BB962C8B-B14F-4D97-AF65-F5344CB8AC3E}">
+        <p14:creationId xmlns:p14="http://schemas.microsoft.com/office/powerpoint/2010/main" val="906584189"/>
+      </p:ext>
+    </p:extLst>
+  </p:cSld>
+  <p:clrMapOvr>
+    <a:masterClrMapping/>
+  </p:clrMapOvr>
+</p:sld>
+</file>
+
+<file path=ppt/slides/slide6.xml><?xml version="1.0" encoding="utf-8"?>
+<p:sld xmlns:a="http://schemas.openxmlformats.org/drawingml/2006/main" xmlns:r="http://schemas.openxmlformats.org/officeDocument/2006/relationships" xmlns:p="http://schemas.openxmlformats.org/presentationml/2006/main">
+  <p:cSld>
+    <p:spTree>
+      <p:nvGrpSpPr>
         <p:cNvPr id="1" name="Shape 109"/>
         <p:cNvGrpSpPr/>
         <p:nvPr/>
@@ -20021,7 +20789,49 @@
                 <a:cs typeface="Calibri"/>
                 <a:sym typeface="Calibri"/>
               </a:rPr>
-              <a:t>Databases can be optimized for OLTP (On-Line Transactional Processing) or OLAP (On-Line Analytical Processing). For analytics we need OLAP databases.</a:t>
+              <a:t>Databases can be optimized for </a:t>
+            </a:r>
+            <a:r>
+              <a:rPr lang="en-US" b="1" dirty="0">
+                <a:solidFill>
+                  <a:srgbClr val="0070C0"/>
+                </a:solidFill>
+                <a:latin typeface="Calibri"/>
+                <a:ea typeface="Calibri"/>
+                <a:cs typeface="Calibri"/>
+                <a:sym typeface="Calibri"/>
+              </a:rPr>
+              <a:t>OLTP (On-Line Transactional Processing)</a:t>
+            </a:r>
+            <a:r>
+              <a:rPr lang="en-US" dirty="0">
+                <a:latin typeface="Calibri"/>
+                <a:ea typeface="Calibri"/>
+                <a:cs typeface="Calibri"/>
+                <a:sym typeface="Calibri"/>
+              </a:rPr>
+              <a:t> or </a:t>
+            </a:r>
+            <a:r>
+              <a:rPr lang="en-US" b="1" dirty="0">
+                <a:solidFill>
+                  <a:srgbClr val="0070C0"/>
+                </a:solidFill>
+                <a:latin typeface="Calibri"/>
+                <a:ea typeface="Calibri"/>
+                <a:cs typeface="Calibri"/>
+                <a:sym typeface="Calibri"/>
+              </a:rPr>
+              <a:t>OLAP (On-Line Analytical Processing)</a:t>
+            </a:r>
+            <a:r>
+              <a:rPr lang="en-US" dirty="0">
+                <a:latin typeface="Calibri"/>
+                <a:ea typeface="Calibri"/>
+                <a:cs typeface="Calibri"/>
+                <a:sym typeface="Calibri"/>
+              </a:rPr>
+              <a:t>. For analytics we need OLAP databases.</a:t>
             </a:r>
             <a:endParaRPr dirty="0">
               <a:latin typeface="Calibri"/>
@@ -20174,16 +20984,7 @@
                 <a:cs typeface="Calibri"/>
                 <a:sym typeface="Calibri"/>
               </a:rPr>
-              <a:t> - https://</a:t>
-            </a:r>
-            <a:r>
-              <a:rPr lang="en-US" dirty="0" err="1">
-                <a:latin typeface="Calibri"/>
-                <a:ea typeface="Calibri"/>
-                <a:cs typeface="Calibri"/>
-                <a:sym typeface="Calibri"/>
-              </a:rPr>
-              <a:t>www.youtube.com</a:t>
+              <a:t> - </a:t>
             </a:r>
             <a:r>
               <a:rPr lang="en-US" dirty="0">
@@ -20191,17 +20992,9 @@
                 <a:ea typeface="Calibri"/>
                 <a:cs typeface="Calibri"/>
                 <a:sym typeface="Calibri"/>
-              </a:rPr>
-              <a:t>/</a:t>
-            </a:r>
-            <a:r>
-              <a:rPr lang="en-US" dirty="0" err="1">
-                <a:latin typeface="Calibri"/>
-                <a:ea typeface="Calibri"/>
-                <a:cs typeface="Calibri"/>
-                <a:sym typeface="Calibri"/>
-              </a:rPr>
-              <a:t>watch?v</a:t>
+                <a:hlinkClick r:id="rId3"/>
+              </a:rPr>
+              <a:t>https://www.youtube.com/watch?v=vPN8_PCsJm4</a:t>
             </a:r>
             <a:r>
               <a:rPr lang="en-US" dirty="0">
@@ -20210,7 +21003,7 @@
                 <a:cs typeface="Calibri"/>
                 <a:sym typeface="Calibri"/>
               </a:rPr>
-              <a:t>=vPN8_PCsJm4</a:t>
+              <a:t> </a:t>
             </a:r>
             <a:endParaRPr dirty="0">
               <a:latin typeface="Calibri"/>
@@ -20520,16 +21313,7 @@
                 <a:cs typeface="Calibri"/>
                 <a:sym typeface="Calibri"/>
               </a:rPr>
-              <a:t>- https://</a:t>
-            </a:r>
-            <a:r>
-              <a:rPr lang="en-US" dirty="0" err="1">
-                <a:latin typeface="Calibri"/>
-                <a:ea typeface="Calibri"/>
-                <a:cs typeface="Calibri"/>
-                <a:sym typeface="Calibri"/>
-              </a:rPr>
-              <a:t>azure.microsoft.com</a:t>
+              <a:t>- </a:t>
             </a:r>
             <a:r>
               <a:rPr lang="en-US" dirty="0">
@@ -20537,17 +21321,9 @@
                 <a:ea typeface="Calibri"/>
                 <a:cs typeface="Calibri"/>
                 <a:sym typeface="Calibri"/>
-              </a:rPr>
-              <a:t>/</a:t>
-            </a:r>
-            <a:r>
-              <a:rPr lang="en-US" dirty="0" err="1">
-                <a:latin typeface="Calibri"/>
-                <a:ea typeface="Calibri"/>
-                <a:cs typeface="Calibri"/>
-                <a:sym typeface="Calibri"/>
-              </a:rPr>
-              <a:t>en</a:t>
+                <a:hlinkClick r:id="rId4"/>
+              </a:rPr>
+              <a:t>https://azure.microsoft.com/en-us/services/sql-data-warehouse/</a:t>
             </a:r>
             <a:r>
               <a:rPr lang="en-US" dirty="0">
@@ -20556,25 +21332,7 @@
                 <a:cs typeface="Calibri"/>
                 <a:sym typeface="Calibri"/>
               </a:rPr>
-              <a:t>-us/services/</a:t>
-            </a:r>
-            <a:r>
-              <a:rPr lang="en-US" dirty="0" err="1">
-                <a:latin typeface="Calibri"/>
-                <a:ea typeface="Calibri"/>
-                <a:cs typeface="Calibri"/>
-                <a:sym typeface="Calibri"/>
-              </a:rPr>
-              <a:t>sql</a:t>
-            </a:r>
-            <a:r>
-              <a:rPr lang="en-US" dirty="0">
-                <a:latin typeface="Calibri"/>
-                <a:ea typeface="Calibri"/>
-                <a:cs typeface="Calibri"/>
-                <a:sym typeface="Calibri"/>
-              </a:rPr>
-              <a:t>-data-warehouse/</a:t>
+              <a:t> </a:t>
             </a:r>
           </a:p>
           <a:p>
@@ -20643,7 +21401,7 @@
             </a:r>
             <a:r>
               <a:rPr lang="en-US" dirty="0">
-                <a:hlinkClick r:id="rId3"/>
+                <a:hlinkClick r:id="rId5"/>
               </a:rPr>
               <a:t>https://en.wikipedia.org/wiki/Microsoft_Analysis_Services</a:t>
             </a:r>
@@ -20715,23 +21473,27 @@
                 <a:cs typeface="Calibri"/>
                 <a:sym typeface="Calibri"/>
               </a:rPr>
-              <a:t>- https://</a:t>
-            </a:r>
-            <a:r>
-              <a:rPr lang="en-US" dirty="0" err="1">
-                <a:latin typeface="Calibri"/>
-                <a:ea typeface="Calibri"/>
-                <a:cs typeface="Calibri"/>
-                <a:sym typeface="Calibri"/>
-              </a:rPr>
-              <a:t>powerbi.microsoft.com</a:t>
-            </a:r>
-            <a:endParaRPr lang="en-US" dirty="0">
-              <a:latin typeface="Calibri"/>
-              <a:ea typeface="Calibri"/>
-              <a:cs typeface="Calibri"/>
-              <a:sym typeface="Calibri"/>
-            </a:endParaRPr>
+              <a:t>- </a:t>
+            </a:r>
+            <a:r>
+              <a:rPr lang="en-US" dirty="0">
+                <a:latin typeface="Calibri"/>
+                <a:ea typeface="Calibri"/>
+                <a:cs typeface="Calibri"/>
+                <a:sym typeface="Calibri"/>
+                <a:hlinkClick r:id="rId6"/>
+              </a:rPr>
+              <a:t>https://powerbi.microsoft.com</a:t>
+            </a:r>
+            <a:r>
+              <a:rPr lang="en-US" dirty="0">
+                <a:latin typeface="Calibri"/>
+                <a:ea typeface="Calibri"/>
+                <a:cs typeface="Calibri"/>
+                <a:sym typeface="Calibri"/>
+              </a:rPr>
+              <a:t> </a:t>
+            </a:r>
           </a:p>
           <a:p>
             <a:pPr lvl="0">
@@ -20796,16 +21558,7 @@
                 <a:cs typeface="Calibri"/>
                 <a:sym typeface="Calibri"/>
               </a:rPr>
-              <a:t>- https://</a:t>
-            </a:r>
-            <a:r>
-              <a:rPr lang="en-US" dirty="0" err="1">
-                <a:latin typeface="Calibri"/>
-                <a:ea typeface="Calibri"/>
-                <a:cs typeface="Calibri"/>
-                <a:sym typeface="Calibri"/>
-              </a:rPr>
-              <a:t>www.youtube.com</a:t>
+              <a:t>- </a:t>
             </a:r>
             <a:r>
               <a:rPr lang="en-US" dirty="0">
@@ -20813,17 +21566,9 @@
                 <a:ea typeface="Calibri"/>
                 <a:cs typeface="Calibri"/>
                 <a:sym typeface="Calibri"/>
-              </a:rPr>
-              <a:t>/</a:t>
-            </a:r>
-            <a:r>
-              <a:rPr lang="en-US" dirty="0" err="1">
-                <a:latin typeface="Calibri"/>
-                <a:ea typeface="Calibri"/>
-                <a:cs typeface="Calibri"/>
-                <a:sym typeface="Calibri"/>
-              </a:rPr>
-              <a:t>watch?v</a:t>
+                <a:hlinkClick r:id="rId7"/>
+              </a:rPr>
+              <a:t>https://www.youtube.com/watch?v=mQyFp2MSl-s</a:t>
             </a:r>
             <a:r>
               <a:rPr lang="en-US" dirty="0">
@@ -20832,7 +21577,7 @@
                 <a:cs typeface="Calibri"/>
                 <a:sym typeface="Calibri"/>
               </a:rPr>
-              <a:t>=mQyFp2MSl-s</a:t>
+              <a:t> </a:t>
             </a:r>
           </a:p>
           <a:p>
@@ -20913,16 +21658,7 @@
                 <a:cs typeface="Calibri"/>
                 <a:sym typeface="Calibri"/>
               </a:rPr>
-              <a:t>- https://</a:t>
-            </a:r>
-            <a:r>
-              <a:rPr lang="en-US" dirty="0" err="1">
-                <a:latin typeface="Calibri"/>
-                <a:ea typeface="Calibri"/>
-                <a:cs typeface="Calibri"/>
-                <a:sym typeface="Calibri"/>
-              </a:rPr>
-              <a:t>www.youtube.com</a:t>
+              <a:t>- </a:t>
             </a:r>
             <a:r>
               <a:rPr lang="en-US" dirty="0">
@@ -20930,17 +21666,9 @@
                 <a:ea typeface="Calibri"/>
                 <a:cs typeface="Calibri"/>
                 <a:sym typeface="Calibri"/>
-              </a:rPr>
-              <a:t>/</a:t>
-            </a:r>
-            <a:r>
-              <a:rPr lang="en-US" dirty="0" err="1">
-                <a:latin typeface="Calibri"/>
-                <a:ea typeface="Calibri"/>
-                <a:cs typeface="Calibri"/>
-                <a:sym typeface="Calibri"/>
-              </a:rPr>
-              <a:t>watch?v</a:t>
+                <a:hlinkClick r:id="rId8"/>
+              </a:rPr>
+              <a:t>https://www.youtube.com/watch?v=7XliLU7ZC_s</a:t>
             </a:r>
             <a:r>
               <a:rPr lang="en-US" dirty="0">
@@ -20949,7 +21677,7 @@
                 <a:cs typeface="Calibri"/>
                 <a:sym typeface="Calibri"/>
               </a:rPr>
-              <a:t>=7XliLU7ZC_s</a:t>
+              <a:t> </a:t>
             </a:r>
             <a:endParaRPr dirty="0">
               <a:latin typeface="Calibri"/>
@@ -21246,870 +21974,6 @@
               <a:t>- you can enjoy lower prices</a:t>
             </a:r>
             <a:endParaRPr dirty="0">
-              <a:latin typeface="Calibri"/>
-              <a:ea typeface="Calibri"/>
-              <a:cs typeface="Calibri"/>
-              <a:sym typeface="Calibri"/>
-            </a:endParaRPr>
-          </a:p>
-        </p:txBody>
-      </p:sp>
-    </p:spTree>
-  </p:cSld>
-  <p:clrMapOvr>
-    <a:masterClrMapping/>
-  </p:clrMapOvr>
-</p:sld>
-</file>
-
-<file path=ppt/slides/slide6.xml><?xml version="1.0" encoding="utf-8"?>
-<p:sld xmlns:a="http://schemas.openxmlformats.org/drawingml/2006/main" xmlns:r="http://schemas.openxmlformats.org/officeDocument/2006/relationships" xmlns:p="http://schemas.openxmlformats.org/presentationml/2006/main">
-  <p:cSld>
-    <p:spTree>
-      <p:nvGrpSpPr>
-        <p:cNvPr id="1" name="Shape 116"/>
-        <p:cNvGrpSpPr/>
-        <p:nvPr/>
-      </p:nvGrpSpPr>
-      <p:grpSpPr>
-        <a:xfrm>
-          <a:off x="0" y="0"/>
-          <a:ext cx="0" cy="0"/>
-          <a:chOff x="0" y="0"/>
-          <a:chExt cx="0" cy="0"/>
-        </a:xfrm>
-      </p:grpSpPr>
-      <p:sp>
-        <p:nvSpPr>
-          <p:cNvPr id="117" name="Google Shape;117;p17"/>
-          <p:cNvSpPr txBox="1"/>
-          <p:nvPr/>
-        </p:nvSpPr>
-        <p:spPr>
-          <a:xfrm>
-            <a:off x="0" y="0"/>
-            <a:ext cx="6770700" cy="1988400"/>
-          </a:xfrm>
-          <a:prstGeom prst="rect">
-            <a:avLst/>
-          </a:prstGeom>
-          <a:noFill/>
-          <a:ln>
-            <a:noFill/>
-          </a:ln>
-        </p:spPr>
-        <p:txBody>
-          <a:bodyPr spcFirstLastPara="1" wrap="square" lIns="91425" tIns="91425" rIns="91425" bIns="91425" anchor="t" anchorCtr="0">
-            <a:noAutofit/>
-          </a:bodyPr>
-          <a:lstStyle/>
-          <a:p>
-            <a:pPr marL="0" lvl="0" indent="0" algn="l" rtl="0">
-              <a:spcBef>
-                <a:spcPts val="0"/>
-              </a:spcBef>
-              <a:spcAft>
-                <a:spcPts val="0"/>
-              </a:spcAft>
-              <a:buNone/>
-            </a:pPr>
-            <a:r>
-              <a:rPr lang="en-US" sz="2400" b="1" dirty="0">
-                <a:latin typeface="Calibri"/>
-                <a:ea typeface="Calibri"/>
-                <a:cs typeface="Calibri"/>
-                <a:sym typeface="Calibri"/>
-              </a:rPr>
-              <a:t>About Einstein Analytics (EA):</a:t>
-            </a:r>
-            <a:endParaRPr dirty="0">
-              <a:latin typeface="Calibri"/>
-              <a:ea typeface="Calibri"/>
-              <a:cs typeface="Calibri"/>
-              <a:sym typeface="Calibri"/>
-            </a:endParaRPr>
-          </a:p>
-          <a:p>
-            <a:pPr marL="0" lvl="0" indent="0" algn="l" rtl="0">
-              <a:spcBef>
-                <a:spcPts val="0"/>
-              </a:spcBef>
-              <a:spcAft>
-                <a:spcPts val="0"/>
-              </a:spcAft>
-              <a:buNone/>
-            </a:pPr>
-            <a:r>
-              <a:rPr lang="en-US" dirty="0">
-                <a:latin typeface="Calibri"/>
-                <a:ea typeface="Calibri"/>
-                <a:cs typeface="Calibri"/>
-                <a:sym typeface="Calibri"/>
-              </a:rPr>
-              <a:t>EA stores data not in regular SQL database, but in files and so called "inverted indexes" (II).</a:t>
-            </a:r>
-            <a:endParaRPr dirty="0">
-              <a:latin typeface="Calibri"/>
-              <a:ea typeface="Calibri"/>
-              <a:cs typeface="Calibri"/>
-              <a:sym typeface="Calibri"/>
-            </a:endParaRPr>
-          </a:p>
-          <a:p>
-            <a:pPr marL="0" lvl="0" indent="0" algn="l" rtl="0">
-              <a:spcBef>
-                <a:spcPts val="0"/>
-              </a:spcBef>
-              <a:spcAft>
-                <a:spcPts val="0"/>
-              </a:spcAft>
-              <a:buNone/>
-            </a:pPr>
-            <a:r>
-              <a:rPr lang="en-US" dirty="0">
-                <a:latin typeface="Calibri"/>
-                <a:ea typeface="Calibri"/>
-                <a:cs typeface="Calibri"/>
-                <a:sym typeface="Calibri"/>
-              </a:rPr>
-              <a:t>The motivation for selecting this technology was to have fast interactive data access.</a:t>
-            </a:r>
-            <a:endParaRPr dirty="0">
-              <a:latin typeface="Calibri"/>
-              <a:ea typeface="Calibri"/>
-              <a:cs typeface="Calibri"/>
-              <a:sym typeface="Calibri"/>
-            </a:endParaRPr>
-          </a:p>
-          <a:p>
-            <a:pPr marL="0" lvl="0" indent="0" algn="l" rtl="0">
-              <a:spcBef>
-                <a:spcPts val="0"/>
-              </a:spcBef>
-              <a:spcAft>
-                <a:spcPts val="0"/>
-              </a:spcAft>
-              <a:buNone/>
-            </a:pPr>
-            <a:r>
-              <a:rPr lang="en-US" dirty="0">
-                <a:latin typeface="Calibri"/>
-                <a:ea typeface="Calibri"/>
-                <a:cs typeface="Calibri"/>
-                <a:sym typeface="Calibri"/>
-              </a:rPr>
-              <a:t>The price to pay - the slowness of creating these "inverted indexes".</a:t>
-            </a:r>
-            <a:endParaRPr dirty="0">
-              <a:latin typeface="Calibri"/>
-              <a:ea typeface="Calibri"/>
-              <a:cs typeface="Calibri"/>
-              <a:sym typeface="Calibri"/>
-            </a:endParaRPr>
-          </a:p>
-          <a:p>
-            <a:pPr marL="0" lvl="0" indent="0" algn="l" rtl="0">
-              <a:spcBef>
-                <a:spcPts val="0"/>
-              </a:spcBef>
-              <a:spcAft>
-                <a:spcPts val="0"/>
-              </a:spcAft>
-              <a:buNone/>
-            </a:pPr>
-            <a:r>
-              <a:rPr lang="en-US" dirty="0">
-                <a:latin typeface="Calibri"/>
-                <a:ea typeface="Calibri"/>
-                <a:cs typeface="Calibri"/>
-                <a:sym typeface="Calibri"/>
-              </a:rPr>
-              <a:t>Every time you add data - you need to rebuild the whole index.</a:t>
-            </a:r>
-            <a:endParaRPr dirty="0">
-              <a:latin typeface="Calibri"/>
-              <a:ea typeface="Calibri"/>
-              <a:cs typeface="Calibri"/>
-              <a:sym typeface="Calibri"/>
-            </a:endParaRPr>
-          </a:p>
-          <a:p>
-            <a:pPr marL="0" lvl="0" indent="0" algn="l" rtl="0">
-              <a:spcBef>
-                <a:spcPts val="0"/>
-              </a:spcBef>
-              <a:spcAft>
-                <a:spcPts val="0"/>
-              </a:spcAft>
-              <a:buNone/>
-            </a:pPr>
-            <a:r>
-              <a:rPr lang="en-US" dirty="0">
-                <a:latin typeface="Calibri"/>
-                <a:ea typeface="Calibri"/>
-                <a:cs typeface="Calibri"/>
-                <a:sym typeface="Calibri"/>
-              </a:rPr>
-              <a:t>This article gives a nice explanation of what is II:</a:t>
-            </a:r>
-            <a:endParaRPr dirty="0">
-              <a:latin typeface="Calibri"/>
-              <a:ea typeface="Calibri"/>
-              <a:cs typeface="Calibri"/>
-              <a:sym typeface="Calibri"/>
-            </a:endParaRPr>
-          </a:p>
-          <a:p>
-            <a:pPr marL="0" lvl="0" indent="0" algn="l" rtl="0">
-              <a:spcBef>
-                <a:spcPts val="0"/>
-              </a:spcBef>
-              <a:spcAft>
-                <a:spcPts val="0"/>
-              </a:spcAft>
-              <a:buNone/>
-            </a:pPr>
-            <a:r>
-              <a:rPr lang="en-US" dirty="0">
-                <a:latin typeface="Calibri"/>
-                <a:ea typeface="Calibri"/>
-                <a:cs typeface="Calibri"/>
-                <a:sym typeface="Calibri"/>
-              </a:rPr>
-              <a:t> - https://</a:t>
-            </a:r>
-            <a:r>
-              <a:rPr lang="en-US" dirty="0" err="1">
-                <a:latin typeface="Calibri"/>
-                <a:ea typeface="Calibri"/>
-                <a:cs typeface="Calibri"/>
-                <a:sym typeface="Calibri"/>
-              </a:rPr>
-              <a:t>www.eternussolutions.com</a:t>
-            </a:r>
-            <a:r>
-              <a:rPr lang="en-US" dirty="0">
-                <a:latin typeface="Calibri"/>
-                <a:ea typeface="Calibri"/>
-                <a:cs typeface="Calibri"/>
-                <a:sym typeface="Calibri"/>
-              </a:rPr>
-              <a:t>/2016/11/13/10-things-love-wave-analytics/</a:t>
-            </a:r>
-            <a:endParaRPr dirty="0">
-              <a:latin typeface="Calibri"/>
-              <a:ea typeface="Calibri"/>
-              <a:cs typeface="Calibri"/>
-              <a:sym typeface="Calibri"/>
-            </a:endParaRPr>
-          </a:p>
-          <a:p>
-            <a:pPr marL="0" lvl="0" indent="0" algn="l" rtl="0">
-              <a:spcBef>
-                <a:spcPts val="0"/>
-              </a:spcBef>
-              <a:spcAft>
-                <a:spcPts val="0"/>
-              </a:spcAft>
-              <a:buNone/>
-            </a:pPr>
-            <a:r>
-              <a:rPr lang="en-US" dirty="0">
-                <a:latin typeface="Calibri"/>
-                <a:ea typeface="Calibri"/>
-                <a:cs typeface="Calibri"/>
-                <a:sym typeface="Calibri"/>
-              </a:rPr>
-              <a:t>And here is a picture showing the data - and its inverted index.</a:t>
-            </a:r>
-            <a:endParaRPr dirty="0">
-              <a:latin typeface="Calibri"/>
-              <a:ea typeface="Calibri"/>
-              <a:cs typeface="Calibri"/>
-              <a:sym typeface="Calibri"/>
-            </a:endParaRPr>
-          </a:p>
-        </p:txBody>
-      </p:sp>
-      <p:pic>
-        <p:nvPicPr>
-          <p:cNvPr id="118" name="Google Shape;118;p17"/>
-          <p:cNvPicPr preferRelativeResize="0"/>
-          <p:nvPr/>
-        </p:nvPicPr>
-        <p:blipFill>
-          <a:blip r:embed="rId3">
-            <a:alphaModFix/>
-          </a:blip>
-          <a:stretch>
-            <a:fillRect/>
-          </a:stretch>
-        </p:blipFill>
-        <p:spPr>
-          <a:xfrm>
-            <a:off x="311100" y="1988388"/>
-            <a:ext cx="6096000" cy="2752725"/>
-          </a:xfrm>
-          <a:prstGeom prst="rect">
-            <a:avLst/>
-          </a:prstGeom>
-          <a:noFill/>
-          <a:ln>
-            <a:noFill/>
-          </a:ln>
-        </p:spPr>
-      </p:pic>
-      <p:sp>
-        <p:nvSpPr>
-          <p:cNvPr id="119" name="Google Shape;119;p17"/>
-          <p:cNvSpPr txBox="1"/>
-          <p:nvPr/>
-        </p:nvSpPr>
-        <p:spPr>
-          <a:xfrm>
-            <a:off x="7207450" y="108700"/>
-            <a:ext cx="4911600" cy="4704600"/>
-          </a:xfrm>
-          <a:prstGeom prst="rect">
-            <a:avLst/>
-          </a:prstGeom>
-          <a:noFill/>
-          <a:ln>
-            <a:noFill/>
-          </a:ln>
-        </p:spPr>
-        <p:txBody>
-          <a:bodyPr spcFirstLastPara="1" wrap="square" lIns="91425" tIns="91425" rIns="91425" bIns="91425" anchor="t" anchorCtr="0">
-            <a:noAutofit/>
-          </a:bodyPr>
-          <a:lstStyle/>
-          <a:p>
-            <a:pPr marL="0" lvl="0" indent="0" algn="l" rtl="0">
-              <a:spcBef>
-                <a:spcPts val="0"/>
-              </a:spcBef>
-              <a:spcAft>
-                <a:spcPts val="0"/>
-              </a:spcAft>
-              <a:buNone/>
-            </a:pPr>
-            <a:r>
-              <a:rPr lang="en-US" dirty="0">
-                <a:latin typeface="Calibri"/>
-                <a:ea typeface="Calibri"/>
-                <a:cs typeface="Calibri"/>
-                <a:sym typeface="Calibri"/>
-              </a:rPr>
-              <a:t>I've first worked with an SQL database with compressed bitmap indexes in 2001-2002. The database was called "Sybase IQ".</a:t>
-            </a:r>
-            <a:endParaRPr dirty="0">
-              <a:latin typeface="Calibri"/>
-              <a:ea typeface="Calibri"/>
-              <a:cs typeface="Calibri"/>
-              <a:sym typeface="Calibri"/>
-            </a:endParaRPr>
-          </a:p>
-          <a:p>
-            <a:pPr marL="0" lvl="0" indent="0" algn="l" rtl="0">
-              <a:spcBef>
-                <a:spcPts val="0"/>
-              </a:spcBef>
-              <a:spcAft>
-                <a:spcPts val="0"/>
-              </a:spcAft>
-              <a:buNone/>
-            </a:pPr>
-            <a:r>
-              <a:rPr lang="en-US" dirty="0">
-                <a:latin typeface="Calibri"/>
-                <a:ea typeface="Calibri"/>
-                <a:cs typeface="Calibri"/>
-                <a:sym typeface="Calibri"/>
-              </a:rPr>
-              <a:t>It was an SQL database for doing analytics (as opposed to transactional processing).</a:t>
-            </a:r>
-            <a:endParaRPr dirty="0">
-              <a:latin typeface="Calibri"/>
-              <a:ea typeface="Calibri"/>
-              <a:cs typeface="Calibri"/>
-              <a:sym typeface="Calibri"/>
-            </a:endParaRPr>
-          </a:p>
-          <a:p>
-            <a:pPr marL="0" lvl="0" indent="0" algn="l" rtl="0">
-              <a:spcBef>
-                <a:spcPts val="0"/>
-              </a:spcBef>
-              <a:spcAft>
-                <a:spcPts val="0"/>
-              </a:spcAft>
-              <a:buNone/>
-            </a:pPr>
-            <a:endParaRPr dirty="0">
-              <a:latin typeface="Calibri"/>
-              <a:ea typeface="Calibri"/>
-              <a:cs typeface="Calibri"/>
-              <a:sym typeface="Calibri"/>
-            </a:endParaRPr>
-          </a:p>
-          <a:p>
-            <a:pPr marL="0" lvl="0" indent="0" algn="l" rtl="0">
-              <a:spcBef>
-                <a:spcPts val="0"/>
-              </a:spcBef>
-              <a:spcAft>
-                <a:spcPts val="0"/>
-              </a:spcAft>
-              <a:buNone/>
-            </a:pPr>
-            <a:r>
-              <a:rPr lang="en-US" dirty="0">
-                <a:latin typeface="Calibri"/>
-                <a:ea typeface="Calibri"/>
-                <a:cs typeface="Calibri"/>
-                <a:sym typeface="Calibri"/>
-              </a:rPr>
-              <a:t>Since then most SQL database vendors have adopted this "columnar" indexing. They switched from row-oriented storage and indexing to compressed column-oriented storage. </a:t>
-            </a:r>
-            <a:endParaRPr dirty="0">
-              <a:latin typeface="Calibri"/>
-              <a:ea typeface="Calibri"/>
-              <a:cs typeface="Calibri"/>
-              <a:sym typeface="Calibri"/>
-            </a:endParaRPr>
-          </a:p>
-          <a:p>
-            <a:pPr marL="0" lvl="0" indent="0" algn="l" rtl="0">
-              <a:spcBef>
-                <a:spcPts val="0"/>
-              </a:spcBef>
-              <a:spcAft>
-                <a:spcPts val="0"/>
-              </a:spcAft>
-              <a:buNone/>
-            </a:pPr>
-            <a:r>
-              <a:rPr lang="en-US" dirty="0">
-                <a:latin typeface="Calibri"/>
-                <a:ea typeface="Calibri"/>
-                <a:cs typeface="Calibri"/>
-                <a:sym typeface="Calibri"/>
-              </a:rPr>
-              <a:t>This is basically equivalent to the "Inverted Index" idea.</a:t>
-            </a:r>
-            <a:endParaRPr dirty="0">
-              <a:latin typeface="Calibri"/>
-              <a:ea typeface="Calibri"/>
-              <a:cs typeface="Calibri"/>
-              <a:sym typeface="Calibri"/>
-            </a:endParaRPr>
-          </a:p>
-          <a:p>
-            <a:pPr marL="0" lvl="0" indent="0" algn="l" rtl="0">
-              <a:spcBef>
-                <a:spcPts val="0"/>
-              </a:spcBef>
-              <a:spcAft>
-                <a:spcPts val="0"/>
-              </a:spcAft>
-              <a:buNone/>
-            </a:pPr>
-            <a:endParaRPr dirty="0">
-              <a:latin typeface="Calibri"/>
-              <a:ea typeface="Calibri"/>
-              <a:cs typeface="Calibri"/>
-              <a:sym typeface="Calibri"/>
-            </a:endParaRPr>
-          </a:p>
-          <a:p>
-            <a:pPr marL="0" lvl="0" indent="0" algn="l" rtl="0">
-              <a:spcBef>
-                <a:spcPts val="0"/>
-              </a:spcBef>
-              <a:spcAft>
-                <a:spcPts val="0"/>
-              </a:spcAft>
-              <a:buNone/>
-            </a:pPr>
-            <a:r>
-              <a:rPr lang="en-US" dirty="0">
-                <a:latin typeface="Calibri"/>
-                <a:ea typeface="Calibri"/>
-                <a:cs typeface="Calibri"/>
-                <a:sym typeface="Calibri"/>
-              </a:rPr>
-              <a:t>Modern SQL databases can provide performance much faster than EA. You just need to select an implementation with appropriate characteristics.</a:t>
-            </a:r>
-            <a:endParaRPr dirty="0">
-              <a:latin typeface="Calibri"/>
-              <a:ea typeface="Calibri"/>
-              <a:cs typeface="Calibri"/>
-              <a:sym typeface="Calibri"/>
-            </a:endParaRPr>
-          </a:p>
-          <a:p>
-            <a:pPr marL="0" lvl="0" indent="0" algn="l" rtl="0">
-              <a:spcBef>
-                <a:spcPts val="0"/>
-              </a:spcBef>
-              <a:spcAft>
-                <a:spcPts val="0"/>
-              </a:spcAft>
-              <a:buNone/>
-            </a:pPr>
-            <a:endParaRPr dirty="0">
-              <a:latin typeface="Calibri"/>
-              <a:ea typeface="Calibri"/>
-              <a:cs typeface="Calibri"/>
-              <a:sym typeface="Calibri"/>
-            </a:endParaRPr>
-          </a:p>
-          <a:p>
-            <a:pPr marL="0" lvl="0" indent="0" algn="l" rtl="0">
-              <a:spcBef>
-                <a:spcPts val="0"/>
-              </a:spcBef>
-              <a:spcAft>
-                <a:spcPts val="0"/>
-              </a:spcAft>
-              <a:buNone/>
-            </a:pPr>
-            <a:r>
-              <a:rPr lang="en-US" dirty="0">
-                <a:latin typeface="Calibri"/>
-                <a:ea typeface="Calibri"/>
-                <a:cs typeface="Calibri"/>
-                <a:sym typeface="Calibri"/>
-              </a:rPr>
-              <a:t>For example, on AWS (or other clouds) you can select a GPU-based SQL database on a server with terabytes of memory.</a:t>
-            </a:r>
-            <a:endParaRPr dirty="0">
-              <a:latin typeface="Calibri"/>
-              <a:ea typeface="Calibri"/>
-              <a:cs typeface="Calibri"/>
-              <a:sym typeface="Calibri"/>
-            </a:endParaRPr>
-          </a:p>
-          <a:p>
-            <a:pPr marL="0" lvl="0" indent="0" algn="l" rtl="0">
-              <a:spcBef>
-                <a:spcPts val="0"/>
-              </a:spcBef>
-              <a:spcAft>
-                <a:spcPts val="0"/>
-              </a:spcAft>
-              <a:buNone/>
-            </a:pPr>
-            <a:r>
-              <a:rPr lang="en-US" dirty="0">
-                <a:latin typeface="Calibri"/>
-                <a:ea typeface="Calibri"/>
-                <a:cs typeface="Calibri"/>
-                <a:sym typeface="Calibri"/>
-              </a:rPr>
-              <a:t>This database can query the data and give updates with a speed of a live movie (milliseconds).</a:t>
-            </a:r>
-            <a:endParaRPr dirty="0">
-              <a:latin typeface="Calibri"/>
-              <a:ea typeface="Calibri"/>
-              <a:cs typeface="Calibri"/>
-              <a:sym typeface="Calibri"/>
-            </a:endParaRPr>
-          </a:p>
-          <a:p>
-            <a:pPr marL="0" lvl="0" indent="0" algn="l" rtl="0">
-              <a:spcBef>
-                <a:spcPts val="0"/>
-              </a:spcBef>
-              <a:spcAft>
-                <a:spcPts val="0"/>
-              </a:spcAft>
-              <a:buNone/>
-            </a:pPr>
-            <a:r>
-              <a:rPr lang="en-US" dirty="0">
-                <a:latin typeface="Calibri"/>
-                <a:ea typeface="Calibri"/>
-                <a:cs typeface="Calibri"/>
-                <a:sym typeface="Calibri"/>
-              </a:rPr>
-              <a:t>And we can still use conventional ETL tools and enjoy fast data load speeds.</a:t>
-            </a:r>
-            <a:endParaRPr dirty="0">
-              <a:latin typeface="Calibri"/>
-              <a:ea typeface="Calibri"/>
-              <a:cs typeface="Calibri"/>
-              <a:sym typeface="Calibri"/>
-            </a:endParaRPr>
-          </a:p>
-          <a:p>
-            <a:pPr marL="0" lvl="0" indent="0" algn="l" rtl="0">
-              <a:spcBef>
-                <a:spcPts val="0"/>
-              </a:spcBef>
-              <a:spcAft>
-                <a:spcPts val="0"/>
-              </a:spcAft>
-              <a:buNone/>
-            </a:pPr>
-            <a:r>
-              <a:rPr lang="en-US" dirty="0">
-                <a:latin typeface="Calibri"/>
-                <a:ea typeface="Calibri"/>
-                <a:cs typeface="Calibri"/>
-                <a:sym typeface="Calibri"/>
-              </a:rPr>
-              <a:t>And it will be probably cheaper than EA.</a:t>
-            </a:r>
-            <a:endParaRPr dirty="0">
-              <a:latin typeface="Calibri"/>
-              <a:ea typeface="Calibri"/>
-              <a:cs typeface="Calibri"/>
-              <a:sym typeface="Calibri"/>
-            </a:endParaRPr>
-          </a:p>
-        </p:txBody>
-      </p:sp>
-      <p:sp>
-        <p:nvSpPr>
-          <p:cNvPr id="120" name="Google Shape;120;p17"/>
-          <p:cNvSpPr txBox="1"/>
-          <p:nvPr/>
-        </p:nvSpPr>
-        <p:spPr>
-          <a:xfrm>
-            <a:off x="0" y="4813150"/>
-            <a:ext cx="7125000" cy="1543500"/>
-          </a:xfrm>
-          <a:prstGeom prst="rect">
-            <a:avLst/>
-          </a:prstGeom>
-          <a:noFill/>
-          <a:ln>
-            <a:noFill/>
-          </a:ln>
-        </p:spPr>
-        <p:txBody>
-          <a:bodyPr spcFirstLastPara="1" wrap="square" lIns="91425" tIns="91425" rIns="91425" bIns="91425" anchor="t" anchorCtr="0">
-            <a:noAutofit/>
-          </a:bodyPr>
-          <a:lstStyle/>
-          <a:p>
-            <a:pPr marL="0" lvl="0" indent="0" algn="l" rtl="0">
-              <a:spcBef>
-                <a:spcPts val="0"/>
-              </a:spcBef>
-              <a:spcAft>
-                <a:spcPts val="0"/>
-              </a:spcAft>
-              <a:buNone/>
-            </a:pPr>
-            <a:r>
-              <a:rPr lang="en-US">
-                <a:latin typeface="Calibri"/>
-                <a:ea typeface="Calibri"/>
-                <a:cs typeface="Calibri"/>
-                <a:sym typeface="Calibri"/>
-              </a:rPr>
-              <a:t>Inverted indexes are usually implemented as compressed bitmaps - and cached in memory.</a:t>
-            </a:r>
-            <a:endParaRPr>
-              <a:latin typeface="Calibri"/>
-              <a:ea typeface="Calibri"/>
-              <a:cs typeface="Calibri"/>
-              <a:sym typeface="Calibri"/>
-            </a:endParaRPr>
-          </a:p>
-          <a:p>
-            <a:pPr marL="0" lvl="0" indent="0" algn="l" rtl="0">
-              <a:spcBef>
-                <a:spcPts val="0"/>
-              </a:spcBef>
-              <a:spcAft>
-                <a:spcPts val="0"/>
-              </a:spcAft>
-              <a:buNone/>
-            </a:pPr>
-            <a:r>
-              <a:rPr lang="en-US">
-                <a:latin typeface="Calibri"/>
-                <a:ea typeface="Calibri"/>
-                <a:cs typeface="Calibri"/>
-                <a:sym typeface="Calibri"/>
-              </a:rPr>
-              <a:t>They may be also implemented as "conventional" trees.</a:t>
-            </a:r>
-            <a:endParaRPr>
-              <a:latin typeface="Calibri"/>
-              <a:ea typeface="Calibri"/>
-              <a:cs typeface="Calibri"/>
-              <a:sym typeface="Calibri"/>
-            </a:endParaRPr>
-          </a:p>
-          <a:p>
-            <a:pPr marL="0" lvl="0" indent="0" algn="l" rtl="0">
-              <a:spcBef>
-                <a:spcPts val="0"/>
-              </a:spcBef>
-              <a:spcAft>
-                <a:spcPts val="0"/>
-              </a:spcAft>
-              <a:buNone/>
-            </a:pPr>
-            <a:r>
-              <a:rPr lang="en-US">
-                <a:latin typeface="Calibri"/>
-                <a:ea typeface="Calibri"/>
-                <a:cs typeface="Calibri"/>
-                <a:sym typeface="Calibri"/>
-              </a:rPr>
-              <a:t>Here are more links about Inverted indexes:</a:t>
-            </a:r>
-            <a:endParaRPr>
-              <a:latin typeface="Calibri"/>
-              <a:ea typeface="Calibri"/>
-              <a:cs typeface="Calibri"/>
-              <a:sym typeface="Calibri"/>
-            </a:endParaRPr>
-          </a:p>
-          <a:p>
-            <a:pPr marL="0" lvl="0" indent="0" algn="l" rtl="0">
-              <a:spcBef>
-                <a:spcPts val="0"/>
-              </a:spcBef>
-              <a:spcAft>
-                <a:spcPts val="0"/>
-              </a:spcAft>
-              <a:buNone/>
-            </a:pPr>
-            <a:r>
-              <a:rPr lang="en-US" sz="1100">
-                <a:latin typeface="Calibri"/>
-                <a:ea typeface="Calibri"/>
-                <a:cs typeface="Calibri"/>
-                <a:sym typeface="Calibri"/>
-              </a:rPr>
-              <a:t>- </a:t>
-            </a:r>
-            <a:r>
-              <a:rPr lang="en-US" sz="1100" u="sng">
-                <a:solidFill>
-                  <a:schemeClr val="hlink"/>
-                </a:solidFill>
-                <a:latin typeface="Calibri"/>
-                <a:ea typeface="Calibri"/>
-                <a:cs typeface="Calibri"/>
-                <a:sym typeface="Calibri"/>
-                <a:hlinkClick r:id="rId4"/>
-              </a:rPr>
-              <a:t>https://www.quora.com/In-database-design-what-exactly-is-the-difference-between-inverted-index-and-a-normal-index</a:t>
-            </a:r>
-            <a:r>
-              <a:rPr lang="en-US" sz="1100">
-                <a:latin typeface="Calibri"/>
-                <a:ea typeface="Calibri"/>
-                <a:cs typeface="Calibri"/>
-                <a:sym typeface="Calibri"/>
-              </a:rPr>
-              <a:t> </a:t>
-            </a:r>
-            <a:endParaRPr sz="1100">
-              <a:latin typeface="Calibri"/>
-              <a:ea typeface="Calibri"/>
-              <a:cs typeface="Calibri"/>
-              <a:sym typeface="Calibri"/>
-            </a:endParaRPr>
-          </a:p>
-          <a:p>
-            <a:pPr marL="0" lvl="0" indent="0" algn="l" rtl="0">
-              <a:spcBef>
-                <a:spcPts val="0"/>
-              </a:spcBef>
-              <a:spcAft>
-                <a:spcPts val="0"/>
-              </a:spcAft>
-              <a:buNone/>
-            </a:pPr>
-            <a:r>
-              <a:rPr lang="en-US" sz="1100">
-                <a:latin typeface="Calibri"/>
-                <a:ea typeface="Calibri"/>
-                <a:cs typeface="Calibri"/>
-                <a:sym typeface="Calibri"/>
-              </a:rPr>
-              <a:t>- </a:t>
-            </a:r>
-            <a:r>
-              <a:rPr lang="en-US" sz="1100" u="sng">
-                <a:solidFill>
-                  <a:schemeClr val="hlink"/>
-                </a:solidFill>
-                <a:latin typeface="Calibri"/>
-                <a:ea typeface="Calibri"/>
-                <a:cs typeface="Calibri"/>
-                <a:sym typeface="Calibri"/>
-                <a:hlinkClick r:id="rId5"/>
-              </a:rPr>
-              <a:t>https://stackoverflow.com/questions/47537318/b-tree-index-vs-inverted-index</a:t>
-            </a:r>
-            <a:r>
-              <a:rPr lang="en-US" sz="1100">
-                <a:latin typeface="Calibri"/>
-                <a:ea typeface="Calibri"/>
-                <a:cs typeface="Calibri"/>
-                <a:sym typeface="Calibri"/>
-              </a:rPr>
-              <a:t> </a:t>
-            </a:r>
-            <a:endParaRPr sz="1100">
-              <a:latin typeface="Calibri"/>
-              <a:ea typeface="Calibri"/>
-              <a:cs typeface="Calibri"/>
-              <a:sym typeface="Calibri"/>
-            </a:endParaRPr>
-          </a:p>
-          <a:p>
-            <a:pPr marL="0" lvl="0" indent="0" algn="l" rtl="0">
-              <a:spcBef>
-                <a:spcPts val="0"/>
-              </a:spcBef>
-              <a:spcAft>
-                <a:spcPts val="0"/>
-              </a:spcAft>
-              <a:buNone/>
-            </a:pPr>
-            <a:r>
-              <a:rPr lang="en-US" sz="1100">
-                <a:latin typeface="Calibri"/>
-                <a:ea typeface="Calibri"/>
-                <a:cs typeface="Calibri"/>
-                <a:sym typeface="Calibri"/>
-              </a:rPr>
-              <a:t>- </a:t>
-            </a:r>
-            <a:r>
-              <a:rPr lang="en-US" sz="1100" u="sng">
-                <a:solidFill>
-                  <a:schemeClr val="hlink"/>
-                </a:solidFill>
-                <a:latin typeface="Calibri"/>
-                <a:ea typeface="Calibri"/>
-                <a:cs typeface="Calibri"/>
-                <a:sym typeface="Calibri"/>
-                <a:hlinkClick r:id="rId6"/>
-              </a:rPr>
-              <a:t>https://en.wikipedia.org/wiki/Inverted_index</a:t>
-            </a:r>
-            <a:r>
-              <a:rPr lang="en-US" sz="1100">
-                <a:latin typeface="Calibri"/>
-                <a:ea typeface="Calibri"/>
-                <a:cs typeface="Calibri"/>
-                <a:sym typeface="Calibri"/>
-              </a:rPr>
-              <a:t> </a:t>
-            </a:r>
-            <a:endParaRPr>
               <a:latin typeface="Calibri"/>
               <a:ea typeface="Calibri"/>
               <a:cs typeface="Calibri"/>
@@ -22691,6 +22555,977 @@
         <p14:creationId xmlns:p14="http://schemas.microsoft.com/office/powerpoint/2010/main" val="1515266594"/>
       </p:ext>
     </p:extLst>
+  </p:cSld>
+  <p:clrMapOvr>
+    <a:masterClrMapping/>
+  </p:clrMapOvr>
+</p:sld>
+</file>
+
+<file path=ppt/slides/slide8.xml><?xml version="1.0" encoding="utf-8"?>
+<p:sld xmlns:a="http://schemas.openxmlformats.org/drawingml/2006/main" xmlns:r="http://schemas.openxmlformats.org/officeDocument/2006/relationships" xmlns:p="http://schemas.openxmlformats.org/presentationml/2006/main">
+  <p:cSld>
+    <p:spTree>
+      <p:nvGrpSpPr>
+        <p:cNvPr id="1" name="Shape 116"/>
+        <p:cNvGrpSpPr/>
+        <p:nvPr/>
+      </p:nvGrpSpPr>
+      <p:grpSpPr>
+        <a:xfrm>
+          <a:off x="0" y="0"/>
+          <a:ext cx="0" cy="0"/>
+          <a:chOff x="0" y="0"/>
+          <a:chExt cx="0" cy="0"/>
+        </a:xfrm>
+      </p:grpSpPr>
+      <p:sp>
+        <p:nvSpPr>
+          <p:cNvPr id="117" name="Google Shape;117;p17"/>
+          <p:cNvSpPr txBox="1"/>
+          <p:nvPr/>
+        </p:nvSpPr>
+        <p:spPr>
+          <a:xfrm>
+            <a:off x="100016" y="0"/>
+            <a:ext cx="6770700" cy="2286000"/>
+          </a:xfrm>
+          <a:prstGeom prst="rect">
+            <a:avLst/>
+          </a:prstGeom>
+          <a:noFill/>
+          <a:ln>
+            <a:noFill/>
+          </a:ln>
+        </p:spPr>
+        <p:txBody>
+          <a:bodyPr spcFirstLastPara="1" wrap="square" lIns="91425" tIns="91425" rIns="91425" bIns="91425" anchor="t" anchorCtr="0">
+            <a:noAutofit/>
+          </a:bodyPr>
+          <a:lstStyle/>
+          <a:p>
+            <a:pPr marL="0" lvl="0" indent="0" algn="l" rtl="0">
+              <a:spcBef>
+                <a:spcPts val="0"/>
+              </a:spcBef>
+              <a:spcAft>
+                <a:spcPts val="0"/>
+              </a:spcAft>
+              <a:buNone/>
+            </a:pPr>
+            <a:r>
+              <a:rPr lang="en-US" sz="2400" b="1" dirty="0">
+                <a:latin typeface="Calibri"/>
+                <a:ea typeface="Calibri"/>
+                <a:cs typeface="Calibri"/>
+                <a:sym typeface="Calibri"/>
+              </a:rPr>
+              <a:t>Inverted Indexes:</a:t>
+            </a:r>
+            <a:endParaRPr dirty="0">
+              <a:latin typeface="Calibri"/>
+              <a:ea typeface="Calibri"/>
+              <a:cs typeface="Calibri"/>
+              <a:sym typeface="Calibri"/>
+            </a:endParaRPr>
+          </a:p>
+          <a:p>
+            <a:pPr marL="0" lvl="0" indent="0" algn="l" rtl="0">
+              <a:spcBef>
+                <a:spcPts val="0"/>
+              </a:spcBef>
+              <a:spcAft>
+                <a:spcPts val="0"/>
+              </a:spcAft>
+              <a:buNone/>
+            </a:pPr>
+            <a:r>
+              <a:rPr lang="en-US" dirty="0">
+                <a:latin typeface="Calibri"/>
+                <a:ea typeface="Calibri"/>
+                <a:cs typeface="Calibri"/>
+                <a:sym typeface="Calibri"/>
+              </a:rPr>
+              <a:t>Salesforce Einstein Analytics stores data not in regular SQL database, but in files and so called "inverted indexes" (II).</a:t>
+            </a:r>
+            <a:endParaRPr dirty="0">
+              <a:latin typeface="Calibri"/>
+              <a:ea typeface="Calibri"/>
+              <a:cs typeface="Calibri"/>
+              <a:sym typeface="Calibri"/>
+            </a:endParaRPr>
+          </a:p>
+          <a:p>
+            <a:pPr marL="0" lvl="0" indent="0" algn="l" rtl="0">
+              <a:spcBef>
+                <a:spcPts val="0"/>
+              </a:spcBef>
+              <a:spcAft>
+                <a:spcPts val="0"/>
+              </a:spcAft>
+              <a:buNone/>
+            </a:pPr>
+            <a:r>
+              <a:rPr lang="en-US" dirty="0">
+                <a:latin typeface="Calibri"/>
+                <a:ea typeface="Calibri"/>
+                <a:cs typeface="Calibri"/>
+                <a:sym typeface="Calibri"/>
+              </a:rPr>
+              <a:t>The motivation for selecting this technology was to have fast interactive data access.</a:t>
+            </a:r>
+            <a:endParaRPr dirty="0">
+              <a:latin typeface="Calibri"/>
+              <a:ea typeface="Calibri"/>
+              <a:cs typeface="Calibri"/>
+              <a:sym typeface="Calibri"/>
+            </a:endParaRPr>
+          </a:p>
+          <a:p>
+            <a:pPr marL="0" lvl="0" indent="0" algn="l" rtl="0">
+              <a:spcBef>
+                <a:spcPts val="0"/>
+              </a:spcBef>
+              <a:spcAft>
+                <a:spcPts val="0"/>
+              </a:spcAft>
+              <a:buNone/>
+            </a:pPr>
+            <a:r>
+              <a:rPr lang="en-US" dirty="0">
+                <a:latin typeface="Calibri"/>
+                <a:ea typeface="Calibri"/>
+                <a:cs typeface="Calibri"/>
+                <a:sym typeface="Calibri"/>
+              </a:rPr>
+              <a:t>The price to pay - the slowness of creating these "inverted indexes".</a:t>
+            </a:r>
+            <a:endParaRPr dirty="0">
+              <a:latin typeface="Calibri"/>
+              <a:ea typeface="Calibri"/>
+              <a:cs typeface="Calibri"/>
+              <a:sym typeface="Calibri"/>
+            </a:endParaRPr>
+          </a:p>
+          <a:p>
+            <a:pPr marL="0" lvl="0" indent="0" algn="l" rtl="0">
+              <a:spcBef>
+                <a:spcPts val="0"/>
+              </a:spcBef>
+              <a:spcAft>
+                <a:spcPts val="0"/>
+              </a:spcAft>
+              <a:buNone/>
+            </a:pPr>
+            <a:r>
+              <a:rPr lang="en-US" dirty="0">
+                <a:latin typeface="Calibri"/>
+                <a:ea typeface="Calibri"/>
+                <a:cs typeface="Calibri"/>
+                <a:sym typeface="Calibri"/>
+              </a:rPr>
+              <a:t>Every time you add data - you need to rebuild the whole index.</a:t>
+            </a:r>
+            <a:endParaRPr dirty="0">
+              <a:latin typeface="Calibri"/>
+              <a:ea typeface="Calibri"/>
+              <a:cs typeface="Calibri"/>
+              <a:sym typeface="Calibri"/>
+            </a:endParaRPr>
+          </a:p>
+          <a:p>
+            <a:pPr marL="0" lvl="0" indent="0" algn="l" rtl="0">
+              <a:spcBef>
+                <a:spcPts val="0"/>
+              </a:spcBef>
+              <a:spcAft>
+                <a:spcPts val="0"/>
+              </a:spcAft>
+              <a:buNone/>
+            </a:pPr>
+            <a:r>
+              <a:rPr lang="en-US" dirty="0">
+                <a:latin typeface="Calibri"/>
+                <a:ea typeface="Calibri"/>
+                <a:cs typeface="Calibri"/>
+                <a:sym typeface="Calibri"/>
+              </a:rPr>
+              <a:t>This article gives a nice explanation of what is II:</a:t>
+            </a:r>
+            <a:endParaRPr dirty="0">
+              <a:latin typeface="Calibri"/>
+              <a:ea typeface="Calibri"/>
+              <a:cs typeface="Calibri"/>
+              <a:sym typeface="Calibri"/>
+            </a:endParaRPr>
+          </a:p>
+          <a:p>
+            <a:pPr marL="0" lvl="0" indent="0" algn="l" rtl="0">
+              <a:spcBef>
+                <a:spcPts val="0"/>
+              </a:spcBef>
+              <a:spcAft>
+                <a:spcPts val="0"/>
+              </a:spcAft>
+              <a:buNone/>
+            </a:pPr>
+            <a:r>
+              <a:rPr lang="en-US" dirty="0">
+                <a:latin typeface="Calibri"/>
+                <a:ea typeface="Calibri"/>
+                <a:cs typeface="Calibri"/>
+                <a:sym typeface="Calibri"/>
+              </a:rPr>
+              <a:t> - https://</a:t>
+            </a:r>
+            <a:r>
+              <a:rPr lang="en-US" dirty="0" err="1">
+                <a:latin typeface="Calibri"/>
+                <a:ea typeface="Calibri"/>
+                <a:cs typeface="Calibri"/>
+                <a:sym typeface="Calibri"/>
+              </a:rPr>
+              <a:t>www.eternussolutions.com</a:t>
+            </a:r>
+            <a:r>
+              <a:rPr lang="en-US" dirty="0">
+                <a:latin typeface="Calibri"/>
+                <a:ea typeface="Calibri"/>
+                <a:cs typeface="Calibri"/>
+                <a:sym typeface="Calibri"/>
+              </a:rPr>
+              <a:t>/2016/11/13/10-things-love-wave-analytics/</a:t>
+            </a:r>
+            <a:endParaRPr dirty="0">
+              <a:latin typeface="Calibri"/>
+              <a:ea typeface="Calibri"/>
+              <a:cs typeface="Calibri"/>
+              <a:sym typeface="Calibri"/>
+            </a:endParaRPr>
+          </a:p>
+          <a:p>
+            <a:pPr marL="0" lvl="0" indent="0" algn="l" rtl="0">
+              <a:spcBef>
+                <a:spcPts val="0"/>
+              </a:spcBef>
+              <a:spcAft>
+                <a:spcPts val="0"/>
+              </a:spcAft>
+              <a:buNone/>
+            </a:pPr>
+            <a:r>
+              <a:rPr lang="en-US" dirty="0">
+                <a:latin typeface="Calibri"/>
+                <a:ea typeface="Calibri"/>
+                <a:cs typeface="Calibri"/>
+                <a:sym typeface="Calibri"/>
+              </a:rPr>
+              <a:t>And here is a picture showing the data - and its inverted index.</a:t>
+            </a:r>
+            <a:endParaRPr dirty="0">
+              <a:latin typeface="Calibri"/>
+              <a:ea typeface="Calibri"/>
+              <a:cs typeface="Calibri"/>
+              <a:sym typeface="Calibri"/>
+            </a:endParaRPr>
+          </a:p>
+        </p:txBody>
+      </p:sp>
+      <p:pic>
+        <p:nvPicPr>
+          <p:cNvPr id="118" name="Google Shape;118;p17"/>
+          <p:cNvPicPr preferRelativeResize="0"/>
+          <p:nvPr/>
+        </p:nvPicPr>
+        <p:blipFill>
+          <a:blip r:embed="rId3">
+            <a:alphaModFix/>
+          </a:blip>
+          <a:stretch>
+            <a:fillRect/>
+          </a:stretch>
+        </p:blipFill>
+        <p:spPr>
+          <a:xfrm>
+            <a:off x="511128" y="2474170"/>
+            <a:ext cx="6096000" cy="2752725"/>
+          </a:xfrm>
+          <a:prstGeom prst="rect">
+            <a:avLst/>
+          </a:prstGeom>
+          <a:noFill/>
+          <a:ln>
+            <a:noFill/>
+          </a:ln>
+        </p:spPr>
+      </p:pic>
+      <p:sp>
+        <p:nvSpPr>
+          <p:cNvPr id="119" name="Google Shape;119;p17"/>
+          <p:cNvSpPr txBox="1"/>
+          <p:nvPr/>
+        </p:nvSpPr>
+        <p:spPr>
+          <a:xfrm>
+            <a:off x="7207450" y="108700"/>
+            <a:ext cx="4911600" cy="4877638"/>
+          </a:xfrm>
+          <a:prstGeom prst="rect">
+            <a:avLst/>
+          </a:prstGeom>
+          <a:noFill/>
+          <a:ln>
+            <a:noFill/>
+          </a:ln>
+        </p:spPr>
+        <p:txBody>
+          <a:bodyPr spcFirstLastPara="1" wrap="square" lIns="91425" tIns="91425" rIns="91425" bIns="91425" anchor="t" anchorCtr="0">
+            <a:noAutofit/>
+          </a:bodyPr>
+          <a:lstStyle/>
+          <a:p>
+            <a:pPr marL="0" lvl="0" indent="0" algn="l" rtl="0">
+              <a:spcBef>
+                <a:spcPts val="0"/>
+              </a:spcBef>
+              <a:spcAft>
+                <a:spcPts val="0"/>
+              </a:spcAft>
+              <a:buNone/>
+            </a:pPr>
+            <a:r>
+              <a:rPr lang="en-US" dirty="0">
+                <a:latin typeface="Calibri"/>
+                <a:ea typeface="Calibri"/>
+                <a:cs typeface="Calibri"/>
+                <a:sym typeface="Calibri"/>
+              </a:rPr>
+              <a:t>I've first worked with an SQL database with compressed bitmap indexes in 2001-2002. The database was called "</a:t>
+            </a:r>
+            <a:r>
+              <a:rPr lang="en-US" b="1" dirty="0">
+                <a:solidFill>
+                  <a:srgbClr val="0070C0"/>
+                </a:solidFill>
+                <a:latin typeface="Calibri"/>
+                <a:ea typeface="Calibri"/>
+                <a:cs typeface="Calibri"/>
+                <a:sym typeface="Calibri"/>
+              </a:rPr>
+              <a:t>Sybase IQ</a:t>
+            </a:r>
+            <a:r>
+              <a:rPr lang="en-US" dirty="0">
+                <a:latin typeface="Calibri"/>
+                <a:ea typeface="Calibri"/>
+                <a:cs typeface="Calibri"/>
+                <a:sym typeface="Calibri"/>
+              </a:rPr>
+              <a:t>".</a:t>
+            </a:r>
+            <a:endParaRPr dirty="0">
+              <a:latin typeface="Calibri"/>
+              <a:ea typeface="Calibri"/>
+              <a:cs typeface="Calibri"/>
+              <a:sym typeface="Calibri"/>
+            </a:endParaRPr>
+          </a:p>
+          <a:p>
+            <a:pPr marL="0" lvl="0" indent="0" algn="l" rtl="0">
+              <a:spcBef>
+                <a:spcPts val="0"/>
+              </a:spcBef>
+              <a:spcAft>
+                <a:spcPts val="0"/>
+              </a:spcAft>
+              <a:buNone/>
+            </a:pPr>
+            <a:r>
+              <a:rPr lang="en-US" dirty="0">
+                <a:latin typeface="Calibri"/>
+                <a:ea typeface="Calibri"/>
+                <a:cs typeface="Calibri"/>
+                <a:sym typeface="Calibri"/>
+              </a:rPr>
+              <a:t>It was an SQL database for doing analytics (as opposed to transactional processing).</a:t>
+            </a:r>
+            <a:endParaRPr dirty="0">
+              <a:latin typeface="Calibri"/>
+              <a:ea typeface="Calibri"/>
+              <a:cs typeface="Calibri"/>
+              <a:sym typeface="Calibri"/>
+            </a:endParaRPr>
+          </a:p>
+          <a:p>
+            <a:pPr marL="0" lvl="0" indent="0" algn="l" rtl="0">
+              <a:spcBef>
+                <a:spcPts val="0"/>
+              </a:spcBef>
+              <a:spcAft>
+                <a:spcPts val="0"/>
+              </a:spcAft>
+              <a:buNone/>
+            </a:pPr>
+            <a:endParaRPr dirty="0">
+              <a:latin typeface="Calibri"/>
+              <a:ea typeface="Calibri"/>
+              <a:cs typeface="Calibri"/>
+              <a:sym typeface="Calibri"/>
+            </a:endParaRPr>
+          </a:p>
+          <a:p>
+            <a:pPr marL="0" lvl="0" indent="0" algn="l" rtl="0">
+              <a:spcBef>
+                <a:spcPts val="0"/>
+              </a:spcBef>
+              <a:spcAft>
+                <a:spcPts val="0"/>
+              </a:spcAft>
+              <a:buNone/>
+            </a:pPr>
+            <a:r>
+              <a:rPr lang="en-US" dirty="0">
+                <a:latin typeface="Calibri"/>
+                <a:ea typeface="Calibri"/>
+                <a:cs typeface="Calibri"/>
+                <a:sym typeface="Calibri"/>
+              </a:rPr>
+              <a:t>Since then most SQL database vendors have adopted this "</a:t>
+            </a:r>
+            <a:r>
+              <a:rPr lang="en-US" b="1" dirty="0">
+                <a:solidFill>
+                  <a:srgbClr val="0070C0"/>
+                </a:solidFill>
+                <a:latin typeface="Calibri"/>
+                <a:ea typeface="Calibri"/>
+                <a:cs typeface="Calibri"/>
+                <a:sym typeface="Calibri"/>
+              </a:rPr>
+              <a:t>columnar indexing</a:t>
+            </a:r>
+            <a:r>
+              <a:rPr lang="en-US" dirty="0">
+                <a:latin typeface="Calibri"/>
+                <a:ea typeface="Calibri"/>
+                <a:cs typeface="Calibri"/>
+                <a:sym typeface="Calibri"/>
+              </a:rPr>
+              <a:t>". They switched from </a:t>
+            </a:r>
+            <a:r>
+              <a:rPr lang="en-US" b="1" dirty="0">
+                <a:solidFill>
+                  <a:srgbClr val="0070C0"/>
+                </a:solidFill>
+                <a:latin typeface="Calibri"/>
+                <a:ea typeface="Calibri"/>
+                <a:cs typeface="Calibri"/>
+                <a:sym typeface="Calibri"/>
+              </a:rPr>
+              <a:t>row-oriented</a:t>
+            </a:r>
+            <a:r>
+              <a:rPr lang="en-US" dirty="0">
+                <a:latin typeface="Calibri"/>
+                <a:ea typeface="Calibri"/>
+                <a:cs typeface="Calibri"/>
+                <a:sym typeface="Calibri"/>
+              </a:rPr>
+              <a:t> storage and indexing to </a:t>
+            </a:r>
+            <a:r>
+              <a:rPr lang="en-US" b="1" dirty="0">
+                <a:solidFill>
+                  <a:srgbClr val="0070C0"/>
+                </a:solidFill>
+                <a:latin typeface="Calibri"/>
+                <a:ea typeface="Calibri"/>
+                <a:cs typeface="Calibri"/>
+                <a:sym typeface="Calibri"/>
+              </a:rPr>
+              <a:t>compressed column-oriented storage</a:t>
+            </a:r>
+            <a:r>
+              <a:rPr lang="en-US" dirty="0">
+                <a:latin typeface="Calibri"/>
+                <a:ea typeface="Calibri"/>
+                <a:cs typeface="Calibri"/>
+                <a:sym typeface="Calibri"/>
+              </a:rPr>
+              <a:t>. </a:t>
+            </a:r>
+          </a:p>
+          <a:p>
+            <a:pPr marL="0" lvl="0" indent="0" algn="l" rtl="0">
+              <a:spcBef>
+                <a:spcPts val="0"/>
+              </a:spcBef>
+              <a:spcAft>
+                <a:spcPts val="0"/>
+              </a:spcAft>
+              <a:buNone/>
+            </a:pPr>
+            <a:endParaRPr dirty="0">
+              <a:latin typeface="Calibri"/>
+              <a:ea typeface="Calibri"/>
+              <a:cs typeface="Calibri"/>
+              <a:sym typeface="Calibri"/>
+            </a:endParaRPr>
+          </a:p>
+          <a:p>
+            <a:pPr marL="0" lvl="0" indent="0" algn="l" rtl="0">
+              <a:spcBef>
+                <a:spcPts val="0"/>
+              </a:spcBef>
+              <a:spcAft>
+                <a:spcPts val="0"/>
+              </a:spcAft>
+              <a:buNone/>
+            </a:pPr>
+            <a:r>
+              <a:rPr lang="en-US" dirty="0">
+                <a:latin typeface="Calibri"/>
+                <a:ea typeface="Calibri"/>
+                <a:cs typeface="Calibri"/>
+                <a:sym typeface="Calibri"/>
+              </a:rPr>
+              <a:t>This is basically equivalent to the "</a:t>
+            </a:r>
+            <a:r>
+              <a:rPr lang="en-US" b="1" dirty="0">
+                <a:solidFill>
+                  <a:srgbClr val="0070C0"/>
+                </a:solidFill>
+                <a:latin typeface="Calibri"/>
+                <a:ea typeface="Calibri"/>
+                <a:cs typeface="Calibri"/>
+                <a:sym typeface="Calibri"/>
+              </a:rPr>
+              <a:t>Inverted Index</a:t>
+            </a:r>
+            <a:r>
+              <a:rPr lang="en-US" dirty="0">
+                <a:latin typeface="Calibri"/>
+                <a:ea typeface="Calibri"/>
+                <a:cs typeface="Calibri"/>
+                <a:sym typeface="Calibri"/>
+              </a:rPr>
+              <a:t>" idea.</a:t>
+            </a:r>
+            <a:endParaRPr dirty="0">
+              <a:latin typeface="Calibri"/>
+              <a:ea typeface="Calibri"/>
+              <a:cs typeface="Calibri"/>
+              <a:sym typeface="Calibri"/>
+            </a:endParaRPr>
+          </a:p>
+          <a:p>
+            <a:pPr marL="0" lvl="0" indent="0" algn="l" rtl="0">
+              <a:spcBef>
+                <a:spcPts val="0"/>
+              </a:spcBef>
+              <a:spcAft>
+                <a:spcPts val="0"/>
+              </a:spcAft>
+              <a:buNone/>
+            </a:pPr>
+            <a:endParaRPr dirty="0">
+              <a:latin typeface="Calibri"/>
+              <a:ea typeface="Calibri"/>
+              <a:cs typeface="Calibri"/>
+              <a:sym typeface="Calibri"/>
+            </a:endParaRPr>
+          </a:p>
+          <a:p>
+            <a:pPr marL="0" lvl="0" indent="0" algn="l" rtl="0">
+              <a:spcBef>
+                <a:spcPts val="0"/>
+              </a:spcBef>
+              <a:spcAft>
+                <a:spcPts val="0"/>
+              </a:spcAft>
+              <a:buNone/>
+            </a:pPr>
+            <a:r>
+              <a:rPr lang="en-US" dirty="0">
+                <a:latin typeface="Calibri"/>
+                <a:ea typeface="Calibri"/>
+                <a:cs typeface="Calibri"/>
+                <a:sym typeface="Calibri"/>
+              </a:rPr>
+              <a:t>Modern SQL databases can provide performance much faster than EA. You just need to select an implementation with appropriate characteristics.</a:t>
+            </a:r>
+            <a:endParaRPr dirty="0">
+              <a:latin typeface="Calibri"/>
+              <a:ea typeface="Calibri"/>
+              <a:cs typeface="Calibri"/>
+              <a:sym typeface="Calibri"/>
+            </a:endParaRPr>
+          </a:p>
+          <a:p>
+            <a:pPr marL="0" lvl="0" indent="0" algn="l" rtl="0">
+              <a:spcBef>
+                <a:spcPts val="0"/>
+              </a:spcBef>
+              <a:spcAft>
+                <a:spcPts val="0"/>
+              </a:spcAft>
+              <a:buNone/>
+            </a:pPr>
+            <a:endParaRPr dirty="0">
+              <a:latin typeface="Calibri"/>
+              <a:ea typeface="Calibri"/>
+              <a:cs typeface="Calibri"/>
+              <a:sym typeface="Calibri"/>
+            </a:endParaRPr>
+          </a:p>
+          <a:p>
+            <a:pPr marL="0" lvl="0" indent="0" algn="l" rtl="0">
+              <a:spcBef>
+                <a:spcPts val="0"/>
+              </a:spcBef>
+              <a:spcAft>
+                <a:spcPts val="0"/>
+              </a:spcAft>
+              <a:buNone/>
+            </a:pPr>
+            <a:r>
+              <a:rPr lang="en-US" dirty="0">
+                <a:latin typeface="Calibri"/>
+                <a:ea typeface="Calibri"/>
+                <a:cs typeface="Calibri"/>
+                <a:sym typeface="Calibri"/>
+              </a:rPr>
+              <a:t>For example, on AWS (or other clouds) you can select a GPU-based SQL database on a server with terabytes of memory.</a:t>
+            </a:r>
+            <a:endParaRPr dirty="0">
+              <a:latin typeface="Calibri"/>
+              <a:ea typeface="Calibri"/>
+              <a:cs typeface="Calibri"/>
+              <a:sym typeface="Calibri"/>
+            </a:endParaRPr>
+          </a:p>
+          <a:p>
+            <a:pPr marL="0" lvl="0" indent="0" algn="l" rtl="0">
+              <a:spcBef>
+                <a:spcPts val="0"/>
+              </a:spcBef>
+              <a:spcAft>
+                <a:spcPts val="0"/>
+              </a:spcAft>
+              <a:buNone/>
+            </a:pPr>
+            <a:r>
+              <a:rPr lang="en-US" dirty="0">
+                <a:latin typeface="Calibri"/>
+                <a:ea typeface="Calibri"/>
+                <a:cs typeface="Calibri"/>
+                <a:sym typeface="Calibri"/>
+              </a:rPr>
+              <a:t>This database can query the data and give updates with a speed of a live movie (milliseconds) !!</a:t>
+            </a:r>
+            <a:endParaRPr dirty="0">
+              <a:latin typeface="Calibri"/>
+              <a:ea typeface="Calibri"/>
+              <a:cs typeface="Calibri"/>
+              <a:sym typeface="Calibri"/>
+            </a:endParaRPr>
+          </a:p>
+          <a:p>
+            <a:pPr marL="0" lvl="0" indent="0" algn="l" rtl="0">
+              <a:spcBef>
+                <a:spcPts val="0"/>
+              </a:spcBef>
+              <a:spcAft>
+                <a:spcPts val="0"/>
+              </a:spcAft>
+              <a:buNone/>
+            </a:pPr>
+            <a:endParaRPr lang="en-US" dirty="0">
+              <a:latin typeface="Calibri"/>
+              <a:ea typeface="Calibri"/>
+              <a:cs typeface="Calibri"/>
+              <a:sym typeface="Calibri"/>
+            </a:endParaRPr>
+          </a:p>
+          <a:p>
+            <a:pPr marL="0" lvl="0" indent="0" algn="l" rtl="0">
+              <a:spcBef>
+                <a:spcPts val="0"/>
+              </a:spcBef>
+              <a:spcAft>
+                <a:spcPts val="0"/>
+              </a:spcAft>
+              <a:buNone/>
+            </a:pPr>
+            <a:r>
+              <a:rPr lang="en-US" dirty="0">
+                <a:latin typeface="Calibri"/>
+                <a:ea typeface="Calibri"/>
+                <a:cs typeface="Calibri"/>
+                <a:sym typeface="Calibri"/>
+              </a:rPr>
+              <a:t>And we can still use conventional ETL tools and enjoy fast data load speeds.</a:t>
+            </a:r>
+            <a:endParaRPr dirty="0">
+              <a:latin typeface="Calibri"/>
+              <a:ea typeface="Calibri"/>
+              <a:cs typeface="Calibri"/>
+              <a:sym typeface="Calibri"/>
+            </a:endParaRPr>
+          </a:p>
+        </p:txBody>
+      </p:sp>
+      <p:sp>
+        <p:nvSpPr>
+          <p:cNvPr id="120" name="Google Shape;120;p17"/>
+          <p:cNvSpPr txBox="1"/>
+          <p:nvPr/>
+        </p:nvSpPr>
+        <p:spPr>
+          <a:xfrm>
+            <a:off x="85728" y="5228865"/>
+            <a:ext cx="7125000" cy="1543500"/>
+          </a:xfrm>
+          <a:prstGeom prst="rect">
+            <a:avLst/>
+          </a:prstGeom>
+          <a:noFill/>
+          <a:ln>
+            <a:noFill/>
+          </a:ln>
+        </p:spPr>
+        <p:txBody>
+          <a:bodyPr spcFirstLastPara="1" wrap="square" lIns="91425" tIns="91425" rIns="91425" bIns="91425" anchor="t" anchorCtr="0">
+            <a:noAutofit/>
+          </a:bodyPr>
+          <a:lstStyle/>
+          <a:p>
+            <a:pPr marL="0" lvl="0" indent="0" algn="l" rtl="0">
+              <a:spcBef>
+                <a:spcPts val="0"/>
+              </a:spcBef>
+              <a:spcAft>
+                <a:spcPts val="0"/>
+              </a:spcAft>
+              <a:buNone/>
+            </a:pPr>
+            <a:r>
+              <a:rPr lang="en-US" dirty="0">
+                <a:latin typeface="Calibri"/>
+                <a:ea typeface="Calibri"/>
+                <a:cs typeface="Calibri"/>
+                <a:sym typeface="Calibri"/>
+              </a:rPr>
+              <a:t>Inverted indexes are usually implemented as compressed bitmaps - and cached in memory.</a:t>
+            </a:r>
+            <a:endParaRPr dirty="0">
+              <a:latin typeface="Calibri"/>
+              <a:ea typeface="Calibri"/>
+              <a:cs typeface="Calibri"/>
+              <a:sym typeface="Calibri"/>
+            </a:endParaRPr>
+          </a:p>
+          <a:p>
+            <a:pPr marL="0" lvl="0" indent="0" algn="l" rtl="0">
+              <a:spcBef>
+                <a:spcPts val="0"/>
+              </a:spcBef>
+              <a:spcAft>
+                <a:spcPts val="0"/>
+              </a:spcAft>
+              <a:buNone/>
+            </a:pPr>
+            <a:r>
+              <a:rPr lang="en-US" dirty="0">
+                <a:latin typeface="Calibri"/>
+                <a:ea typeface="Calibri"/>
+                <a:cs typeface="Calibri"/>
+                <a:sym typeface="Calibri"/>
+              </a:rPr>
+              <a:t>They may be also implemented as "conventional" trees.</a:t>
+            </a:r>
+            <a:endParaRPr dirty="0">
+              <a:latin typeface="Calibri"/>
+              <a:ea typeface="Calibri"/>
+              <a:cs typeface="Calibri"/>
+              <a:sym typeface="Calibri"/>
+            </a:endParaRPr>
+          </a:p>
+          <a:p>
+            <a:pPr marL="0" lvl="0" indent="0" algn="l" rtl="0">
+              <a:spcBef>
+                <a:spcPts val="0"/>
+              </a:spcBef>
+              <a:spcAft>
+                <a:spcPts val="0"/>
+              </a:spcAft>
+              <a:buNone/>
+            </a:pPr>
+            <a:r>
+              <a:rPr lang="en-US" dirty="0">
+                <a:latin typeface="Calibri"/>
+                <a:ea typeface="Calibri"/>
+                <a:cs typeface="Calibri"/>
+                <a:sym typeface="Calibri"/>
+              </a:rPr>
+              <a:t>Here are more links about Inverted indexes:</a:t>
+            </a:r>
+            <a:endParaRPr dirty="0">
+              <a:latin typeface="Calibri"/>
+              <a:ea typeface="Calibri"/>
+              <a:cs typeface="Calibri"/>
+              <a:sym typeface="Calibri"/>
+            </a:endParaRPr>
+          </a:p>
+          <a:p>
+            <a:pPr marL="0" lvl="0" indent="0" algn="l" rtl="0">
+              <a:spcBef>
+                <a:spcPts val="0"/>
+              </a:spcBef>
+              <a:spcAft>
+                <a:spcPts val="0"/>
+              </a:spcAft>
+              <a:buNone/>
+            </a:pPr>
+            <a:r>
+              <a:rPr lang="en-US" sz="1100" dirty="0">
+                <a:latin typeface="Calibri"/>
+                <a:ea typeface="Calibri"/>
+                <a:cs typeface="Calibri"/>
+                <a:sym typeface="Calibri"/>
+              </a:rPr>
+              <a:t>- </a:t>
+            </a:r>
+            <a:r>
+              <a:rPr lang="en-US" sz="1100" u="sng" dirty="0">
+                <a:solidFill>
+                  <a:schemeClr val="hlink"/>
+                </a:solidFill>
+                <a:latin typeface="Calibri"/>
+                <a:ea typeface="Calibri"/>
+                <a:cs typeface="Calibri"/>
+                <a:sym typeface="Calibri"/>
+                <a:hlinkClick r:id="rId4"/>
+              </a:rPr>
+              <a:t>https://www.quora.com/In-database-design-what-exactly-is-the-difference-between-inverted-index-and-a-normal-index</a:t>
+            </a:r>
+            <a:r>
+              <a:rPr lang="en-US" sz="1100" dirty="0">
+                <a:latin typeface="Calibri"/>
+                <a:ea typeface="Calibri"/>
+                <a:cs typeface="Calibri"/>
+                <a:sym typeface="Calibri"/>
+              </a:rPr>
+              <a:t> </a:t>
+            </a:r>
+            <a:endParaRPr sz="1100" dirty="0">
+              <a:latin typeface="Calibri"/>
+              <a:ea typeface="Calibri"/>
+              <a:cs typeface="Calibri"/>
+              <a:sym typeface="Calibri"/>
+            </a:endParaRPr>
+          </a:p>
+          <a:p>
+            <a:pPr marL="0" lvl="0" indent="0" algn="l" rtl="0">
+              <a:spcBef>
+                <a:spcPts val="0"/>
+              </a:spcBef>
+              <a:spcAft>
+                <a:spcPts val="0"/>
+              </a:spcAft>
+              <a:buNone/>
+            </a:pPr>
+            <a:r>
+              <a:rPr lang="en-US" sz="1100" dirty="0">
+                <a:latin typeface="Calibri"/>
+                <a:ea typeface="Calibri"/>
+                <a:cs typeface="Calibri"/>
+                <a:sym typeface="Calibri"/>
+              </a:rPr>
+              <a:t>- </a:t>
+            </a:r>
+            <a:r>
+              <a:rPr lang="en-US" sz="1100" u="sng" dirty="0">
+                <a:solidFill>
+                  <a:schemeClr val="hlink"/>
+                </a:solidFill>
+                <a:latin typeface="Calibri"/>
+                <a:ea typeface="Calibri"/>
+                <a:cs typeface="Calibri"/>
+                <a:sym typeface="Calibri"/>
+                <a:hlinkClick r:id="rId5"/>
+              </a:rPr>
+              <a:t>https://stackoverflow.com/questions/47537318/b-tree-index-vs-inverted-index</a:t>
+            </a:r>
+            <a:r>
+              <a:rPr lang="en-US" sz="1100" dirty="0">
+                <a:latin typeface="Calibri"/>
+                <a:ea typeface="Calibri"/>
+                <a:cs typeface="Calibri"/>
+                <a:sym typeface="Calibri"/>
+              </a:rPr>
+              <a:t> </a:t>
+            </a:r>
+            <a:endParaRPr sz="1100" dirty="0">
+              <a:latin typeface="Calibri"/>
+              <a:ea typeface="Calibri"/>
+              <a:cs typeface="Calibri"/>
+              <a:sym typeface="Calibri"/>
+            </a:endParaRPr>
+          </a:p>
+          <a:p>
+            <a:pPr marL="0" lvl="0" indent="0" algn="l" rtl="0">
+              <a:spcBef>
+                <a:spcPts val="0"/>
+              </a:spcBef>
+              <a:spcAft>
+                <a:spcPts val="0"/>
+              </a:spcAft>
+              <a:buNone/>
+            </a:pPr>
+            <a:r>
+              <a:rPr lang="en-US" sz="1100" dirty="0">
+                <a:latin typeface="Calibri"/>
+                <a:ea typeface="Calibri"/>
+                <a:cs typeface="Calibri"/>
+                <a:sym typeface="Calibri"/>
+              </a:rPr>
+              <a:t>- </a:t>
+            </a:r>
+            <a:r>
+              <a:rPr lang="en-US" sz="1100" u="sng" dirty="0">
+                <a:solidFill>
+                  <a:schemeClr val="hlink"/>
+                </a:solidFill>
+                <a:latin typeface="Calibri"/>
+                <a:ea typeface="Calibri"/>
+                <a:cs typeface="Calibri"/>
+                <a:sym typeface="Calibri"/>
+                <a:hlinkClick r:id="rId6"/>
+              </a:rPr>
+              <a:t>https://en.wikipedia.org/wiki/Inverted_index</a:t>
+            </a:r>
+            <a:r>
+              <a:rPr lang="en-US" sz="1100" dirty="0">
+                <a:latin typeface="Calibri"/>
+                <a:ea typeface="Calibri"/>
+                <a:cs typeface="Calibri"/>
+                <a:sym typeface="Calibri"/>
+              </a:rPr>
+              <a:t> </a:t>
+            </a:r>
+            <a:endParaRPr dirty="0">
+              <a:latin typeface="Calibri"/>
+              <a:ea typeface="Calibri"/>
+              <a:cs typeface="Calibri"/>
+              <a:sym typeface="Calibri"/>
+            </a:endParaRPr>
+          </a:p>
+        </p:txBody>
+      </p:sp>
+    </p:spTree>
   </p:cSld>
   <p:clrMapOvr>
     <a:masterClrMapping/>
